--- a/design/templates/ion-boardroom/template.pptx
+++ b/design/templates/ion-boardroom/template.pptx
@@ -434,7 +434,7 @@
             </a:lvl1pPr>
           </a:lstStyle>
           <a:p>
-            <a:fld id="{91D5A71C-095D-4D8D-B06B-C24FC842AAAF}" type="datetimeFigureOut">
+            <a:fld id="{7B725182-F003-4077-8770-ED171BB46558}" type="datetimeFigureOut">
               <a:rPr lang="en-US" smtClean="0"/>
               <a:t>10/3/2026</a:t>
             </a:fld>
@@ -532,7 +532,7 @@
           <a:bodyPr/>
           <a:lstStyle/>
           <a:p>
-            <a:fld id="{67E77E8F-6FD3-4FA1-8A93-F369CE057DF3}" type="slidenum">
+            <a:fld id="{0120019D-D5E9-42EC-8806-1AB6BBDB44DC}" type="slidenum">
               <a:rPr lang="en-US" smtClean="0"/>
               <a:t>‹#›</a:t>
             </a:fld>
@@ -543,7 +543,7 @@
     </p:spTree>
     <p:extLst>
       <p:ext uri="{BB962C8B-B14F-4D97-AF65-F5344CB8AC3E}">
-        <p14:creationId xmlns:p14="http://schemas.microsoft.com/office/powerpoint/2010/main" val="2738409886"/>
+        <p14:creationId xmlns:p14="http://schemas.microsoft.com/office/powerpoint/2010/main" val="1898320518"/>
       </p:ext>
     </p:extLst>
   </p:cSld>
@@ -617,7 +617,7 @@
           <a:bodyPr/>
           <a:lstStyle/>
           <a:p>
-            <a:fld id="{91D5A71C-095D-4D8D-B06B-C24FC842AAAF}" type="datetimeFigureOut">
+            <a:fld id="{7B725182-F003-4077-8770-ED171BB46558}" type="datetimeFigureOut">
               <a:rPr lang="en-US" smtClean="0"/>
               <a:t>10/3/2026</a:t>
             </a:fld>
@@ -659,7 +659,7 @@
           <a:bodyPr/>
           <a:lstStyle/>
           <a:p>
-            <a:fld id="{67E77E8F-6FD3-4FA1-8A93-F369CE057DF3}" type="slidenum">
+            <a:fld id="{0120019D-D5E9-42EC-8806-1AB6BBDB44DC}" type="slidenum">
               <a:rPr lang="en-US" smtClean="0"/>
               <a:t>‹#›</a:t>
             </a:fld>
@@ -672,7 +672,7 @@
           <p:cNvPr id="2" name="body">
             <a:extLst>
               <a:ext uri="{FF2B5EF4-FFF2-40B4-BE49-F238E27FC236}">
-                <a16:creationId xmlns:a16="http://schemas.microsoft.com/office/drawing/2014/main" id="{D43FB498-7E49-1B80-A48B-49419B78DB4C}"/>
+                <a16:creationId xmlns:a16="http://schemas.microsoft.com/office/drawing/2014/main" id="{AF9EB742-822E-D5AF-80B7-8C8F8031D2BF}"/>
               </a:ext>
             </a:extLst>
           </p:cNvPr>
@@ -712,7 +712,7 @@
           <p:cNvPr id="6" name="source">
             <a:extLst>
               <a:ext uri="{FF2B5EF4-FFF2-40B4-BE49-F238E27FC236}">
-                <a16:creationId xmlns:a16="http://schemas.microsoft.com/office/drawing/2014/main" id="{9094217D-EC41-B753-7700-95E2748E0957}"/>
+                <a16:creationId xmlns:a16="http://schemas.microsoft.com/office/drawing/2014/main" id="{FDB8F34F-5855-D1D8-4A80-3751EB279C4F}"/>
               </a:ext>
             </a:extLst>
           </p:cNvPr>
@@ -767,7 +767,7 @@
     </p:spTree>
     <p:extLst>
       <p:ext uri="{BB962C8B-B14F-4D97-AF65-F5344CB8AC3E}">
-        <p14:creationId xmlns:p14="http://schemas.microsoft.com/office/powerpoint/2010/main" val="2614080451"/>
+        <p14:creationId xmlns:p14="http://schemas.microsoft.com/office/powerpoint/2010/main" val="3537921216"/>
       </p:ext>
     </p:extLst>
   </p:cSld>
@@ -841,7 +841,7 @@
           <a:bodyPr/>
           <a:lstStyle/>
           <a:p>
-            <a:fld id="{91D5A71C-095D-4D8D-B06B-C24FC842AAAF}" type="datetimeFigureOut">
+            <a:fld id="{7B725182-F003-4077-8770-ED171BB46558}" type="datetimeFigureOut">
               <a:rPr lang="en-US" smtClean="0"/>
               <a:t>10/3/2026</a:t>
             </a:fld>
@@ -883,7 +883,7 @@
           <a:bodyPr/>
           <a:lstStyle/>
           <a:p>
-            <a:fld id="{67E77E8F-6FD3-4FA1-8A93-F369CE057DF3}" type="slidenum">
+            <a:fld id="{0120019D-D5E9-42EC-8806-1AB6BBDB44DC}" type="slidenum">
               <a:rPr lang="en-US" smtClean="0"/>
               <a:t>‹#›</a:t>
             </a:fld>
@@ -896,7 +896,7 @@
           <p:cNvPr id="2" name="body">
             <a:extLst>
               <a:ext uri="{FF2B5EF4-FFF2-40B4-BE49-F238E27FC236}">
-                <a16:creationId xmlns:a16="http://schemas.microsoft.com/office/drawing/2014/main" id="{ABD2A832-2EA4-D1FA-F807-E27A6B3EBFD4}"/>
+                <a16:creationId xmlns:a16="http://schemas.microsoft.com/office/drawing/2014/main" id="{5ACB59AC-F5F3-CD21-9E3E-C08C3A15D24E}"/>
               </a:ext>
             </a:extLst>
           </p:cNvPr>
@@ -939,7 +939,7 @@
     </p:spTree>
     <p:extLst>
       <p:ext uri="{BB962C8B-B14F-4D97-AF65-F5344CB8AC3E}">
-        <p14:creationId xmlns:p14="http://schemas.microsoft.com/office/powerpoint/2010/main" val="2572932673"/>
+        <p14:creationId xmlns:p14="http://schemas.microsoft.com/office/powerpoint/2010/main" val="983517921"/>
       </p:ext>
     </p:extLst>
   </p:cSld>
@@ -1015,7 +1015,7 @@
           <p:cNvPr id="2" name="section_number">
             <a:extLst>
               <a:ext uri="{FF2B5EF4-FFF2-40B4-BE49-F238E27FC236}">
-                <a16:creationId xmlns:a16="http://schemas.microsoft.com/office/drawing/2014/main" id="{83B22143-59E2-B7DF-39FB-84D505E00621}"/>
+                <a16:creationId xmlns:a16="http://schemas.microsoft.com/office/drawing/2014/main" id="{539B327D-1D70-3511-F9B9-EC587380BDD8}"/>
               </a:ext>
             </a:extLst>
           </p:cNvPr>
@@ -1068,7 +1068,7 @@
           <p:cNvPr id="6" name="subtitle">
             <a:extLst>
               <a:ext uri="{FF2B5EF4-FFF2-40B4-BE49-F238E27FC236}">
-                <a16:creationId xmlns:a16="http://schemas.microsoft.com/office/drawing/2014/main" id="{3FF4D664-8185-F216-F9B2-E2B2CD5E92A9}"/>
+                <a16:creationId xmlns:a16="http://schemas.microsoft.com/office/drawing/2014/main" id="{15BDE912-F1D9-1D38-BF79-AAAB5F764819}"/>
               </a:ext>
             </a:extLst>
           </p:cNvPr>
@@ -1118,7 +1118,7 @@
     </p:spTree>
     <p:extLst>
       <p:ext uri="{BB962C8B-B14F-4D97-AF65-F5344CB8AC3E}">
-        <p14:creationId xmlns:p14="http://schemas.microsoft.com/office/powerpoint/2010/main" val="477988405"/>
+        <p14:creationId xmlns:p14="http://schemas.microsoft.com/office/powerpoint/2010/main" val="1507647896"/>
       </p:ext>
     </p:extLst>
   </p:cSld>
@@ -1192,7 +1192,7 @@
           <a:bodyPr/>
           <a:lstStyle/>
           <a:p>
-            <a:fld id="{91D5A71C-095D-4D8D-B06B-C24FC842AAAF}" type="datetimeFigureOut">
+            <a:fld id="{7B725182-F003-4077-8770-ED171BB46558}" type="datetimeFigureOut">
               <a:rPr lang="en-US" smtClean="0"/>
               <a:t>10/3/2026</a:t>
             </a:fld>
@@ -1234,7 +1234,7 @@
           <a:bodyPr/>
           <a:lstStyle/>
           <a:p>
-            <a:fld id="{67E77E8F-6FD3-4FA1-8A93-F369CE057DF3}" type="slidenum">
+            <a:fld id="{0120019D-D5E9-42EC-8806-1AB6BBDB44DC}" type="slidenum">
               <a:rPr lang="en-US" smtClean="0"/>
               <a:t>‹#›</a:t>
             </a:fld>
@@ -1247,7 +1247,7 @@
           <p:cNvPr id="2" name="item_1_title">
             <a:extLst>
               <a:ext uri="{FF2B5EF4-FFF2-40B4-BE49-F238E27FC236}">
-                <a16:creationId xmlns:a16="http://schemas.microsoft.com/office/drawing/2014/main" id="{45A909D3-79C3-B018-301B-3694320A262B}"/>
+                <a16:creationId xmlns:a16="http://schemas.microsoft.com/office/drawing/2014/main" id="{F21D7261-77BF-02D4-CEDA-8E0DF4C98F59}"/>
               </a:ext>
             </a:extLst>
           </p:cNvPr>
@@ -1275,7 +1275,7 @@
               </a:spcBef>
               <a:buFontTx/>
               <a:buNone/>
-              <a:defRPr sz="2200" b="1">
+              <a:defRPr sz="2000" b="1">
                 <a:solidFill>
                   <a:schemeClr val="accent1"/>
                 </a:solidFill>
@@ -1297,7 +1297,7 @@
           <p:cNvPr id="6" name="item_1">
             <a:extLst>
               <a:ext uri="{FF2B5EF4-FFF2-40B4-BE49-F238E27FC236}">
-                <a16:creationId xmlns:a16="http://schemas.microsoft.com/office/drawing/2014/main" id="{03569941-49B4-4117-E849-08BC1FD93918}"/>
+                <a16:creationId xmlns:a16="http://schemas.microsoft.com/office/drawing/2014/main" id="{16F148BB-EB19-0B2A-E42C-47BF873FA44F}"/>
               </a:ext>
             </a:extLst>
           </p:cNvPr>
@@ -1345,7 +1345,7 @@
           <p:cNvPr id="7" name="item_2_title">
             <a:extLst>
               <a:ext uri="{FF2B5EF4-FFF2-40B4-BE49-F238E27FC236}">
-                <a16:creationId xmlns:a16="http://schemas.microsoft.com/office/drawing/2014/main" id="{197F20B8-A9DF-201C-138D-F99277D44C1D}"/>
+                <a16:creationId xmlns:a16="http://schemas.microsoft.com/office/drawing/2014/main" id="{8390C9CD-44DE-0838-AD53-1CFA45119906}"/>
               </a:ext>
             </a:extLst>
           </p:cNvPr>
@@ -1376,7 +1376,7 @@
               </a:spcBef>
               <a:buFontTx/>
               <a:buNone/>
-              <a:defRPr sz="2200" b="1">
+              <a:defRPr sz="2000" b="1">
                 <a:solidFill>
                   <a:schemeClr val="accent1"/>
                 </a:solidFill>
@@ -1398,7 +1398,7 @@
           <p:cNvPr id="8" name="item_2">
             <a:extLst>
               <a:ext uri="{FF2B5EF4-FFF2-40B4-BE49-F238E27FC236}">
-                <a16:creationId xmlns:a16="http://schemas.microsoft.com/office/drawing/2014/main" id="{850D9235-D870-4EBD-DFD7-E537A6BCDD95}"/>
+                <a16:creationId xmlns:a16="http://schemas.microsoft.com/office/drawing/2014/main" id="{9A330742-DC53-99B7-25BF-6A7A8EF78596}"/>
               </a:ext>
             </a:extLst>
           </p:cNvPr>
@@ -1446,7 +1446,7 @@
           <p:cNvPr id="10" name="item_3_title">
             <a:extLst>
               <a:ext uri="{FF2B5EF4-FFF2-40B4-BE49-F238E27FC236}">
-                <a16:creationId xmlns:a16="http://schemas.microsoft.com/office/drawing/2014/main" id="{180C8159-18FC-BFAC-F8F2-7B938E9A1AE3}"/>
+                <a16:creationId xmlns:a16="http://schemas.microsoft.com/office/drawing/2014/main" id="{378E3E92-02AD-3AD3-73F4-A494F007548E}"/>
               </a:ext>
             </a:extLst>
           </p:cNvPr>
@@ -1477,7 +1477,7 @@
               </a:spcBef>
               <a:buFontTx/>
               <a:buNone/>
-              <a:defRPr sz="2200" b="1">
+              <a:defRPr sz="2000" b="1">
                 <a:solidFill>
                   <a:schemeClr val="accent1"/>
                 </a:solidFill>
@@ -1499,7 +1499,7 @@
           <p:cNvPr id="11" name="item_3">
             <a:extLst>
               <a:ext uri="{FF2B5EF4-FFF2-40B4-BE49-F238E27FC236}">
-                <a16:creationId xmlns:a16="http://schemas.microsoft.com/office/drawing/2014/main" id="{6CCA366C-B3D5-F2A8-D807-B8357E91672C}"/>
+                <a16:creationId xmlns:a16="http://schemas.microsoft.com/office/drawing/2014/main" id="{272FD110-BBCC-DF76-D3E3-844440DAD8FA}"/>
               </a:ext>
             </a:extLst>
           </p:cNvPr>
@@ -1547,7 +1547,7 @@
           <p:cNvPr id="12" name="item_4_title">
             <a:extLst>
               <a:ext uri="{FF2B5EF4-FFF2-40B4-BE49-F238E27FC236}">
-                <a16:creationId xmlns:a16="http://schemas.microsoft.com/office/drawing/2014/main" id="{55E6627F-A2E2-9E4F-92B3-9937DA244029}"/>
+                <a16:creationId xmlns:a16="http://schemas.microsoft.com/office/drawing/2014/main" id="{48BAF2F6-C072-676B-CE0C-77F3EC1062E7}"/>
               </a:ext>
             </a:extLst>
           </p:cNvPr>
@@ -1578,7 +1578,7 @@
               </a:spcBef>
               <a:buFontTx/>
               <a:buNone/>
-              <a:defRPr sz="2200" b="1">
+              <a:defRPr sz="2000" b="1">
                 <a:solidFill>
                   <a:schemeClr val="accent1"/>
                 </a:solidFill>
@@ -1600,7 +1600,7 @@
           <p:cNvPr id="13" name="item_4">
             <a:extLst>
               <a:ext uri="{FF2B5EF4-FFF2-40B4-BE49-F238E27FC236}">
-                <a16:creationId xmlns:a16="http://schemas.microsoft.com/office/drawing/2014/main" id="{E179EE6D-F9EE-8E3A-F802-9B1112E9EB65}"/>
+                <a16:creationId xmlns:a16="http://schemas.microsoft.com/office/drawing/2014/main" id="{0F79C2DF-499F-3D1E-E9D1-DC8D357047FA}"/>
               </a:ext>
             </a:extLst>
           </p:cNvPr>
@@ -1648,7 +1648,7 @@
           <p:cNvPr id="14" name="source">
             <a:extLst>
               <a:ext uri="{FF2B5EF4-FFF2-40B4-BE49-F238E27FC236}">
-                <a16:creationId xmlns:a16="http://schemas.microsoft.com/office/drawing/2014/main" id="{F82DD677-287C-46D5-7808-76947E0F2D54}"/>
+                <a16:creationId xmlns:a16="http://schemas.microsoft.com/office/drawing/2014/main" id="{6DB72AF3-D1FC-C9C1-83CE-2E9A5294DAA2}"/>
               </a:ext>
             </a:extLst>
           </p:cNvPr>
@@ -1703,7 +1703,7 @@
     </p:spTree>
     <p:extLst>
       <p:ext uri="{BB962C8B-B14F-4D97-AF65-F5344CB8AC3E}">
-        <p14:creationId xmlns:p14="http://schemas.microsoft.com/office/powerpoint/2010/main" val="963804112"/>
+        <p14:creationId xmlns:p14="http://schemas.microsoft.com/office/powerpoint/2010/main" val="50176810"/>
       </p:ext>
     </p:extLst>
   </p:cSld>
@@ -1777,7 +1777,7 @@
           <a:bodyPr/>
           <a:lstStyle/>
           <a:p>
-            <a:fld id="{91D5A71C-095D-4D8D-B06B-C24FC842AAAF}" type="datetimeFigureOut">
+            <a:fld id="{7B725182-F003-4077-8770-ED171BB46558}" type="datetimeFigureOut">
               <a:rPr lang="en-US" smtClean="0"/>
               <a:t>10/3/2026</a:t>
             </a:fld>
@@ -1819,7 +1819,7 @@
           <a:bodyPr/>
           <a:lstStyle/>
           <a:p>
-            <a:fld id="{67E77E8F-6FD3-4FA1-8A93-F369CE057DF3}" type="slidenum">
+            <a:fld id="{0120019D-D5E9-42EC-8806-1AB6BBDB44DC}" type="slidenum">
               <a:rPr lang="en-US" smtClean="0"/>
               <a:t>‹#›</a:t>
             </a:fld>
@@ -1832,7 +1832,7 @@
           <p:cNvPr id="2" name="body">
             <a:extLst>
               <a:ext uri="{FF2B5EF4-FFF2-40B4-BE49-F238E27FC236}">
-                <a16:creationId xmlns:a16="http://schemas.microsoft.com/office/drawing/2014/main" id="{9AA6C1D2-F0C6-E02B-6610-05F159D2DCCF}"/>
+                <a16:creationId xmlns:a16="http://schemas.microsoft.com/office/drawing/2014/main" id="{AC6B63BF-7849-E36E-3675-2F0523CBFA7D}"/>
               </a:ext>
             </a:extLst>
           </p:cNvPr>
@@ -1877,7 +1877,7 @@
           <p:cNvPr id="6" name="source">
             <a:extLst>
               <a:ext uri="{FF2B5EF4-FFF2-40B4-BE49-F238E27FC236}">
-                <a16:creationId xmlns:a16="http://schemas.microsoft.com/office/drawing/2014/main" id="{96419EB2-3952-E088-7776-5BD1E2CD173A}"/>
+                <a16:creationId xmlns:a16="http://schemas.microsoft.com/office/drawing/2014/main" id="{E16EEB49-035D-A3D5-26DE-4C91003FAD49}"/>
               </a:ext>
             </a:extLst>
           </p:cNvPr>
@@ -1932,7 +1932,7 @@
     </p:spTree>
     <p:extLst>
       <p:ext uri="{BB962C8B-B14F-4D97-AF65-F5344CB8AC3E}">
-        <p14:creationId xmlns:p14="http://schemas.microsoft.com/office/powerpoint/2010/main" val="1767582809"/>
+        <p14:creationId xmlns:p14="http://schemas.microsoft.com/office/powerpoint/2010/main" val="4073479513"/>
       </p:ext>
     </p:extLst>
   </p:cSld>
@@ -2006,7 +2006,7 @@
           <a:bodyPr/>
           <a:lstStyle/>
           <a:p>
-            <a:fld id="{91D5A71C-095D-4D8D-B06B-C24FC842AAAF}" type="datetimeFigureOut">
+            <a:fld id="{7B725182-F003-4077-8770-ED171BB46558}" type="datetimeFigureOut">
               <a:rPr lang="en-US" smtClean="0"/>
               <a:t>10/3/2026</a:t>
             </a:fld>
@@ -2048,7 +2048,7 @@
           <a:bodyPr/>
           <a:lstStyle/>
           <a:p>
-            <a:fld id="{67E77E8F-6FD3-4FA1-8A93-F369CE057DF3}" type="slidenum">
+            <a:fld id="{0120019D-D5E9-42EC-8806-1AB6BBDB44DC}" type="slidenum">
               <a:rPr lang="en-US" smtClean="0"/>
               <a:t>‹#›</a:t>
             </a:fld>
@@ -2061,7 +2061,7 @@
           <p:cNvPr id="2" name="item_1_title">
             <a:extLst>
               <a:ext uri="{FF2B5EF4-FFF2-40B4-BE49-F238E27FC236}">
-                <a16:creationId xmlns:a16="http://schemas.microsoft.com/office/drawing/2014/main" id="{FEB02461-9DC5-EC5F-94D2-3FE2B5727DF0}"/>
+                <a16:creationId xmlns:a16="http://schemas.microsoft.com/office/drawing/2014/main" id="{DE0890B0-9E7C-B834-0C7A-50C945AC33CF}"/>
               </a:ext>
             </a:extLst>
           </p:cNvPr>
@@ -2074,8 +2074,8 @@
         </p:nvSpPr>
         <p:spPr>
           <a:xfrm>
-            <a:off x="1335993" y="2780360"/>
-            <a:ext cx="3960232" cy="308853"/>
+            <a:off x="1313363" y="2758252"/>
+            <a:ext cx="4005492" cy="321858"/>
           </a:xfrm>
         </p:spPr>
         <p:txBody>
@@ -2089,7 +2089,7 @@
               </a:spcBef>
               <a:buFontTx/>
               <a:buNone/>
-              <a:defRPr sz="2200" b="1">
+              <a:defRPr sz="2000" b="1">
                 <a:solidFill>
                   <a:schemeClr val="accent1"/>
                 </a:solidFill>
@@ -2111,7 +2111,7 @@
           <p:cNvPr id="6" name="item_1">
             <a:extLst>
               <a:ext uri="{FF2B5EF4-FFF2-40B4-BE49-F238E27FC236}">
-                <a16:creationId xmlns:a16="http://schemas.microsoft.com/office/drawing/2014/main" id="{B68E1D00-7EDE-AFA0-70A0-683BF7C04C38}"/>
+                <a16:creationId xmlns:a16="http://schemas.microsoft.com/office/drawing/2014/main" id="{FDA1EC1F-7583-87D1-5206-11AC781F4606}"/>
               </a:ext>
             </a:extLst>
           </p:cNvPr>
@@ -2124,8 +2124,8 @@
         </p:nvSpPr>
         <p:spPr>
           <a:xfrm>
-            <a:off x="1335993" y="3089213"/>
-            <a:ext cx="3960232" cy="741248"/>
+            <a:off x="1313363" y="3080111"/>
+            <a:ext cx="4005492" cy="772459"/>
           </a:xfrm>
           <a:prstGeom prst="rect">
             <a:avLst/>
@@ -2159,7 +2159,7 @@
           <p:cNvPr id="7" name="item_2_title">
             <a:extLst>
               <a:ext uri="{FF2B5EF4-FFF2-40B4-BE49-F238E27FC236}">
-                <a16:creationId xmlns:a16="http://schemas.microsoft.com/office/drawing/2014/main" id="{FE7C6740-1AB6-870D-467F-1ABD7C7CAA2A}"/>
+                <a16:creationId xmlns:a16="http://schemas.microsoft.com/office/drawing/2014/main" id="{F9F02E0E-DB52-30C4-B729-8C87602A521E}"/>
               </a:ext>
             </a:extLst>
           </p:cNvPr>
@@ -2172,8 +2172,8 @@
         </p:nvSpPr>
         <p:spPr>
           <a:xfrm>
-            <a:off x="5839342" y="2780360"/>
-            <a:ext cx="3960232" cy="308853"/>
+            <a:off x="5816712" y="2758252"/>
+            <a:ext cx="4005492" cy="321858"/>
           </a:xfrm>
           <a:prstGeom prst="rect">
             <a:avLst/>
@@ -2190,7 +2190,7 @@
               </a:spcBef>
               <a:buFontTx/>
               <a:buNone/>
-              <a:defRPr sz="2200" b="1">
+              <a:defRPr sz="2000" b="1">
                 <a:solidFill>
                   <a:schemeClr val="accent1"/>
                 </a:solidFill>
@@ -2212,7 +2212,7 @@
           <p:cNvPr id="8" name="item_2">
             <a:extLst>
               <a:ext uri="{FF2B5EF4-FFF2-40B4-BE49-F238E27FC236}">
-                <a16:creationId xmlns:a16="http://schemas.microsoft.com/office/drawing/2014/main" id="{516F6D8A-7FE8-148D-7E3A-630AA6B4027F}"/>
+                <a16:creationId xmlns:a16="http://schemas.microsoft.com/office/drawing/2014/main" id="{8B215D1F-9E19-3A34-9F81-733D8E5D0D07}"/>
               </a:ext>
             </a:extLst>
           </p:cNvPr>
@@ -2225,8 +2225,8 @@
         </p:nvSpPr>
         <p:spPr>
           <a:xfrm>
-            <a:off x="5839342" y="3089213"/>
-            <a:ext cx="3960232" cy="741248"/>
+            <a:off x="5816712" y="3080111"/>
+            <a:ext cx="4005492" cy="772459"/>
           </a:xfrm>
           <a:prstGeom prst="rect">
             <a:avLst/>
@@ -2260,7 +2260,7 @@
           <p:cNvPr id="10" name="item_3_title">
             <a:extLst>
               <a:ext uri="{FF2B5EF4-FFF2-40B4-BE49-F238E27FC236}">
-                <a16:creationId xmlns:a16="http://schemas.microsoft.com/office/drawing/2014/main" id="{4E562231-8A72-9070-8720-4D103325AADA}"/>
+                <a16:creationId xmlns:a16="http://schemas.microsoft.com/office/drawing/2014/main" id="{D98BEFD9-41B0-0FDB-AF64-F0F1A289A7A8}"/>
               </a:ext>
             </a:extLst>
           </p:cNvPr>
@@ -2273,8 +2273,8 @@
         </p:nvSpPr>
         <p:spPr>
           <a:xfrm>
-            <a:off x="1335993" y="4361040"/>
-            <a:ext cx="3960232" cy="308853"/>
+            <a:off x="1313363" y="4338932"/>
+            <a:ext cx="4005492" cy="321858"/>
           </a:xfrm>
           <a:prstGeom prst="rect">
             <a:avLst/>
@@ -2291,7 +2291,7 @@
               </a:spcBef>
               <a:buFontTx/>
               <a:buNone/>
-              <a:defRPr sz="2200" b="1">
+              <a:defRPr sz="2000" b="1">
                 <a:solidFill>
                   <a:schemeClr val="accent1"/>
                 </a:solidFill>
@@ -2313,7 +2313,7 @@
           <p:cNvPr id="11" name="item_3">
             <a:extLst>
               <a:ext uri="{FF2B5EF4-FFF2-40B4-BE49-F238E27FC236}">
-                <a16:creationId xmlns:a16="http://schemas.microsoft.com/office/drawing/2014/main" id="{B29B7752-3AD2-1D67-0659-E481AEEBC699}"/>
+                <a16:creationId xmlns:a16="http://schemas.microsoft.com/office/drawing/2014/main" id="{B2F9C0D4-10F7-B49A-73F4-19AAF72AC7B9}"/>
               </a:ext>
             </a:extLst>
           </p:cNvPr>
@@ -2326,8 +2326,8 @@
         </p:nvSpPr>
         <p:spPr>
           <a:xfrm>
-            <a:off x="1335993" y="4669892"/>
-            <a:ext cx="3960232" cy="741248"/>
+            <a:off x="1313363" y="4660790"/>
+            <a:ext cx="4005492" cy="772459"/>
           </a:xfrm>
           <a:prstGeom prst="rect">
             <a:avLst/>
@@ -2361,7 +2361,7 @@
           <p:cNvPr id="12" name="item_4_title">
             <a:extLst>
               <a:ext uri="{FF2B5EF4-FFF2-40B4-BE49-F238E27FC236}">
-                <a16:creationId xmlns:a16="http://schemas.microsoft.com/office/drawing/2014/main" id="{4DAD5293-9F88-F160-877F-752F4EB6E875}"/>
+                <a16:creationId xmlns:a16="http://schemas.microsoft.com/office/drawing/2014/main" id="{5E61DADF-E650-E7BC-482D-47AEE05BBC32}"/>
               </a:ext>
             </a:extLst>
           </p:cNvPr>
@@ -2374,8 +2374,8 @@
         </p:nvSpPr>
         <p:spPr>
           <a:xfrm>
-            <a:off x="5839342" y="4361040"/>
-            <a:ext cx="3960232" cy="308853"/>
+            <a:off x="5816712" y="4338932"/>
+            <a:ext cx="4005492" cy="321858"/>
           </a:xfrm>
           <a:prstGeom prst="rect">
             <a:avLst/>
@@ -2392,7 +2392,7 @@
               </a:spcBef>
               <a:buFontTx/>
               <a:buNone/>
-              <a:defRPr sz="2200" b="1">
+              <a:defRPr sz="2000" b="1">
                 <a:solidFill>
                   <a:schemeClr val="accent1"/>
                 </a:solidFill>
@@ -2414,7 +2414,7 @@
           <p:cNvPr id="13" name="item_4">
             <a:extLst>
               <a:ext uri="{FF2B5EF4-FFF2-40B4-BE49-F238E27FC236}">
-                <a16:creationId xmlns:a16="http://schemas.microsoft.com/office/drawing/2014/main" id="{E2C05099-CA5D-0FBA-1899-28BC4FE87DDB}"/>
+                <a16:creationId xmlns:a16="http://schemas.microsoft.com/office/drawing/2014/main" id="{F9377C26-2DC5-0D68-B515-CA80A5ADAFCD}"/>
               </a:ext>
             </a:extLst>
           </p:cNvPr>
@@ -2427,8 +2427,8 @@
         </p:nvSpPr>
         <p:spPr>
           <a:xfrm>
-            <a:off x="5839342" y="4669892"/>
-            <a:ext cx="3960232" cy="741248"/>
+            <a:off x="5816712" y="4660790"/>
+            <a:ext cx="4005492" cy="772459"/>
           </a:xfrm>
           <a:prstGeom prst="rect">
             <a:avLst/>
@@ -2462,7 +2462,7 @@
           <p:cNvPr id="14" name="source">
             <a:extLst>
               <a:ext uri="{FF2B5EF4-FFF2-40B4-BE49-F238E27FC236}">
-                <a16:creationId xmlns:a16="http://schemas.microsoft.com/office/drawing/2014/main" id="{C1D9E5EE-A579-B274-027E-4B00E5D68AB5}"/>
+                <a16:creationId xmlns:a16="http://schemas.microsoft.com/office/drawing/2014/main" id="{18E87DD4-2653-3955-EA3E-7A4B75D3BB20}"/>
               </a:ext>
             </a:extLst>
           </p:cNvPr>
@@ -2517,7 +2517,7 @@
     </p:spTree>
     <p:extLst>
       <p:ext uri="{BB962C8B-B14F-4D97-AF65-F5344CB8AC3E}">
-        <p14:creationId xmlns:p14="http://schemas.microsoft.com/office/powerpoint/2010/main" val="4147156999"/>
+        <p14:creationId xmlns:p14="http://schemas.microsoft.com/office/powerpoint/2010/main" val="326264598"/>
       </p:ext>
     </p:extLst>
   </p:cSld>
@@ -2591,7 +2591,7 @@
           <a:bodyPr/>
           <a:lstStyle/>
           <a:p>
-            <a:fld id="{91D5A71C-095D-4D8D-B06B-C24FC842AAAF}" type="datetimeFigureOut">
+            <a:fld id="{7B725182-F003-4077-8770-ED171BB46558}" type="datetimeFigureOut">
               <a:rPr lang="en-US" smtClean="0"/>
               <a:t>10/3/2026</a:t>
             </a:fld>
@@ -2633,7 +2633,7 @@
           <a:bodyPr/>
           <a:lstStyle/>
           <a:p>
-            <a:fld id="{67E77E8F-6FD3-4FA1-8A93-F369CE057DF3}" type="slidenum">
+            <a:fld id="{0120019D-D5E9-42EC-8806-1AB6BBDB44DC}" type="slidenum">
               <a:rPr lang="en-US" smtClean="0"/>
               <a:t>‹#›</a:t>
             </a:fld>
@@ -2646,7 +2646,7 @@
           <p:cNvPr id="2" name="body">
             <a:extLst>
               <a:ext uri="{FF2B5EF4-FFF2-40B4-BE49-F238E27FC236}">
-                <a16:creationId xmlns:a16="http://schemas.microsoft.com/office/drawing/2014/main" id="{158E5936-607F-A9A8-0E86-BA756844C9C2}"/>
+                <a16:creationId xmlns:a16="http://schemas.microsoft.com/office/drawing/2014/main" id="{D8022BE7-929E-5277-94A9-CE9D40F524E4}"/>
               </a:ext>
             </a:extLst>
           </p:cNvPr>
@@ -2686,7 +2686,7 @@
           <p:cNvPr id="6" name="kpi_value_1">
             <a:extLst>
               <a:ext uri="{FF2B5EF4-FFF2-40B4-BE49-F238E27FC236}">
-                <a16:creationId xmlns:a16="http://schemas.microsoft.com/office/drawing/2014/main" id="{668BDEDB-04FD-6DB9-33F6-024743063E16}"/>
+                <a16:creationId xmlns:a16="http://schemas.microsoft.com/office/drawing/2014/main" id="{18A111E2-6B7E-6D31-1E50-CAE6C050727E}"/>
               </a:ext>
             </a:extLst>
           </p:cNvPr>
@@ -2739,7 +2739,7 @@
           <p:cNvPr id="7" name="kpi_label_1">
             <a:extLst>
               <a:ext uri="{FF2B5EF4-FFF2-40B4-BE49-F238E27FC236}">
-                <a16:creationId xmlns:a16="http://schemas.microsoft.com/office/drawing/2014/main" id="{9F724063-D820-BB7D-5780-5719E64B4A56}"/>
+                <a16:creationId xmlns:a16="http://schemas.microsoft.com/office/drawing/2014/main" id="{EE5E32CB-93FB-3460-EA42-2813946DF891}"/>
               </a:ext>
             </a:extLst>
           </p:cNvPr>
@@ -2770,7 +2770,7 @@
               </a:spcBef>
               <a:buFontTx/>
               <a:buNone/>
-              <a:defRPr sz="1800"/>
+              <a:defRPr sz="2000"/>
             </a:lvl1pPr>
           </a:lstStyle>
           <a:p>
@@ -2787,7 +2787,7 @@
           <p:cNvPr id="8" name="source">
             <a:extLst>
               <a:ext uri="{FF2B5EF4-FFF2-40B4-BE49-F238E27FC236}">
-                <a16:creationId xmlns:a16="http://schemas.microsoft.com/office/drawing/2014/main" id="{F7CB0CCA-7ED3-3122-D1EB-6328C3A65B60}"/>
+                <a16:creationId xmlns:a16="http://schemas.microsoft.com/office/drawing/2014/main" id="{83FD942E-7477-DBAE-EC4D-74AD79C8596E}"/>
               </a:ext>
             </a:extLst>
           </p:cNvPr>
@@ -2842,7 +2842,7 @@
     </p:spTree>
     <p:extLst>
       <p:ext uri="{BB962C8B-B14F-4D97-AF65-F5344CB8AC3E}">
-        <p14:creationId xmlns:p14="http://schemas.microsoft.com/office/powerpoint/2010/main" val="1543496800"/>
+        <p14:creationId xmlns:p14="http://schemas.microsoft.com/office/powerpoint/2010/main" val="3109405656"/>
       </p:ext>
     </p:extLst>
   </p:cSld>
@@ -2916,7 +2916,7 @@
           <a:bodyPr/>
           <a:lstStyle/>
           <a:p>
-            <a:fld id="{91D5A71C-095D-4D8D-B06B-C24FC842AAAF}" type="datetimeFigureOut">
+            <a:fld id="{7B725182-F003-4077-8770-ED171BB46558}" type="datetimeFigureOut">
               <a:rPr lang="en-US" smtClean="0"/>
               <a:t>10/3/2026</a:t>
             </a:fld>
@@ -2958,7 +2958,7 @@
           <a:bodyPr/>
           <a:lstStyle/>
           <a:p>
-            <a:fld id="{67E77E8F-6FD3-4FA1-8A93-F369CE057DF3}" type="slidenum">
+            <a:fld id="{0120019D-D5E9-42EC-8806-1AB6BBDB44DC}" type="slidenum">
               <a:rPr lang="en-US" smtClean="0"/>
               <a:t>‹#›</a:t>
             </a:fld>
@@ -2971,7 +2971,7 @@
           <p:cNvPr id="2" name="body">
             <a:extLst>
               <a:ext uri="{FF2B5EF4-FFF2-40B4-BE49-F238E27FC236}">
-                <a16:creationId xmlns:a16="http://schemas.microsoft.com/office/drawing/2014/main" id="{5A1EF005-DA72-4EEC-55B4-0575C11C1B85}"/>
+                <a16:creationId xmlns:a16="http://schemas.microsoft.com/office/drawing/2014/main" id="{67253F40-1F7E-78E5-2249-18FB8A4BA732}"/>
               </a:ext>
             </a:extLst>
           </p:cNvPr>
@@ -3011,7 +3011,7 @@
           <p:cNvPr id="6" name="kpi_value_1">
             <a:extLst>
               <a:ext uri="{FF2B5EF4-FFF2-40B4-BE49-F238E27FC236}">
-                <a16:creationId xmlns:a16="http://schemas.microsoft.com/office/drawing/2014/main" id="{7810CAA4-9721-09C6-D08C-B68E39A6ADA2}"/>
+                <a16:creationId xmlns:a16="http://schemas.microsoft.com/office/drawing/2014/main" id="{3E8AC444-AA6B-A128-2EDC-5772E3B2C510}"/>
               </a:ext>
             </a:extLst>
           </p:cNvPr>
@@ -3024,109 +3024,8 @@
         </p:nvSpPr>
         <p:spPr>
           <a:xfrm>
-            <a:off x="1335994" y="2780360"/>
-            <a:ext cx="4050751" cy="1269123"/>
-          </a:xfrm>
-          <a:prstGeom prst="rect">
-            <a:avLst/>
-          </a:prstGeom>
-        </p:spPr>
-        <p:txBody>
-          <a:bodyPr wrap="square" anchor="t">
-            <a:noAutofit/>
-          </a:bodyPr>
-          <a:lstStyle>
-            <a:lvl1pPr marL="0" indent="0">
-              <a:spcBef>
-                <a:spcPts val="0"/>
-              </a:spcBef>
-              <a:buFontTx/>
-              <a:buNone/>
-              <a:defRPr sz="8400" b="1">
-                <a:solidFill>
-                  <a:schemeClr val="accent1"/>
-                </a:solidFill>
-                <a:latin typeface="+mj-lt"/>
-              </a:defRPr>
-            </a:lvl1pPr>
-          </a:lstStyle>
-          <a:p>
-            <a:pPr lvl="0"/>
-            <a:r>
-              <a:rPr lang="en-US"/>
-              <a:t>kpi_value_1</a:t>
-            </a:r>
-          </a:p>
-        </p:txBody>
-      </p:sp>
-      <p:sp>
-        <p:nvSpPr>
-          <p:cNvPr id="7" name="kpi_label_1">
-            <a:extLst>
-              <a:ext uri="{FF2B5EF4-FFF2-40B4-BE49-F238E27FC236}">
-                <a16:creationId xmlns:a16="http://schemas.microsoft.com/office/drawing/2014/main" id="{8DBE6B8E-9630-EB40-C9DC-C0A897BCB1C7}"/>
-              </a:ext>
-            </a:extLst>
-          </p:cNvPr>
-          <p:cNvSpPr>
-            <a:spLocks noGrp="1"/>
-          </p:cNvSpPr>
-          <p:nvPr>
-            <p:ph type="body" sz="quarter" idx="15" hasCustomPrompt="1"/>
-          </p:nvPr>
-        </p:nvSpPr>
-        <p:spPr>
-          <a:xfrm>
-            <a:off x="1335994" y="4049482"/>
-            <a:ext cx="4050751" cy="705068"/>
-          </a:xfrm>
-          <a:prstGeom prst="rect">
-            <a:avLst/>
-          </a:prstGeom>
-        </p:spPr>
-        <p:txBody>
-          <a:bodyPr wrap="square" anchor="t">
-            <a:noAutofit/>
-          </a:bodyPr>
-          <a:lstStyle>
-            <a:lvl1pPr marL="0" indent="0">
-              <a:spcBef>
-                <a:spcPts val="0"/>
-              </a:spcBef>
-              <a:buFontTx/>
-              <a:buNone/>
-              <a:defRPr sz="1800"/>
-            </a:lvl1pPr>
-          </a:lstStyle>
-          <a:p>
-            <a:pPr lvl="0"/>
-            <a:r>
-              <a:rPr lang="en-US"/>
-              <a:t>kpi_label_1</a:t>
-            </a:r>
-          </a:p>
-        </p:txBody>
-      </p:sp>
-      <p:sp>
-        <p:nvSpPr>
-          <p:cNvPr id="8" name="kpi_value_2">
-            <a:extLst>
-              <a:ext uri="{FF2B5EF4-FFF2-40B4-BE49-F238E27FC236}">
-                <a16:creationId xmlns:a16="http://schemas.microsoft.com/office/drawing/2014/main" id="{8328C9F8-6D16-E5CD-EF06-E83FC1312E56}"/>
-              </a:ext>
-            </a:extLst>
-          </p:cNvPr>
-          <p:cNvSpPr>
-            <a:spLocks noGrp="1"/>
-          </p:cNvSpPr>
-          <p:nvPr>
-            <p:ph type="body" sz="quarter" idx="16" hasCustomPrompt="1"/>
-          </p:nvPr>
-        </p:nvSpPr>
-        <p:spPr>
-          <a:xfrm>
-            <a:off x="5929862" y="2780360"/>
-            <a:ext cx="3869712" cy="464019"/>
+            <a:off x="1313364" y="2758253"/>
+            <a:ext cx="4096011" cy="1297547"/>
           </a:xfrm>
           <a:prstGeom prst="rect">
             <a:avLst/>
@@ -3155,31 +3054,31 @@
             <a:pPr lvl="0"/>
             <a:r>
               <a:rPr lang="en-US"/>
-              <a:t>kpi_value_2</a:t>
-            </a:r>
-          </a:p>
-        </p:txBody>
-      </p:sp>
-      <p:sp>
-        <p:nvSpPr>
-          <p:cNvPr id="10" name="kpi_label_2">
-            <a:extLst>
-              <a:ext uri="{FF2B5EF4-FFF2-40B4-BE49-F238E27FC236}">
-                <a16:creationId xmlns:a16="http://schemas.microsoft.com/office/drawing/2014/main" id="{B1E4079C-3946-8661-54D5-9D150C23FACA}"/>
-              </a:ext>
-            </a:extLst>
-          </p:cNvPr>
-          <p:cNvSpPr>
-            <a:spLocks noGrp="1"/>
-          </p:cNvSpPr>
-          <p:nvPr>
-            <p:ph type="body" sz="quarter" idx="17" hasCustomPrompt="1"/>
-          </p:nvPr>
-        </p:nvSpPr>
-        <p:spPr>
-          <a:xfrm>
-            <a:off x="5929862" y="3244378"/>
-            <a:ext cx="3869712" cy="257788"/>
+              <a:t>kpi_value_1</a:t>
+            </a:r>
+          </a:p>
+        </p:txBody>
+      </p:sp>
+      <p:sp>
+        <p:nvSpPr>
+          <p:cNvPr id="7" name="kpi_label_1">
+            <a:extLst>
+              <a:ext uri="{FF2B5EF4-FFF2-40B4-BE49-F238E27FC236}">
+                <a16:creationId xmlns:a16="http://schemas.microsoft.com/office/drawing/2014/main" id="{782094AC-7E54-04C5-A469-75E6A3BEA48D}"/>
+              </a:ext>
+            </a:extLst>
+          </p:cNvPr>
+          <p:cNvSpPr>
+            <a:spLocks noGrp="1"/>
+          </p:cNvSpPr>
+          <p:nvPr>
+            <p:ph type="body" sz="quarter" idx="15" hasCustomPrompt="1"/>
+          </p:nvPr>
+        </p:nvSpPr>
+        <p:spPr>
+          <a:xfrm>
+            <a:off x="1313364" y="4055800"/>
+            <a:ext cx="4096011" cy="720859"/>
           </a:xfrm>
           <a:prstGeom prst="rect">
             <a:avLst/>
@@ -3196,38 +3095,38 @@
               </a:spcBef>
               <a:buFontTx/>
               <a:buNone/>
-              <a:defRPr sz="1800"/>
-            </a:lvl1pPr>
-          </a:lstStyle>
-          <a:p>
-            <a:pPr lvl="0"/>
-            <a:r>
-              <a:rPr lang="en-US"/>
-              <a:t>kpi_label_2</a:t>
-            </a:r>
-          </a:p>
-        </p:txBody>
-      </p:sp>
-      <p:sp>
-        <p:nvSpPr>
-          <p:cNvPr id="11" name="kpi_value_3">
-            <a:extLst>
-              <a:ext uri="{FF2B5EF4-FFF2-40B4-BE49-F238E27FC236}">
-                <a16:creationId xmlns:a16="http://schemas.microsoft.com/office/drawing/2014/main" id="{D5E78AE0-C9DB-E2C4-A406-C5E52ABCAA08}"/>
-              </a:ext>
-            </a:extLst>
-          </p:cNvPr>
-          <p:cNvSpPr>
-            <a:spLocks noGrp="1"/>
-          </p:cNvSpPr>
-          <p:nvPr>
-            <p:ph type="body" sz="quarter" idx="18" hasCustomPrompt="1"/>
-          </p:nvPr>
-        </p:nvSpPr>
-        <p:spPr>
-          <a:xfrm>
-            <a:off x="5929863" y="4032745"/>
-            <a:ext cx="1663297" cy="464019"/>
+              <a:defRPr sz="2000"/>
+            </a:lvl1pPr>
+          </a:lstStyle>
+          <a:p>
+            <a:pPr lvl="0"/>
+            <a:r>
+              <a:rPr lang="en-US"/>
+              <a:t>kpi_label_1</a:t>
+            </a:r>
+          </a:p>
+        </p:txBody>
+      </p:sp>
+      <p:sp>
+        <p:nvSpPr>
+          <p:cNvPr id="8" name="kpi_value_2">
+            <a:extLst>
+              <a:ext uri="{FF2B5EF4-FFF2-40B4-BE49-F238E27FC236}">
+                <a16:creationId xmlns:a16="http://schemas.microsoft.com/office/drawing/2014/main" id="{E89550B2-C2D2-1DA8-B5F0-210D4FADE162}"/>
+              </a:ext>
+            </a:extLst>
+          </p:cNvPr>
+          <p:cNvSpPr>
+            <a:spLocks noGrp="1"/>
+          </p:cNvSpPr>
+          <p:nvPr>
+            <p:ph type="body" sz="quarter" idx="16" hasCustomPrompt="1"/>
+          </p:nvPr>
+        </p:nvSpPr>
+        <p:spPr>
+          <a:xfrm>
+            <a:off x="5907232" y="2758253"/>
+            <a:ext cx="3914972" cy="492443"/>
           </a:xfrm>
           <a:prstGeom prst="rect">
             <a:avLst/>
@@ -3256,31 +3155,31 @@
             <a:pPr lvl="0"/>
             <a:r>
               <a:rPr lang="en-US"/>
-              <a:t>kpi_value_3</a:t>
-            </a:r>
-          </a:p>
-        </p:txBody>
-      </p:sp>
-      <p:sp>
-        <p:nvSpPr>
-          <p:cNvPr id="12" name="kpi_label_3">
-            <a:extLst>
-              <a:ext uri="{FF2B5EF4-FFF2-40B4-BE49-F238E27FC236}">
-                <a16:creationId xmlns:a16="http://schemas.microsoft.com/office/drawing/2014/main" id="{CB2D838C-4923-0197-32F6-88E5D5D74069}"/>
-              </a:ext>
-            </a:extLst>
-          </p:cNvPr>
-          <p:cNvSpPr>
-            <a:spLocks noGrp="1"/>
-          </p:cNvSpPr>
-          <p:nvPr>
-            <p:ph type="body" sz="quarter" idx="19" hasCustomPrompt="1"/>
-          </p:nvPr>
-        </p:nvSpPr>
-        <p:spPr>
-          <a:xfrm>
-            <a:off x="5929863" y="4496763"/>
-            <a:ext cx="1663297" cy="257788"/>
+              <a:t>kpi_value_2</a:t>
+            </a:r>
+          </a:p>
+        </p:txBody>
+      </p:sp>
+      <p:sp>
+        <p:nvSpPr>
+          <p:cNvPr id="10" name="kpi_label_2">
+            <a:extLst>
+              <a:ext uri="{FF2B5EF4-FFF2-40B4-BE49-F238E27FC236}">
+                <a16:creationId xmlns:a16="http://schemas.microsoft.com/office/drawing/2014/main" id="{2FC7E185-B0F5-C4BD-F0D0-1788AF6BD894}"/>
+              </a:ext>
+            </a:extLst>
+          </p:cNvPr>
+          <p:cNvSpPr>
+            <a:spLocks noGrp="1"/>
+          </p:cNvSpPr>
+          <p:nvPr>
+            <p:ph type="body" sz="quarter" idx="17" hasCustomPrompt="1"/>
+          </p:nvPr>
+        </p:nvSpPr>
+        <p:spPr>
+          <a:xfrm>
+            <a:off x="5907232" y="3250695"/>
+            <a:ext cx="3914972" cy="273579"/>
           </a:xfrm>
           <a:prstGeom prst="rect">
             <a:avLst/>
@@ -3297,38 +3196,38 @@
               </a:spcBef>
               <a:buFontTx/>
               <a:buNone/>
-              <a:defRPr sz="1800"/>
-            </a:lvl1pPr>
-          </a:lstStyle>
-          <a:p>
-            <a:pPr lvl="0"/>
-            <a:r>
-              <a:rPr lang="en-US"/>
-              <a:t>kpi_label_3</a:t>
-            </a:r>
-          </a:p>
-        </p:txBody>
-      </p:sp>
-      <p:sp>
-        <p:nvSpPr>
-          <p:cNvPr id="13" name="kpi_value_4">
-            <a:extLst>
-              <a:ext uri="{FF2B5EF4-FFF2-40B4-BE49-F238E27FC236}">
-                <a16:creationId xmlns:a16="http://schemas.microsoft.com/office/drawing/2014/main" id="{A36C8AA0-0017-6AA4-DDF2-B25E5F06E39C}"/>
-              </a:ext>
-            </a:extLst>
-          </p:cNvPr>
-          <p:cNvSpPr>
-            <a:spLocks noGrp="1"/>
-          </p:cNvSpPr>
-          <p:nvPr>
-            <p:ph type="body" sz="quarter" idx="20" hasCustomPrompt="1"/>
-          </p:nvPr>
-        </p:nvSpPr>
-        <p:spPr>
-          <a:xfrm>
-            <a:off x="8136278" y="4032745"/>
-            <a:ext cx="1663297" cy="464019"/>
+              <a:defRPr sz="2000"/>
+            </a:lvl1pPr>
+          </a:lstStyle>
+          <a:p>
+            <a:pPr lvl="0"/>
+            <a:r>
+              <a:rPr lang="en-US"/>
+              <a:t>kpi_label_2</a:t>
+            </a:r>
+          </a:p>
+        </p:txBody>
+      </p:sp>
+      <p:sp>
+        <p:nvSpPr>
+          <p:cNvPr id="11" name="kpi_value_3">
+            <a:extLst>
+              <a:ext uri="{FF2B5EF4-FFF2-40B4-BE49-F238E27FC236}">
+                <a16:creationId xmlns:a16="http://schemas.microsoft.com/office/drawing/2014/main" id="{0DA40235-2013-ACC9-295E-E91880E24335}"/>
+              </a:ext>
+            </a:extLst>
+          </p:cNvPr>
+          <p:cNvSpPr>
+            <a:spLocks noGrp="1"/>
+          </p:cNvSpPr>
+          <p:nvPr>
+            <p:ph type="body" sz="quarter" idx="18" hasCustomPrompt="1"/>
+          </p:nvPr>
+        </p:nvSpPr>
+        <p:spPr>
+          <a:xfrm>
+            <a:off x="5907233" y="4010638"/>
+            <a:ext cx="1708557" cy="492443"/>
           </a:xfrm>
           <a:prstGeom prst="rect">
             <a:avLst/>
@@ -3357,31 +3256,31 @@
             <a:pPr lvl="0"/>
             <a:r>
               <a:rPr lang="en-US"/>
-              <a:t>kpi_value_4</a:t>
-            </a:r>
-          </a:p>
-        </p:txBody>
-      </p:sp>
-      <p:sp>
-        <p:nvSpPr>
-          <p:cNvPr id="14" name="kpi_label_4">
-            <a:extLst>
-              <a:ext uri="{FF2B5EF4-FFF2-40B4-BE49-F238E27FC236}">
-                <a16:creationId xmlns:a16="http://schemas.microsoft.com/office/drawing/2014/main" id="{9FE35D11-1F08-ACA4-790F-BFEAB7C2A3F6}"/>
-              </a:ext>
-            </a:extLst>
-          </p:cNvPr>
-          <p:cNvSpPr>
-            <a:spLocks noGrp="1"/>
-          </p:cNvSpPr>
-          <p:nvPr>
-            <p:ph type="body" sz="quarter" idx="21" hasCustomPrompt="1"/>
-          </p:nvPr>
-        </p:nvSpPr>
-        <p:spPr>
-          <a:xfrm>
-            <a:off x="8136278" y="4496763"/>
-            <a:ext cx="1663297" cy="257788"/>
+              <a:t>kpi_value_3</a:t>
+            </a:r>
+          </a:p>
+        </p:txBody>
+      </p:sp>
+      <p:sp>
+        <p:nvSpPr>
+          <p:cNvPr id="12" name="kpi_label_3">
+            <a:extLst>
+              <a:ext uri="{FF2B5EF4-FFF2-40B4-BE49-F238E27FC236}">
+                <a16:creationId xmlns:a16="http://schemas.microsoft.com/office/drawing/2014/main" id="{342DD27B-9F9D-F6C1-667C-695E3E330466}"/>
+              </a:ext>
+            </a:extLst>
+          </p:cNvPr>
+          <p:cNvSpPr>
+            <a:spLocks noGrp="1"/>
+          </p:cNvSpPr>
+          <p:nvPr>
+            <p:ph type="body" sz="quarter" idx="19" hasCustomPrompt="1"/>
+          </p:nvPr>
+        </p:nvSpPr>
+        <p:spPr>
+          <a:xfrm>
+            <a:off x="5907233" y="4503080"/>
+            <a:ext cx="1708557" cy="273579"/>
           </a:xfrm>
           <a:prstGeom prst="rect">
             <a:avLst/>
@@ -3398,7 +3297,108 @@
               </a:spcBef>
               <a:buFontTx/>
               <a:buNone/>
-              <a:defRPr sz="1800"/>
+              <a:defRPr sz="2000"/>
+            </a:lvl1pPr>
+          </a:lstStyle>
+          <a:p>
+            <a:pPr lvl="0"/>
+            <a:r>
+              <a:rPr lang="en-US"/>
+              <a:t>kpi_label_3</a:t>
+            </a:r>
+          </a:p>
+        </p:txBody>
+      </p:sp>
+      <p:sp>
+        <p:nvSpPr>
+          <p:cNvPr id="13" name="kpi_value_4">
+            <a:extLst>
+              <a:ext uri="{FF2B5EF4-FFF2-40B4-BE49-F238E27FC236}">
+                <a16:creationId xmlns:a16="http://schemas.microsoft.com/office/drawing/2014/main" id="{0EF83FAD-59A0-7C63-F601-8F81B3F1D75C}"/>
+              </a:ext>
+            </a:extLst>
+          </p:cNvPr>
+          <p:cNvSpPr>
+            <a:spLocks noGrp="1"/>
+          </p:cNvSpPr>
+          <p:nvPr>
+            <p:ph type="body" sz="quarter" idx="20" hasCustomPrompt="1"/>
+          </p:nvPr>
+        </p:nvSpPr>
+        <p:spPr>
+          <a:xfrm>
+            <a:off x="8113648" y="4010638"/>
+            <a:ext cx="1708557" cy="492443"/>
+          </a:xfrm>
+          <a:prstGeom prst="rect">
+            <a:avLst/>
+          </a:prstGeom>
+        </p:spPr>
+        <p:txBody>
+          <a:bodyPr wrap="square" anchor="t">
+            <a:noAutofit/>
+          </a:bodyPr>
+          <a:lstStyle>
+            <a:lvl1pPr marL="0" indent="0">
+              <a:spcBef>
+                <a:spcPts val="0"/>
+              </a:spcBef>
+              <a:buFontTx/>
+              <a:buNone/>
+              <a:defRPr sz="6000" b="1">
+                <a:solidFill>
+                  <a:schemeClr val="accent1"/>
+                </a:solidFill>
+                <a:latin typeface="+mj-lt"/>
+              </a:defRPr>
+            </a:lvl1pPr>
+          </a:lstStyle>
+          <a:p>
+            <a:pPr lvl="0"/>
+            <a:r>
+              <a:rPr lang="en-US"/>
+              <a:t>kpi_value_4</a:t>
+            </a:r>
+          </a:p>
+        </p:txBody>
+      </p:sp>
+      <p:sp>
+        <p:nvSpPr>
+          <p:cNvPr id="14" name="kpi_label_4">
+            <a:extLst>
+              <a:ext uri="{FF2B5EF4-FFF2-40B4-BE49-F238E27FC236}">
+                <a16:creationId xmlns:a16="http://schemas.microsoft.com/office/drawing/2014/main" id="{8299356F-C703-CDAF-AE43-70F77D78CB74}"/>
+              </a:ext>
+            </a:extLst>
+          </p:cNvPr>
+          <p:cNvSpPr>
+            <a:spLocks noGrp="1"/>
+          </p:cNvSpPr>
+          <p:nvPr>
+            <p:ph type="body" sz="quarter" idx="21" hasCustomPrompt="1"/>
+          </p:nvPr>
+        </p:nvSpPr>
+        <p:spPr>
+          <a:xfrm>
+            <a:off x="8113648" y="4503080"/>
+            <a:ext cx="1708557" cy="273579"/>
+          </a:xfrm>
+          <a:prstGeom prst="rect">
+            <a:avLst/>
+          </a:prstGeom>
+        </p:spPr>
+        <p:txBody>
+          <a:bodyPr wrap="square" anchor="t">
+            <a:noAutofit/>
+          </a:bodyPr>
+          <a:lstStyle>
+            <a:lvl1pPr marL="0" indent="0">
+              <a:spcBef>
+                <a:spcPts val="0"/>
+              </a:spcBef>
+              <a:buFontTx/>
+              <a:buNone/>
+              <a:defRPr sz="2000"/>
             </a:lvl1pPr>
           </a:lstStyle>
           <a:p>
@@ -3415,7 +3415,7 @@
           <p:cNvPr id="15" name="source">
             <a:extLst>
               <a:ext uri="{FF2B5EF4-FFF2-40B4-BE49-F238E27FC236}">
-                <a16:creationId xmlns:a16="http://schemas.microsoft.com/office/drawing/2014/main" id="{B2314353-A633-2AED-2BBD-6C89BE7C3C05}"/>
+                <a16:creationId xmlns:a16="http://schemas.microsoft.com/office/drawing/2014/main" id="{770949C3-10D2-AD29-899A-B90124E49AF8}"/>
               </a:ext>
             </a:extLst>
           </p:cNvPr>
@@ -3470,7 +3470,7 @@
     </p:spTree>
     <p:extLst>
       <p:ext uri="{BB962C8B-B14F-4D97-AF65-F5344CB8AC3E}">
-        <p14:creationId xmlns:p14="http://schemas.microsoft.com/office/powerpoint/2010/main" val="432758053"/>
+        <p14:creationId xmlns:p14="http://schemas.microsoft.com/office/powerpoint/2010/main" val="2249360396"/>
       </p:ext>
     </p:extLst>
   </p:cSld>
@@ -3544,7 +3544,7 @@
           <a:bodyPr/>
           <a:lstStyle/>
           <a:p>
-            <a:fld id="{91D5A71C-095D-4D8D-B06B-C24FC842AAAF}" type="datetimeFigureOut">
+            <a:fld id="{7B725182-F003-4077-8770-ED171BB46558}" type="datetimeFigureOut">
               <a:rPr lang="en-US" smtClean="0"/>
               <a:t>10/3/2026</a:t>
             </a:fld>
@@ -3586,7 +3586,7 @@
           <a:bodyPr/>
           <a:lstStyle/>
           <a:p>
-            <a:fld id="{67E77E8F-6FD3-4FA1-8A93-F369CE057DF3}" type="slidenum">
+            <a:fld id="{0120019D-D5E9-42EC-8806-1AB6BBDB44DC}" type="slidenum">
               <a:rPr lang="en-US" smtClean="0"/>
               <a:t>‹#›</a:t>
             </a:fld>
@@ -3599,7 +3599,7 @@
           <p:cNvPr id="2" name="body">
             <a:extLst>
               <a:ext uri="{FF2B5EF4-FFF2-40B4-BE49-F238E27FC236}">
-                <a16:creationId xmlns:a16="http://schemas.microsoft.com/office/drawing/2014/main" id="{430E527E-F56A-FEE2-5743-99451AAA804E}"/>
+                <a16:creationId xmlns:a16="http://schemas.microsoft.com/office/drawing/2014/main" id="{5BC6BB2E-22A1-7BDB-C27A-96C01F33C007}"/>
               </a:ext>
             </a:extLst>
           </p:cNvPr>
@@ -3639,7 +3639,7 @@
           <p:cNvPr id="6" name="kpi_value_1">
             <a:extLst>
               <a:ext uri="{FF2B5EF4-FFF2-40B4-BE49-F238E27FC236}">
-                <a16:creationId xmlns:a16="http://schemas.microsoft.com/office/drawing/2014/main" id="{132D3325-6AA9-89EA-6A64-E69FC6FF1DA0}"/>
+                <a16:creationId xmlns:a16="http://schemas.microsoft.com/office/drawing/2014/main" id="{7DFEA00F-E1AF-550D-AEEA-B7DD3D9073C6}"/>
               </a:ext>
             </a:extLst>
           </p:cNvPr>
@@ -3652,8 +3652,8 @@
         </p:nvSpPr>
         <p:spPr>
           <a:xfrm>
-            <a:off x="1335993" y="2780360"/>
-            <a:ext cx="3960232" cy="960417"/>
+            <a:off x="1313363" y="2758253"/>
+            <a:ext cx="4005492" cy="981927"/>
           </a:xfrm>
           <a:prstGeom prst="rect">
             <a:avLst/>
@@ -3692,7 +3692,7 @@
           <p:cNvPr id="7" name="kpi_label_1">
             <a:extLst>
               <a:ext uri="{FF2B5EF4-FFF2-40B4-BE49-F238E27FC236}">
-                <a16:creationId xmlns:a16="http://schemas.microsoft.com/office/drawing/2014/main" id="{B40959CE-0F7A-E804-4FD5-4E5F1F06F841}"/>
+                <a16:creationId xmlns:a16="http://schemas.microsoft.com/office/drawing/2014/main" id="{0C806669-4298-1B50-D254-2EE8C5E5AF57}"/>
               </a:ext>
             </a:extLst>
           </p:cNvPr>
@@ -3705,8 +3705,8 @@
         </p:nvSpPr>
         <p:spPr>
           <a:xfrm>
-            <a:off x="1335993" y="3740778"/>
-            <a:ext cx="3960232" cy="533565"/>
+            <a:off x="1313363" y="3740180"/>
+            <a:ext cx="4005492" cy="545515"/>
           </a:xfrm>
           <a:prstGeom prst="rect">
             <a:avLst/>
@@ -3723,7 +3723,7 @@
               </a:spcBef>
               <a:buFontTx/>
               <a:buNone/>
-              <a:defRPr sz="1800"/>
+              <a:defRPr sz="2000"/>
             </a:lvl1pPr>
           </a:lstStyle>
           <a:p>
@@ -3740,7 +3740,7 @@
           <p:cNvPr id="8" name="kpi_value_2">
             <a:extLst>
               <a:ext uri="{FF2B5EF4-FFF2-40B4-BE49-F238E27FC236}">
-                <a16:creationId xmlns:a16="http://schemas.microsoft.com/office/drawing/2014/main" id="{BBB306FD-FA4E-D43C-D421-BE3A9A30D9BE}"/>
+                <a16:creationId xmlns:a16="http://schemas.microsoft.com/office/drawing/2014/main" id="{72E5B68B-B26F-E7AA-AD3E-07A40DEA62B4}"/>
               </a:ext>
             </a:extLst>
           </p:cNvPr>
@@ -3753,8 +3753,8 @@
         </p:nvSpPr>
         <p:spPr>
           <a:xfrm>
-            <a:off x="5839342" y="2780360"/>
-            <a:ext cx="3960232" cy="960417"/>
+            <a:off x="5816712" y="2758253"/>
+            <a:ext cx="4005492" cy="981927"/>
           </a:xfrm>
           <a:prstGeom prst="rect">
             <a:avLst/>
@@ -3793,7 +3793,7 @@
           <p:cNvPr id="10" name="kpi_label_2">
             <a:extLst>
               <a:ext uri="{FF2B5EF4-FFF2-40B4-BE49-F238E27FC236}">
-                <a16:creationId xmlns:a16="http://schemas.microsoft.com/office/drawing/2014/main" id="{9856827B-B5B7-47CB-CAE3-091ECCC33868}"/>
+                <a16:creationId xmlns:a16="http://schemas.microsoft.com/office/drawing/2014/main" id="{08718B64-53EB-0893-CE3E-B51D78A8D5BD}"/>
               </a:ext>
             </a:extLst>
           </p:cNvPr>
@@ -3806,8 +3806,8 @@
         </p:nvSpPr>
         <p:spPr>
           <a:xfrm>
-            <a:off x="5839342" y="3740778"/>
-            <a:ext cx="3960232" cy="533565"/>
+            <a:off x="5816712" y="3740180"/>
+            <a:ext cx="4005492" cy="545515"/>
           </a:xfrm>
           <a:prstGeom prst="rect">
             <a:avLst/>
@@ -3824,7 +3824,7 @@
               </a:spcBef>
               <a:buFontTx/>
               <a:buNone/>
-              <a:defRPr sz="1800"/>
+              <a:defRPr sz="2000"/>
             </a:lvl1pPr>
           </a:lstStyle>
           <a:p>
@@ -3841,7 +3841,7 @@
           <p:cNvPr id="11" name="source">
             <a:extLst>
               <a:ext uri="{FF2B5EF4-FFF2-40B4-BE49-F238E27FC236}">
-                <a16:creationId xmlns:a16="http://schemas.microsoft.com/office/drawing/2014/main" id="{018F1ED8-F3B6-21A3-7B9B-232869932A12}"/>
+                <a16:creationId xmlns:a16="http://schemas.microsoft.com/office/drawing/2014/main" id="{3BE29FCF-B2F1-BF99-E2F0-05129D8CA0D1}"/>
               </a:ext>
             </a:extLst>
           </p:cNvPr>
@@ -3896,7 +3896,7 @@
     </p:spTree>
     <p:extLst>
       <p:ext uri="{BB962C8B-B14F-4D97-AF65-F5344CB8AC3E}">
-        <p14:creationId xmlns:p14="http://schemas.microsoft.com/office/powerpoint/2010/main" val="3355726113"/>
+        <p14:creationId xmlns:p14="http://schemas.microsoft.com/office/powerpoint/2010/main" val="2568913998"/>
       </p:ext>
     </p:extLst>
   </p:cSld>
@@ -3970,7 +3970,7 @@
           <a:bodyPr/>
           <a:lstStyle/>
           <a:p>
-            <a:fld id="{91D5A71C-095D-4D8D-B06B-C24FC842AAAF}" type="datetimeFigureOut">
+            <a:fld id="{7B725182-F003-4077-8770-ED171BB46558}" type="datetimeFigureOut">
               <a:rPr lang="en-US" smtClean="0"/>
               <a:t>10/3/2026</a:t>
             </a:fld>
@@ -4012,7 +4012,7 @@
           <a:bodyPr/>
           <a:lstStyle/>
           <a:p>
-            <a:fld id="{67E77E8F-6FD3-4FA1-8A93-F369CE057DF3}" type="slidenum">
+            <a:fld id="{0120019D-D5E9-42EC-8806-1AB6BBDB44DC}" type="slidenum">
               <a:rPr lang="en-US" smtClean="0"/>
               <a:t>‹#›</a:t>
             </a:fld>
@@ -4025,7 +4025,7 @@
           <p:cNvPr id="2" name="body">
             <a:extLst>
               <a:ext uri="{FF2B5EF4-FFF2-40B4-BE49-F238E27FC236}">
-                <a16:creationId xmlns:a16="http://schemas.microsoft.com/office/drawing/2014/main" id="{20885033-3825-6623-8FA7-1E71B17B7213}"/>
+                <a16:creationId xmlns:a16="http://schemas.microsoft.com/office/drawing/2014/main" id="{A82B82D6-0F80-4DD7-853C-EDE4E3A4674B}"/>
               </a:ext>
             </a:extLst>
           </p:cNvPr>
@@ -4065,7 +4065,7 @@
           <p:cNvPr id="6" name="kpi_value_1">
             <a:extLst>
               <a:ext uri="{FF2B5EF4-FFF2-40B4-BE49-F238E27FC236}">
-                <a16:creationId xmlns:a16="http://schemas.microsoft.com/office/drawing/2014/main" id="{AA41E51C-1AA3-D4CA-C149-B31B95F33021}"/>
+                <a16:creationId xmlns:a16="http://schemas.microsoft.com/office/drawing/2014/main" id="{352B828B-8165-69A8-F88B-DA6E9876C65F}"/>
               </a:ext>
             </a:extLst>
           </p:cNvPr>
@@ -4096,7 +4096,7 @@
               </a:spcBef>
               <a:buFontTx/>
               <a:buNone/>
-              <a:defRPr sz="4000" b="1">
+              <a:defRPr sz="6000" b="1">
                 <a:solidFill>
                   <a:schemeClr val="accent1"/>
                 </a:solidFill>
@@ -4118,7 +4118,7 @@
           <p:cNvPr id="7" name="kpi_label_1">
             <a:extLst>
               <a:ext uri="{FF2B5EF4-FFF2-40B4-BE49-F238E27FC236}">
-                <a16:creationId xmlns:a16="http://schemas.microsoft.com/office/drawing/2014/main" id="{6137789D-4604-0E4C-5203-BD8D922AC31F}"/>
+                <a16:creationId xmlns:a16="http://schemas.microsoft.com/office/drawing/2014/main" id="{60B19CDF-4BC5-3852-8557-18A69CA14340}"/>
               </a:ext>
             </a:extLst>
           </p:cNvPr>
@@ -4149,7 +4149,7 @@
               </a:spcBef>
               <a:buFontTx/>
               <a:buNone/>
-              <a:defRPr sz="1800"/>
+              <a:defRPr sz="2000"/>
             </a:lvl1pPr>
           </a:lstStyle>
           <a:p>
@@ -4166,7 +4166,7 @@
           <p:cNvPr id="8" name="kpi_value_2">
             <a:extLst>
               <a:ext uri="{FF2B5EF4-FFF2-40B4-BE49-F238E27FC236}">
-                <a16:creationId xmlns:a16="http://schemas.microsoft.com/office/drawing/2014/main" id="{CB6FBF69-BE5E-ECBE-E486-A870E38E22E6}"/>
+                <a16:creationId xmlns:a16="http://schemas.microsoft.com/office/drawing/2014/main" id="{A93726D7-2341-BD61-DC93-BD84BE428C00}"/>
               </a:ext>
             </a:extLst>
           </p:cNvPr>
@@ -4197,7 +4197,7 @@
               </a:spcBef>
               <a:buFontTx/>
               <a:buNone/>
-              <a:defRPr sz="4000" b="1">
+              <a:defRPr sz="6000" b="1">
                 <a:solidFill>
                   <a:schemeClr val="accent1"/>
                 </a:solidFill>
@@ -4219,7 +4219,7 @@
           <p:cNvPr id="10" name="kpi_label_2">
             <a:extLst>
               <a:ext uri="{FF2B5EF4-FFF2-40B4-BE49-F238E27FC236}">
-                <a16:creationId xmlns:a16="http://schemas.microsoft.com/office/drawing/2014/main" id="{2B2C96ED-20F9-AED1-0EB4-1D8FBE2C70F9}"/>
+                <a16:creationId xmlns:a16="http://schemas.microsoft.com/office/drawing/2014/main" id="{327497EB-AE33-A584-3DB7-C42A3FCB4698}"/>
               </a:ext>
             </a:extLst>
           </p:cNvPr>
@@ -4250,7 +4250,7 @@
               </a:spcBef>
               <a:buFontTx/>
               <a:buNone/>
-              <a:defRPr sz="1800"/>
+              <a:defRPr sz="2000"/>
             </a:lvl1pPr>
           </a:lstStyle>
           <a:p>
@@ -4267,7 +4267,7 @@
           <p:cNvPr id="11" name="kpi_value_3">
             <a:extLst>
               <a:ext uri="{FF2B5EF4-FFF2-40B4-BE49-F238E27FC236}">
-                <a16:creationId xmlns:a16="http://schemas.microsoft.com/office/drawing/2014/main" id="{36ABCDAE-3A8F-85B0-2189-E0F70EA8D6A4}"/>
+                <a16:creationId xmlns:a16="http://schemas.microsoft.com/office/drawing/2014/main" id="{0A80F3AD-1799-ABD5-6590-A84772637B99}"/>
               </a:ext>
             </a:extLst>
           </p:cNvPr>
@@ -4298,7 +4298,7 @@
               </a:spcBef>
               <a:buFontTx/>
               <a:buNone/>
-              <a:defRPr sz="4000" b="1">
+              <a:defRPr sz="6000" b="1">
                 <a:solidFill>
                   <a:schemeClr val="accent1"/>
                 </a:solidFill>
@@ -4320,7 +4320,7 @@
           <p:cNvPr id="12" name="kpi_label_3">
             <a:extLst>
               <a:ext uri="{FF2B5EF4-FFF2-40B4-BE49-F238E27FC236}">
-                <a16:creationId xmlns:a16="http://schemas.microsoft.com/office/drawing/2014/main" id="{96C51768-49E1-D76A-006D-47EB0E84E67C}"/>
+                <a16:creationId xmlns:a16="http://schemas.microsoft.com/office/drawing/2014/main" id="{C31E2F72-B56F-F7AE-8C60-1CC142DD2445}"/>
               </a:ext>
             </a:extLst>
           </p:cNvPr>
@@ -4351,7 +4351,7 @@
               </a:spcBef>
               <a:buFontTx/>
               <a:buNone/>
-              <a:defRPr sz="1800"/>
+              <a:defRPr sz="2000"/>
             </a:lvl1pPr>
           </a:lstStyle>
           <a:p>
@@ -4368,7 +4368,7 @@
           <p:cNvPr id="13" name="kpi_value_4">
             <a:extLst>
               <a:ext uri="{FF2B5EF4-FFF2-40B4-BE49-F238E27FC236}">
-                <a16:creationId xmlns:a16="http://schemas.microsoft.com/office/drawing/2014/main" id="{22730B05-3257-D52E-EA2A-2C761901E4D0}"/>
+                <a16:creationId xmlns:a16="http://schemas.microsoft.com/office/drawing/2014/main" id="{7CEB8FAC-3E28-E1D3-534F-8F473F4A59F9}"/>
               </a:ext>
             </a:extLst>
           </p:cNvPr>
@@ -4399,7 +4399,7 @@
               </a:spcBef>
               <a:buFontTx/>
               <a:buNone/>
-              <a:defRPr sz="4000" b="1">
+              <a:defRPr sz="6000" b="1">
                 <a:solidFill>
                   <a:schemeClr val="accent1"/>
                 </a:solidFill>
@@ -4421,7 +4421,7 @@
           <p:cNvPr id="14" name="kpi_label_4">
             <a:extLst>
               <a:ext uri="{FF2B5EF4-FFF2-40B4-BE49-F238E27FC236}">
-                <a16:creationId xmlns:a16="http://schemas.microsoft.com/office/drawing/2014/main" id="{27897890-D43B-CAF6-97F2-76D1C1A35CCD}"/>
+                <a16:creationId xmlns:a16="http://schemas.microsoft.com/office/drawing/2014/main" id="{4825A9C7-CB97-09FF-6202-5AD4A37AA9C0}"/>
               </a:ext>
             </a:extLst>
           </p:cNvPr>
@@ -4452,7 +4452,7 @@
               </a:spcBef>
               <a:buFontTx/>
               <a:buNone/>
-              <a:defRPr sz="1800"/>
+              <a:defRPr sz="2000"/>
             </a:lvl1pPr>
           </a:lstStyle>
           <a:p>
@@ -4469,7 +4469,7 @@
           <p:cNvPr id="15" name="source">
             <a:extLst>
               <a:ext uri="{FF2B5EF4-FFF2-40B4-BE49-F238E27FC236}">
-                <a16:creationId xmlns:a16="http://schemas.microsoft.com/office/drawing/2014/main" id="{17439C84-4A9F-7A23-3BCE-70CF4D775F12}"/>
+                <a16:creationId xmlns:a16="http://schemas.microsoft.com/office/drawing/2014/main" id="{D3A799F5-F3B4-0E6E-43EF-82FB6919C282}"/>
               </a:ext>
             </a:extLst>
           </p:cNvPr>
@@ -4524,7 +4524,7 @@
     </p:spTree>
     <p:extLst>
       <p:ext uri="{BB962C8B-B14F-4D97-AF65-F5344CB8AC3E}">
-        <p14:creationId xmlns:p14="http://schemas.microsoft.com/office/powerpoint/2010/main" val="3343100968"/>
+        <p14:creationId xmlns:p14="http://schemas.microsoft.com/office/powerpoint/2010/main" val="3326785060"/>
       </p:ext>
     </p:extLst>
   </p:cSld>
@@ -4598,7 +4598,7 @@
           <a:bodyPr/>
           <a:lstStyle/>
           <a:p>
-            <a:fld id="{91D5A71C-095D-4D8D-B06B-C24FC842AAAF}" type="datetimeFigureOut">
+            <a:fld id="{7B725182-F003-4077-8770-ED171BB46558}" type="datetimeFigureOut">
               <a:rPr lang="en-US" smtClean="0"/>
               <a:t>10/3/2026</a:t>
             </a:fld>
@@ -4640,7 +4640,7 @@
           <a:bodyPr/>
           <a:lstStyle/>
           <a:p>
-            <a:fld id="{67E77E8F-6FD3-4FA1-8A93-F369CE057DF3}" type="slidenum">
+            <a:fld id="{0120019D-D5E9-42EC-8806-1AB6BBDB44DC}" type="slidenum">
               <a:rPr lang="en-US" smtClean="0"/>
               <a:t>‹#›</a:t>
             </a:fld>
@@ -4653,7 +4653,7 @@
           <p:cNvPr id="2" name="item_1_title">
             <a:extLst>
               <a:ext uri="{FF2B5EF4-FFF2-40B4-BE49-F238E27FC236}">
-                <a16:creationId xmlns:a16="http://schemas.microsoft.com/office/drawing/2014/main" id="{6469DAFB-01B1-8266-01A6-83D3D4D6B502}"/>
+                <a16:creationId xmlns:a16="http://schemas.microsoft.com/office/drawing/2014/main" id="{560938E0-B2A0-F32E-79F5-70E26A187507}"/>
               </a:ext>
             </a:extLst>
           </p:cNvPr>
@@ -4681,7 +4681,7 @@
               </a:spcBef>
               <a:buFontTx/>
               <a:buNone/>
-              <a:defRPr sz="2200" b="1">
+              <a:defRPr sz="2000" b="1">
                 <a:solidFill>
                   <a:schemeClr val="accent1"/>
                 </a:solidFill>
@@ -4703,7 +4703,7 @@
           <p:cNvPr id="6" name="item_1">
             <a:extLst>
               <a:ext uri="{FF2B5EF4-FFF2-40B4-BE49-F238E27FC236}">
-                <a16:creationId xmlns:a16="http://schemas.microsoft.com/office/drawing/2014/main" id="{018E91C8-2B09-4D6D-8726-CB163B11A33C}"/>
+                <a16:creationId xmlns:a16="http://schemas.microsoft.com/office/drawing/2014/main" id="{40CF1C8D-4DE0-DF45-B30A-97F3BCF2D8C4}"/>
               </a:ext>
             </a:extLst>
           </p:cNvPr>
@@ -4751,7 +4751,7 @@
           <p:cNvPr id="7" name="item_2_title">
             <a:extLst>
               <a:ext uri="{FF2B5EF4-FFF2-40B4-BE49-F238E27FC236}">
-                <a16:creationId xmlns:a16="http://schemas.microsoft.com/office/drawing/2014/main" id="{7C4DC9C6-15EB-712E-0D29-047DE36F2672}"/>
+                <a16:creationId xmlns:a16="http://schemas.microsoft.com/office/drawing/2014/main" id="{D402578E-F50B-2CA5-F5F2-D4457DEEFCFC}"/>
               </a:ext>
             </a:extLst>
           </p:cNvPr>
@@ -4782,7 +4782,7 @@
               </a:spcBef>
               <a:buFontTx/>
               <a:buNone/>
-              <a:defRPr sz="2200" b="1">
+              <a:defRPr sz="2000" b="1">
                 <a:solidFill>
                   <a:schemeClr val="accent1"/>
                 </a:solidFill>
@@ -4804,7 +4804,7 @@
           <p:cNvPr id="8" name="item_2">
             <a:extLst>
               <a:ext uri="{FF2B5EF4-FFF2-40B4-BE49-F238E27FC236}">
-                <a16:creationId xmlns:a16="http://schemas.microsoft.com/office/drawing/2014/main" id="{9168829C-582D-9175-7AF4-578248624177}"/>
+                <a16:creationId xmlns:a16="http://schemas.microsoft.com/office/drawing/2014/main" id="{B220F817-58FD-AA7A-A430-111D120930BE}"/>
               </a:ext>
             </a:extLst>
           </p:cNvPr>
@@ -4852,7 +4852,7 @@
           <p:cNvPr id="10" name="item_3_title">
             <a:extLst>
               <a:ext uri="{FF2B5EF4-FFF2-40B4-BE49-F238E27FC236}">
-                <a16:creationId xmlns:a16="http://schemas.microsoft.com/office/drawing/2014/main" id="{9525F6A6-0F4D-1703-CD4B-A35A375AF1FD}"/>
+                <a16:creationId xmlns:a16="http://schemas.microsoft.com/office/drawing/2014/main" id="{BAB31DB0-2911-59D3-036E-444FF284B636}"/>
               </a:ext>
             </a:extLst>
           </p:cNvPr>
@@ -4883,7 +4883,7 @@
               </a:spcBef>
               <a:buFontTx/>
               <a:buNone/>
-              <a:defRPr sz="2200" b="1">
+              <a:defRPr sz="2000" b="1">
                 <a:solidFill>
                   <a:schemeClr val="accent1"/>
                 </a:solidFill>
@@ -4905,7 +4905,7 @@
           <p:cNvPr id="11" name="item_3">
             <a:extLst>
               <a:ext uri="{FF2B5EF4-FFF2-40B4-BE49-F238E27FC236}">
-                <a16:creationId xmlns:a16="http://schemas.microsoft.com/office/drawing/2014/main" id="{D557BDA0-6945-E681-0F93-D9418C54D8E0}"/>
+                <a16:creationId xmlns:a16="http://schemas.microsoft.com/office/drawing/2014/main" id="{92A11A03-FAA9-C414-9B83-6DC0F689E147}"/>
               </a:ext>
             </a:extLst>
           </p:cNvPr>
@@ -4953,7 +4953,7 @@
           <p:cNvPr id="12" name="item_4_title">
             <a:extLst>
               <a:ext uri="{FF2B5EF4-FFF2-40B4-BE49-F238E27FC236}">
-                <a16:creationId xmlns:a16="http://schemas.microsoft.com/office/drawing/2014/main" id="{9062267E-916D-70E9-FE91-877D603F1444}"/>
+                <a16:creationId xmlns:a16="http://schemas.microsoft.com/office/drawing/2014/main" id="{0206D11F-AE69-D5DA-AF6D-1D1885A99BB5}"/>
               </a:ext>
             </a:extLst>
           </p:cNvPr>
@@ -4984,7 +4984,7 @@
               </a:spcBef>
               <a:buFontTx/>
               <a:buNone/>
-              <a:defRPr sz="2200" b="1">
+              <a:defRPr sz="2000" b="1">
                 <a:solidFill>
                   <a:schemeClr val="accent1"/>
                 </a:solidFill>
@@ -5006,7 +5006,7 @@
           <p:cNvPr id="13" name="item_4">
             <a:extLst>
               <a:ext uri="{FF2B5EF4-FFF2-40B4-BE49-F238E27FC236}">
-                <a16:creationId xmlns:a16="http://schemas.microsoft.com/office/drawing/2014/main" id="{2536DD84-F853-4949-BE9A-11BA326D48DD}"/>
+                <a16:creationId xmlns:a16="http://schemas.microsoft.com/office/drawing/2014/main" id="{F9C01FCC-5ACE-0E60-564F-9E6C20A032CA}"/>
               </a:ext>
             </a:extLst>
           </p:cNvPr>
@@ -5054,7 +5054,7 @@
           <p:cNvPr id="14" name="source">
             <a:extLst>
               <a:ext uri="{FF2B5EF4-FFF2-40B4-BE49-F238E27FC236}">
-                <a16:creationId xmlns:a16="http://schemas.microsoft.com/office/drawing/2014/main" id="{A3E9F912-AF8B-C8F0-C548-00C85BB7CC87}"/>
+                <a16:creationId xmlns:a16="http://schemas.microsoft.com/office/drawing/2014/main" id="{62BD0F87-3B87-FF53-B8C3-B22E381517D3}"/>
               </a:ext>
             </a:extLst>
           </p:cNvPr>
@@ -5109,7 +5109,7 @@
     </p:spTree>
     <p:extLst>
       <p:ext uri="{BB962C8B-B14F-4D97-AF65-F5344CB8AC3E}">
-        <p14:creationId xmlns:p14="http://schemas.microsoft.com/office/powerpoint/2010/main" val="1559557947"/>
+        <p14:creationId xmlns:p14="http://schemas.microsoft.com/office/powerpoint/2010/main" val="3826927600"/>
       </p:ext>
     </p:extLst>
   </p:cSld>
@@ -5183,7 +5183,7 @@
           <a:bodyPr/>
           <a:lstStyle/>
           <a:p>
-            <a:fld id="{91D5A71C-095D-4D8D-B06B-C24FC842AAAF}" type="datetimeFigureOut">
+            <a:fld id="{7B725182-F003-4077-8770-ED171BB46558}" type="datetimeFigureOut">
               <a:rPr lang="en-US" smtClean="0"/>
               <a:t>10/3/2026</a:t>
             </a:fld>
@@ -5225,7 +5225,7 @@
           <a:bodyPr/>
           <a:lstStyle/>
           <a:p>
-            <a:fld id="{67E77E8F-6FD3-4FA1-8A93-F369CE057DF3}" type="slidenum">
+            <a:fld id="{0120019D-D5E9-42EC-8806-1AB6BBDB44DC}" type="slidenum">
               <a:rPr lang="en-US" smtClean="0"/>
               <a:t>‹#›</a:t>
             </a:fld>
@@ -5238,7 +5238,7 @@
           <p:cNvPr id="2" name="marker_1">
             <a:extLst>
               <a:ext uri="{FF2B5EF4-FFF2-40B4-BE49-F238E27FC236}">
-                <a16:creationId xmlns:a16="http://schemas.microsoft.com/office/drawing/2014/main" id="{5BA9C749-267C-FAB1-469D-4F951462391C}"/>
+                <a16:creationId xmlns:a16="http://schemas.microsoft.com/office/drawing/2014/main" id="{5D978A52-05E8-EC0F-2698-B9B1ACE4A539}"/>
               </a:ext>
             </a:extLst>
           </p:cNvPr>
@@ -5251,7 +5251,7 @@
         </p:nvSpPr>
         <p:spPr>
           <a:xfrm>
-            <a:off x="1335993" y="2780360"/>
+            <a:off x="1313363" y="2758253"/>
             <a:ext cx="497858" cy="486363"/>
           </a:xfrm>
           <a:prstGeom prst="ellipse">
@@ -5272,7 +5272,7 @@
               </a:spcBef>
               <a:buFontTx/>
               <a:buNone/>
-              <a:defRPr sz="2400" b="1">
+              <a:defRPr sz="2000" b="1">
                 <a:solidFill>
                   <a:schemeClr val="bg1"/>
                 </a:solidFill>
@@ -5294,7 +5294,7 @@
           <p:cNvPr id="6" name="item_1_title">
             <a:extLst>
               <a:ext uri="{FF2B5EF4-FFF2-40B4-BE49-F238E27FC236}">
-                <a16:creationId xmlns:a16="http://schemas.microsoft.com/office/drawing/2014/main" id="{F3128231-E880-7E15-CAF6-8E39207BD429}"/>
+                <a16:creationId xmlns:a16="http://schemas.microsoft.com/office/drawing/2014/main" id="{29ECF302-22C3-5C36-0532-792E59F3805E}"/>
               </a:ext>
             </a:extLst>
           </p:cNvPr>
@@ -5307,8 +5307,8 @@
         </p:nvSpPr>
         <p:spPr>
           <a:xfrm>
-            <a:off x="1924371" y="2780360"/>
-            <a:ext cx="7875204" cy="308853"/>
+            <a:off x="1901742" y="2758252"/>
+            <a:ext cx="7920463" cy="321858"/>
           </a:xfrm>
           <a:prstGeom prst="rect">
             <a:avLst/>
@@ -5325,7 +5325,7 @@
               </a:spcBef>
               <a:buFontTx/>
               <a:buNone/>
-              <a:defRPr sz="2200" b="1">
+              <a:defRPr sz="2000" b="1">
                 <a:solidFill>
                   <a:schemeClr val="accent1"/>
                 </a:solidFill>
@@ -5347,7 +5347,7 @@
           <p:cNvPr id="7" name="item_1">
             <a:extLst>
               <a:ext uri="{FF2B5EF4-FFF2-40B4-BE49-F238E27FC236}">
-                <a16:creationId xmlns:a16="http://schemas.microsoft.com/office/drawing/2014/main" id="{C5967832-0F81-FF1E-BA81-61E10805BDC6}"/>
+                <a16:creationId xmlns:a16="http://schemas.microsoft.com/office/drawing/2014/main" id="{D8521034-35AD-D015-3C93-41417EE8E28F}"/>
               </a:ext>
             </a:extLst>
           </p:cNvPr>
@@ -5360,8 +5360,8 @@
         </p:nvSpPr>
         <p:spPr>
           <a:xfrm>
-            <a:off x="1924371" y="3089213"/>
-            <a:ext cx="7875204" cy="741248"/>
+            <a:off x="1901742" y="3080111"/>
+            <a:ext cx="7920463" cy="772459"/>
           </a:xfrm>
           <a:prstGeom prst="rect">
             <a:avLst/>
@@ -5395,7 +5395,7 @@
           <p:cNvPr id="8" name="marker_2">
             <a:extLst>
               <a:ext uri="{FF2B5EF4-FFF2-40B4-BE49-F238E27FC236}">
-                <a16:creationId xmlns:a16="http://schemas.microsoft.com/office/drawing/2014/main" id="{67279CC3-3F77-8E21-2A29-16EE108E026C}"/>
+                <a16:creationId xmlns:a16="http://schemas.microsoft.com/office/drawing/2014/main" id="{5C6BFB0E-DD3C-B9F2-57F0-BE1431E871A2}"/>
               </a:ext>
             </a:extLst>
           </p:cNvPr>
@@ -5408,7 +5408,7 @@
         </p:nvSpPr>
         <p:spPr>
           <a:xfrm>
-            <a:off x="1335993" y="4361040"/>
+            <a:off x="1313363" y="4338933"/>
             <a:ext cx="497858" cy="486363"/>
           </a:xfrm>
           <a:prstGeom prst="ellipse">
@@ -5429,7 +5429,7 @@
               </a:spcBef>
               <a:buFontTx/>
               <a:buNone/>
-              <a:defRPr sz="2400" b="1">
+              <a:defRPr sz="2000" b="1">
                 <a:solidFill>
                   <a:schemeClr val="bg1"/>
                 </a:solidFill>
@@ -5451,7 +5451,7 @@
           <p:cNvPr id="10" name="item_2_title">
             <a:extLst>
               <a:ext uri="{FF2B5EF4-FFF2-40B4-BE49-F238E27FC236}">
-                <a16:creationId xmlns:a16="http://schemas.microsoft.com/office/drawing/2014/main" id="{1B3FF70D-0CC1-3498-C7A5-2B05B0C78AA0}"/>
+                <a16:creationId xmlns:a16="http://schemas.microsoft.com/office/drawing/2014/main" id="{B4D06C1F-A514-2996-B77A-8A8011CFD5FE}"/>
               </a:ext>
             </a:extLst>
           </p:cNvPr>
@@ -5464,8 +5464,8 @@
         </p:nvSpPr>
         <p:spPr>
           <a:xfrm>
-            <a:off x="1924371" y="4361040"/>
-            <a:ext cx="7875204" cy="308853"/>
+            <a:off x="1901742" y="4338932"/>
+            <a:ext cx="7920463" cy="321858"/>
           </a:xfrm>
           <a:prstGeom prst="rect">
             <a:avLst/>
@@ -5482,7 +5482,7 @@
               </a:spcBef>
               <a:buFontTx/>
               <a:buNone/>
-              <a:defRPr sz="2200" b="1">
+              <a:defRPr sz="2000" b="1">
                 <a:solidFill>
                   <a:schemeClr val="accent1"/>
                 </a:solidFill>
@@ -5504,7 +5504,7 @@
           <p:cNvPr id="11" name="item_2">
             <a:extLst>
               <a:ext uri="{FF2B5EF4-FFF2-40B4-BE49-F238E27FC236}">
-                <a16:creationId xmlns:a16="http://schemas.microsoft.com/office/drawing/2014/main" id="{6B0A8341-DC1A-5DC1-9D15-E153A537B4A6}"/>
+                <a16:creationId xmlns:a16="http://schemas.microsoft.com/office/drawing/2014/main" id="{4E754405-D7D7-4278-A1D7-55008A8F40CF}"/>
               </a:ext>
             </a:extLst>
           </p:cNvPr>
@@ -5517,8 +5517,8 @@
         </p:nvSpPr>
         <p:spPr>
           <a:xfrm>
-            <a:off x="1924371" y="4669892"/>
-            <a:ext cx="7875204" cy="741248"/>
+            <a:off x="1901742" y="4660790"/>
+            <a:ext cx="7920463" cy="772459"/>
           </a:xfrm>
           <a:prstGeom prst="rect">
             <a:avLst/>
@@ -5552,7 +5552,7 @@
           <p:cNvPr id="12" name="source">
             <a:extLst>
               <a:ext uri="{FF2B5EF4-FFF2-40B4-BE49-F238E27FC236}">
-                <a16:creationId xmlns:a16="http://schemas.microsoft.com/office/drawing/2014/main" id="{84FCC8C7-0236-D3DF-4F0E-198B987BB00D}"/>
+                <a16:creationId xmlns:a16="http://schemas.microsoft.com/office/drawing/2014/main" id="{E283BA44-592C-5EB6-E4EB-5A3E8B2C8C79}"/>
               </a:ext>
             </a:extLst>
           </p:cNvPr>
@@ -5607,7 +5607,7 @@
     </p:spTree>
     <p:extLst>
       <p:ext uri="{BB962C8B-B14F-4D97-AF65-F5344CB8AC3E}">
-        <p14:creationId xmlns:p14="http://schemas.microsoft.com/office/powerpoint/2010/main" val="1078363942"/>
+        <p14:creationId xmlns:p14="http://schemas.microsoft.com/office/powerpoint/2010/main" val="2731438194"/>
       </p:ext>
     </p:extLst>
   </p:cSld>
@@ -5681,7 +5681,7 @@
           <a:bodyPr/>
           <a:lstStyle/>
           <a:p>
-            <a:fld id="{91D5A71C-095D-4D8D-B06B-C24FC842AAAF}" type="datetimeFigureOut">
+            <a:fld id="{7B725182-F003-4077-8770-ED171BB46558}" type="datetimeFigureOut">
               <a:rPr lang="en-US" smtClean="0"/>
               <a:t>10/3/2026</a:t>
             </a:fld>
@@ -5723,7 +5723,7 @@
           <a:bodyPr/>
           <a:lstStyle/>
           <a:p>
-            <a:fld id="{67E77E8F-6FD3-4FA1-8A93-F369CE057DF3}" type="slidenum">
+            <a:fld id="{0120019D-D5E9-42EC-8806-1AB6BBDB44DC}" type="slidenum">
               <a:rPr lang="en-US" smtClean="0"/>
               <a:t>‹#›</a:t>
             </a:fld>
@@ -5736,7 +5736,7 @@
           <p:cNvPr id="2" name="item_1_title">
             <a:extLst>
               <a:ext uri="{FF2B5EF4-FFF2-40B4-BE49-F238E27FC236}">
-                <a16:creationId xmlns:a16="http://schemas.microsoft.com/office/drawing/2014/main" id="{656FFBF5-A435-5F29-E5AF-88044DBA5545}"/>
+                <a16:creationId xmlns:a16="http://schemas.microsoft.com/office/drawing/2014/main" id="{69EF7EC6-077D-7D5E-DD65-2D0A3E6206E3}"/>
               </a:ext>
             </a:extLst>
           </p:cNvPr>
@@ -5749,8 +5749,8 @@
         </p:nvSpPr>
         <p:spPr>
           <a:xfrm>
-            <a:off x="1335993" y="2780360"/>
-            <a:ext cx="3960232" cy="308853"/>
+            <a:off x="1313363" y="2758252"/>
+            <a:ext cx="4005492" cy="321858"/>
           </a:xfrm>
         </p:spPr>
         <p:txBody>
@@ -5764,7 +5764,7 @@
               </a:spcBef>
               <a:buFontTx/>
               <a:buNone/>
-              <a:defRPr sz="2200" b="1">
+              <a:defRPr sz="2000" b="1">
                 <a:solidFill>
                   <a:schemeClr val="accent1"/>
                 </a:solidFill>
@@ -5786,7 +5786,7 @@
           <p:cNvPr id="6" name="item_1">
             <a:extLst>
               <a:ext uri="{FF2B5EF4-FFF2-40B4-BE49-F238E27FC236}">
-                <a16:creationId xmlns:a16="http://schemas.microsoft.com/office/drawing/2014/main" id="{C267B8D2-8171-85B7-1C22-8599ABF479DF}"/>
+                <a16:creationId xmlns:a16="http://schemas.microsoft.com/office/drawing/2014/main" id="{5B218B90-9500-9772-99D0-C8E3539C4BEA}"/>
               </a:ext>
             </a:extLst>
           </p:cNvPr>
@@ -5799,8 +5799,8 @@
         </p:nvSpPr>
         <p:spPr>
           <a:xfrm>
-            <a:off x="1335993" y="3089213"/>
-            <a:ext cx="3960232" cy="741248"/>
+            <a:off x="1313363" y="3080111"/>
+            <a:ext cx="4005492" cy="772459"/>
           </a:xfrm>
           <a:prstGeom prst="rect">
             <a:avLst/>
@@ -5834,7 +5834,7 @@
           <p:cNvPr id="7" name="item_2_title">
             <a:extLst>
               <a:ext uri="{FF2B5EF4-FFF2-40B4-BE49-F238E27FC236}">
-                <a16:creationId xmlns:a16="http://schemas.microsoft.com/office/drawing/2014/main" id="{B7298351-7880-4B59-B271-D7F2C787B158}"/>
+                <a16:creationId xmlns:a16="http://schemas.microsoft.com/office/drawing/2014/main" id="{93C3BEDD-C6B8-7140-2BB9-05A87D342383}"/>
               </a:ext>
             </a:extLst>
           </p:cNvPr>
@@ -5847,8 +5847,8 @@
         </p:nvSpPr>
         <p:spPr>
           <a:xfrm>
-            <a:off x="5839342" y="2780360"/>
-            <a:ext cx="3960232" cy="308853"/>
+            <a:off x="5816712" y="2758252"/>
+            <a:ext cx="4005492" cy="321858"/>
           </a:xfrm>
           <a:prstGeom prst="rect">
             <a:avLst/>
@@ -5865,7 +5865,7 @@
               </a:spcBef>
               <a:buFontTx/>
               <a:buNone/>
-              <a:defRPr sz="2200" b="1">
+              <a:defRPr sz="2000" b="1">
                 <a:solidFill>
                   <a:schemeClr val="accent1"/>
                 </a:solidFill>
@@ -5887,7 +5887,7 @@
           <p:cNvPr id="8" name="item_2">
             <a:extLst>
               <a:ext uri="{FF2B5EF4-FFF2-40B4-BE49-F238E27FC236}">
-                <a16:creationId xmlns:a16="http://schemas.microsoft.com/office/drawing/2014/main" id="{468FE055-F5FF-DC66-90B6-5927E61FFC6F}"/>
+                <a16:creationId xmlns:a16="http://schemas.microsoft.com/office/drawing/2014/main" id="{3C0A85AD-80A4-19FD-8E1E-2B0F98672AD9}"/>
               </a:ext>
             </a:extLst>
           </p:cNvPr>
@@ -5900,8 +5900,8 @@
         </p:nvSpPr>
         <p:spPr>
           <a:xfrm>
-            <a:off x="5839342" y="3089213"/>
-            <a:ext cx="3960232" cy="741248"/>
+            <a:off x="5816712" y="3080111"/>
+            <a:ext cx="4005492" cy="772459"/>
           </a:xfrm>
           <a:prstGeom prst="rect">
             <a:avLst/>
@@ -5935,7 +5935,7 @@
           <p:cNvPr id="10" name="item_3_title">
             <a:extLst>
               <a:ext uri="{FF2B5EF4-FFF2-40B4-BE49-F238E27FC236}">
-                <a16:creationId xmlns:a16="http://schemas.microsoft.com/office/drawing/2014/main" id="{C8968E17-27E5-40D8-EE69-EE1504523F35}"/>
+                <a16:creationId xmlns:a16="http://schemas.microsoft.com/office/drawing/2014/main" id="{2A2C396A-F085-FC91-3EDE-C8D20C2E23D5}"/>
               </a:ext>
             </a:extLst>
           </p:cNvPr>
@@ -5948,8 +5948,8 @@
         </p:nvSpPr>
         <p:spPr>
           <a:xfrm>
-            <a:off x="1335993" y="4361040"/>
-            <a:ext cx="3960232" cy="308853"/>
+            <a:off x="1313363" y="4338932"/>
+            <a:ext cx="4005492" cy="321858"/>
           </a:xfrm>
           <a:prstGeom prst="rect">
             <a:avLst/>
@@ -5966,7 +5966,7 @@
               </a:spcBef>
               <a:buFontTx/>
               <a:buNone/>
-              <a:defRPr sz="2200" b="1">
+              <a:defRPr sz="2000" b="1">
                 <a:solidFill>
                   <a:schemeClr val="accent1"/>
                 </a:solidFill>
@@ -5988,7 +5988,7 @@
           <p:cNvPr id="11" name="item_3">
             <a:extLst>
               <a:ext uri="{FF2B5EF4-FFF2-40B4-BE49-F238E27FC236}">
-                <a16:creationId xmlns:a16="http://schemas.microsoft.com/office/drawing/2014/main" id="{27E46AA8-2CD2-25E8-EBC6-505CBA6EFBC0}"/>
+                <a16:creationId xmlns:a16="http://schemas.microsoft.com/office/drawing/2014/main" id="{B9A4F28F-B120-25DA-6C39-AA03514C28FB}"/>
               </a:ext>
             </a:extLst>
           </p:cNvPr>
@@ -6001,8 +6001,8 @@
         </p:nvSpPr>
         <p:spPr>
           <a:xfrm>
-            <a:off x="1335993" y="4669892"/>
-            <a:ext cx="3960232" cy="741248"/>
+            <a:off x="1313363" y="4660790"/>
+            <a:ext cx="4005492" cy="772459"/>
           </a:xfrm>
           <a:prstGeom prst="rect">
             <a:avLst/>
@@ -6036,7 +6036,7 @@
           <p:cNvPr id="12" name="item_4_title">
             <a:extLst>
               <a:ext uri="{FF2B5EF4-FFF2-40B4-BE49-F238E27FC236}">
-                <a16:creationId xmlns:a16="http://schemas.microsoft.com/office/drawing/2014/main" id="{EFC44175-3842-8915-C5B4-3F966F07B3ED}"/>
+                <a16:creationId xmlns:a16="http://schemas.microsoft.com/office/drawing/2014/main" id="{6ACEEEE5-5453-7178-50CC-04051D8D322F}"/>
               </a:ext>
             </a:extLst>
           </p:cNvPr>
@@ -6049,8 +6049,8 @@
         </p:nvSpPr>
         <p:spPr>
           <a:xfrm>
-            <a:off x="5839342" y="4361040"/>
-            <a:ext cx="3960232" cy="308853"/>
+            <a:off x="5816712" y="4338932"/>
+            <a:ext cx="4005492" cy="321858"/>
           </a:xfrm>
           <a:prstGeom prst="rect">
             <a:avLst/>
@@ -6067,7 +6067,7 @@
               </a:spcBef>
               <a:buFontTx/>
               <a:buNone/>
-              <a:defRPr sz="2200" b="1">
+              <a:defRPr sz="2000" b="1">
                 <a:solidFill>
                   <a:schemeClr val="accent1"/>
                 </a:solidFill>
@@ -6089,7 +6089,7 @@
           <p:cNvPr id="13" name="item_4">
             <a:extLst>
               <a:ext uri="{FF2B5EF4-FFF2-40B4-BE49-F238E27FC236}">
-                <a16:creationId xmlns:a16="http://schemas.microsoft.com/office/drawing/2014/main" id="{4E784CC1-6A39-F4B4-CDA1-2878DB1B451F}"/>
+                <a16:creationId xmlns:a16="http://schemas.microsoft.com/office/drawing/2014/main" id="{254EC800-0DF6-6F4D-EC34-BA61B5DE42E5}"/>
               </a:ext>
             </a:extLst>
           </p:cNvPr>
@@ -6102,8 +6102,8 @@
         </p:nvSpPr>
         <p:spPr>
           <a:xfrm>
-            <a:off x="5839342" y="4669892"/>
-            <a:ext cx="3960232" cy="741248"/>
+            <a:off x="5816712" y="4660790"/>
+            <a:ext cx="4005492" cy="772459"/>
           </a:xfrm>
           <a:prstGeom prst="rect">
             <a:avLst/>
@@ -6137,7 +6137,7 @@
           <p:cNvPr id="14" name="source">
             <a:extLst>
               <a:ext uri="{FF2B5EF4-FFF2-40B4-BE49-F238E27FC236}">
-                <a16:creationId xmlns:a16="http://schemas.microsoft.com/office/drawing/2014/main" id="{FE4A7657-6D4B-BFDE-0A1D-1D33079EB759}"/>
+                <a16:creationId xmlns:a16="http://schemas.microsoft.com/office/drawing/2014/main" id="{C00FDA21-D9CF-1A1D-105A-9914F5E8CE86}"/>
               </a:ext>
             </a:extLst>
           </p:cNvPr>
@@ -6192,7 +6192,7 @@
     </p:spTree>
     <p:extLst>
       <p:ext uri="{BB962C8B-B14F-4D97-AF65-F5344CB8AC3E}">
-        <p14:creationId xmlns:p14="http://schemas.microsoft.com/office/powerpoint/2010/main" val="534330949"/>
+        <p14:creationId xmlns:p14="http://schemas.microsoft.com/office/powerpoint/2010/main" val="1814727822"/>
       </p:ext>
     </p:extLst>
   </p:cSld>
@@ -6266,7 +6266,7 @@
           <a:bodyPr/>
           <a:lstStyle/>
           <a:p>
-            <a:fld id="{91D5A71C-095D-4D8D-B06B-C24FC842AAAF}" type="datetimeFigureOut">
+            <a:fld id="{7B725182-F003-4077-8770-ED171BB46558}" type="datetimeFigureOut">
               <a:rPr lang="en-US" smtClean="0"/>
               <a:t>10/3/2026</a:t>
             </a:fld>
@@ -6308,7 +6308,7 @@
           <a:bodyPr/>
           <a:lstStyle/>
           <a:p>
-            <a:fld id="{67E77E8F-6FD3-4FA1-8A93-F369CE057DF3}" type="slidenum">
+            <a:fld id="{0120019D-D5E9-42EC-8806-1AB6BBDB44DC}" type="slidenum">
               <a:rPr lang="en-US" smtClean="0"/>
               <a:t>‹#›</a:t>
             </a:fld>
@@ -6321,7 +6321,7 @@
           <p:cNvPr id="2" name="item_1_title">
             <a:extLst>
               <a:ext uri="{FF2B5EF4-FFF2-40B4-BE49-F238E27FC236}">
-                <a16:creationId xmlns:a16="http://schemas.microsoft.com/office/drawing/2014/main" id="{F91DCC82-0E3C-5354-240C-74C4A7F0B54F}"/>
+                <a16:creationId xmlns:a16="http://schemas.microsoft.com/office/drawing/2014/main" id="{82226C88-4535-2310-DDD6-865CF0DAEBF1}"/>
               </a:ext>
             </a:extLst>
           </p:cNvPr>
@@ -6334,8 +6334,8 @@
         </p:nvSpPr>
         <p:spPr>
           <a:xfrm>
-            <a:off x="1154954" y="2917659"/>
-            <a:ext cx="2070635" cy="785395"/>
+            <a:off x="1313363" y="3039830"/>
+            <a:ext cx="1753817" cy="703946"/>
           </a:xfrm>
         </p:spPr>
         <p:txBody>
@@ -6349,7 +6349,7 @@
               </a:spcBef>
               <a:buFontTx/>
               <a:buNone/>
-              <a:defRPr sz="2200" b="1">
+              <a:defRPr sz="2000" b="1">
                 <a:solidFill>
                   <a:schemeClr val="accent1"/>
                 </a:solidFill>
@@ -6371,7 +6371,7 @@
           <p:cNvPr id="6" name="item_1">
             <a:extLst>
               <a:ext uri="{FF2B5EF4-FFF2-40B4-BE49-F238E27FC236}">
-                <a16:creationId xmlns:a16="http://schemas.microsoft.com/office/drawing/2014/main" id="{AAD952E3-A628-29FD-4720-B68271E7A063}"/>
+                <a16:creationId xmlns:a16="http://schemas.microsoft.com/office/drawing/2014/main" id="{3223BBD6-3AF5-A59C-BE32-99EFB1CB77F6}"/>
               </a:ext>
             </a:extLst>
           </p:cNvPr>
@@ -6384,8 +6384,8 @@
         </p:nvSpPr>
         <p:spPr>
           <a:xfrm>
-            <a:off x="1154955" y="3703054"/>
-            <a:ext cx="2070635" cy="1884947"/>
+            <a:off x="1313364" y="3743778"/>
+            <a:ext cx="1753817" cy="1689471"/>
           </a:xfrm>
           <a:prstGeom prst="rect">
             <a:avLst/>
@@ -6419,7 +6419,7 @@
           <p:cNvPr id="7" name="item_2_title">
             <a:extLst>
               <a:ext uri="{FF2B5EF4-FFF2-40B4-BE49-F238E27FC236}">
-                <a16:creationId xmlns:a16="http://schemas.microsoft.com/office/drawing/2014/main" id="{253E7CA6-1C72-6769-9AF5-3C271C02EDB8}"/>
+                <a16:creationId xmlns:a16="http://schemas.microsoft.com/office/drawing/2014/main" id="{B40132B9-1F41-3E0F-6EE2-944D1399BDE6}"/>
               </a:ext>
             </a:extLst>
           </p:cNvPr>
@@ -6432,8 +6432,8 @@
         </p:nvSpPr>
         <p:spPr>
           <a:xfrm>
-            <a:off x="3406629" y="2917659"/>
-            <a:ext cx="2070635" cy="785395"/>
+            <a:off x="3565039" y="3039830"/>
+            <a:ext cx="1753817" cy="703946"/>
           </a:xfrm>
           <a:prstGeom prst="rect">
             <a:avLst/>
@@ -6450,7 +6450,7 @@
               </a:spcBef>
               <a:buFontTx/>
               <a:buNone/>
-              <a:defRPr sz="2200" b="1">
+              <a:defRPr sz="2000" b="1">
                 <a:solidFill>
                   <a:schemeClr val="accent1"/>
                 </a:solidFill>
@@ -6472,7 +6472,7 @@
           <p:cNvPr id="8" name="item_2">
             <a:extLst>
               <a:ext uri="{FF2B5EF4-FFF2-40B4-BE49-F238E27FC236}">
-                <a16:creationId xmlns:a16="http://schemas.microsoft.com/office/drawing/2014/main" id="{27F096C7-0988-FF27-53EE-261A2FA54794}"/>
+                <a16:creationId xmlns:a16="http://schemas.microsoft.com/office/drawing/2014/main" id="{A277FC52-2BC2-9031-2999-35C04980D8BE}"/>
               </a:ext>
             </a:extLst>
           </p:cNvPr>
@@ -6485,8 +6485,8 @@
         </p:nvSpPr>
         <p:spPr>
           <a:xfrm>
-            <a:off x="3406629" y="3703054"/>
-            <a:ext cx="2070635" cy="1884947"/>
+            <a:off x="3565039" y="3743778"/>
+            <a:ext cx="1753817" cy="1689471"/>
           </a:xfrm>
           <a:prstGeom prst="rect">
             <a:avLst/>
@@ -6520,7 +6520,7 @@
           <p:cNvPr id="10" name="item_3_title">
             <a:extLst>
               <a:ext uri="{FF2B5EF4-FFF2-40B4-BE49-F238E27FC236}">
-                <a16:creationId xmlns:a16="http://schemas.microsoft.com/office/drawing/2014/main" id="{3463DDE1-4F8D-54E6-84C9-1346B5827E06}"/>
+                <a16:creationId xmlns:a16="http://schemas.microsoft.com/office/drawing/2014/main" id="{E2FA1EAB-A2D1-A277-A7EC-2089FAC965A6}"/>
               </a:ext>
             </a:extLst>
           </p:cNvPr>
@@ -6533,8 +6533,8 @@
         </p:nvSpPr>
         <p:spPr>
           <a:xfrm>
-            <a:off x="5658304" y="2917659"/>
-            <a:ext cx="2070635" cy="785395"/>
+            <a:off x="5816713" y="3039830"/>
+            <a:ext cx="1753817" cy="703946"/>
           </a:xfrm>
           <a:prstGeom prst="rect">
             <a:avLst/>
@@ -6551,7 +6551,7 @@
               </a:spcBef>
               <a:buFontTx/>
               <a:buNone/>
-              <a:defRPr sz="2200" b="1">
+              <a:defRPr sz="2000" b="1">
                 <a:solidFill>
                   <a:schemeClr val="accent1"/>
                 </a:solidFill>
@@ -6573,7 +6573,7 @@
           <p:cNvPr id="11" name="item_3">
             <a:extLst>
               <a:ext uri="{FF2B5EF4-FFF2-40B4-BE49-F238E27FC236}">
-                <a16:creationId xmlns:a16="http://schemas.microsoft.com/office/drawing/2014/main" id="{FA4E1A6D-DFDE-143B-F4CA-5AC02DE7CC42}"/>
+                <a16:creationId xmlns:a16="http://schemas.microsoft.com/office/drawing/2014/main" id="{5BC896BF-47D0-72C2-07E5-3A1B4491BA74}"/>
               </a:ext>
             </a:extLst>
           </p:cNvPr>
@@ -6586,8 +6586,8 @@
         </p:nvSpPr>
         <p:spPr>
           <a:xfrm>
-            <a:off x="5658304" y="3703054"/>
-            <a:ext cx="2070635" cy="1884947"/>
+            <a:off x="5816713" y="3743778"/>
+            <a:ext cx="1753817" cy="1689471"/>
           </a:xfrm>
           <a:prstGeom prst="rect">
             <a:avLst/>
@@ -6621,7 +6621,7 @@
           <p:cNvPr id="12" name="item_4_title">
             <a:extLst>
               <a:ext uri="{FF2B5EF4-FFF2-40B4-BE49-F238E27FC236}">
-                <a16:creationId xmlns:a16="http://schemas.microsoft.com/office/drawing/2014/main" id="{3E6EEFCB-AD15-5EE9-0153-F67431C09C19}"/>
+                <a16:creationId xmlns:a16="http://schemas.microsoft.com/office/drawing/2014/main" id="{34338165-76DB-F1F3-5E2C-6A3ED9F9C11D}"/>
               </a:ext>
             </a:extLst>
           </p:cNvPr>
@@ -6634,8 +6634,8 @@
         </p:nvSpPr>
         <p:spPr>
           <a:xfrm>
-            <a:off x="7909979" y="2917659"/>
-            <a:ext cx="2070635" cy="785395"/>
+            <a:off x="8068388" y="3039830"/>
+            <a:ext cx="1753817" cy="703946"/>
           </a:xfrm>
           <a:prstGeom prst="rect">
             <a:avLst/>
@@ -6652,7 +6652,7 @@
               </a:spcBef>
               <a:buFontTx/>
               <a:buNone/>
-              <a:defRPr sz="2200" b="1">
+              <a:defRPr sz="2000" b="1">
                 <a:solidFill>
                   <a:schemeClr val="accent1"/>
                 </a:solidFill>
@@ -6674,7 +6674,7 @@
           <p:cNvPr id="13" name="item_4">
             <a:extLst>
               <a:ext uri="{FF2B5EF4-FFF2-40B4-BE49-F238E27FC236}">
-                <a16:creationId xmlns:a16="http://schemas.microsoft.com/office/drawing/2014/main" id="{4A7F6E63-DCA2-FA85-1239-E4042BF93143}"/>
+                <a16:creationId xmlns:a16="http://schemas.microsoft.com/office/drawing/2014/main" id="{8A4E9DF8-ACD1-AE3C-CA37-4BFD4E96F235}"/>
               </a:ext>
             </a:extLst>
           </p:cNvPr>
@@ -6687,8 +6687,8 @@
         </p:nvSpPr>
         <p:spPr>
           <a:xfrm>
-            <a:off x="7909979" y="3703054"/>
-            <a:ext cx="2070635" cy="1884947"/>
+            <a:off x="8068388" y="3743778"/>
+            <a:ext cx="1753817" cy="1689471"/>
           </a:xfrm>
           <a:prstGeom prst="rect">
             <a:avLst/>
@@ -6722,7 +6722,7 @@
           <p:cNvPr id="14" name="source">
             <a:extLst>
               <a:ext uri="{FF2B5EF4-FFF2-40B4-BE49-F238E27FC236}">
-                <a16:creationId xmlns:a16="http://schemas.microsoft.com/office/drawing/2014/main" id="{AA961439-B6DA-D87B-0562-B89081F07F85}"/>
+                <a16:creationId xmlns:a16="http://schemas.microsoft.com/office/drawing/2014/main" id="{935CBFBB-42D8-1DC5-B208-9367017128A5}"/>
               </a:ext>
             </a:extLst>
           </p:cNvPr>
@@ -6777,7 +6777,7 @@
     </p:spTree>
     <p:extLst>
       <p:ext uri="{BB962C8B-B14F-4D97-AF65-F5344CB8AC3E}">
-        <p14:creationId xmlns:p14="http://schemas.microsoft.com/office/powerpoint/2010/main" val="3783221454"/>
+        <p14:creationId xmlns:p14="http://schemas.microsoft.com/office/powerpoint/2010/main" val="910586570"/>
       </p:ext>
     </p:extLst>
   </p:cSld>
@@ -6851,7 +6851,7 @@
           <a:bodyPr/>
           <a:lstStyle/>
           <a:p>
-            <a:fld id="{91D5A71C-095D-4D8D-B06B-C24FC842AAAF}" type="datetimeFigureOut">
+            <a:fld id="{7B725182-F003-4077-8770-ED171BB46558}" type="datetimeFigureOut">
               <a:rPr lang="en-US" smtClean="0"/>
               <a:t>10/3/2026</a:t>
             </a:fld>
@@ -6893,7 +6893,7 @@
           <a:bodyPr/>
           <a:lstStyle/>
           <a:p>
-            <a:fld id="{67E77E8F-6FD3-4FA1-8A93-F369CE057DF3}" type="slidenum">
+            <a:fld id="{0120019D-D5E9-42EC-8806-1AB6BBDB44DC}" type="slidenum">
               <a:rPr lang="en-US" smtClean="0"/>
               <a:t>‹#›</a:t>
             </a:fld>
@@ -6906,7 +6906,7 @@
           <p:cNvPr id="2" name="kpi_value_1">
             <a:extLst>
               <a:ext uri="{FF2B5EF4-FFF2-40B4-BE49-F238E27FC236}">
-                <a16:creationId xmlns:a16="http://schemas.microsoft.com/office/drawing/2014/main" id="{47CDD1B9-07FC-78F4-6C3D-33BB9E215380}"/>
+                <a16:creationId xmlns:a16="http://schemas.microsoft.com/office/drawing/2014/main" id="{A3C258D2-A8E1-0B90-72A7-638F013A9DA8}"/>
               </a:ext>
             </a:extLst>
           </p:cNvPr>
@@ -6919,8 +6919,8 @@
         </p:nvSpPr>
         <p:spPr>
           <a:xfrm>
-            <a:off x="1335993" y="2780360"/>
-            <a:ext cx="4227264" cy="1631085"/>
+            <a:off x="1313363" y="2758252"/>
+            <a:ext cx="4272524" cy="1658498"/>
           </a:xfrm>
         </p:spPr>
         <p:txBody>
@@ -6956,7 +6956,7 @@
           <p:cNvPr id="6" name="kpi_label_1">
             <a:extLst>
               <a:ext uri="{FF2B5EF4-FFF2-40B4-BE49-F238E27FC236}">
-                <a16:creationId xmlns:a16="http://schemas.microsoft.com/office/drawing/2014/main" id="{99B47576-865B-E35C-6591-E7CAC5F4692E}"/>
+                <a16:creationId xmlns:a16="http://schemas.microsoft.com/office/drawing/2014/main" id="{8F7CD09A-C023-836C-AA4E-B8F7F9F7248D}"/>
               </a:ext>
             </a:extLst>
           </p:cNvPr>
@@ -6969,8 +6969,8 @@
         </p:nvSpPr>
         <p:spPr>
           <a:xfrm>
-            <a:off x="1335993" y="4464060"/>
-            <a:ext cx="4227264" cy="947081"/>
+            <a:off x="1313363" y="4470251"/>
+            <a:ext cx="4272524" cy="962999"/>
           </a:xfrm>
           <a:prstGeom prst="rect">
             <a:avLst/>
@@ -6987,7 +6987,7 @@
               </a:spcBef>
               <a:buFontTx/>
               <a:buNone/>
-              <a:defRPr sz="1800"/>
+              <a:defRPr sz="2000"/>
             </a:lvl1pPr>
           </a:lstStyle>
           <a:p>
@@ -7004,7 +7004,7 @@
           <p:cNvPr id="7" name="quote">
             <a:extLst>
               <a:ext uri="{FF2B5EF4-FFF2-40B4-BE49-F238E27FC236}">
-                <a16:creationId xmlns:a16="http://schemas.microsoft.com/office/drawing/2014/main" id="{5D901B81-17BB-9A43-EC8C-203459FAAFCA}"/>
+                <a16:creationId xmlns:a16="http://schemas.microsoft.com/office/drawing/2014/main" id="{62C5E8AF-3BF4-753F-FCBE-004124C901E7}"/>
               </a:ext>
             </a:extLst>
           </p:cNvPr>
@@ -7017,8 +7017,8 @@
         </p:nvSpPr>
         <p:spPr>
           <a:xfrm>
-            <a:off x="1335993" y="2780359"/>
-            <a:ext cx="4227264" cy="2052010"/>
+            <a:off x="1313363" y="2758253"/>
+            <a:ext cx="4272524" cy="2086497"/>
           </a:xfrm>
           <a:prstGeom prst="rect">
             <a:avLst/>
@@ -7035,7 +7035,7 @@
               </a:spcBef>
               <a:buFontTx/>
               <a:buNone/>
-              <a:defRPr sz="2400" i="1">
+              <a:defRPr sz="2000" i="1">
                 <a:latin typeface="+mj-lt"/>
               </a:defRPr>
             </a:lvl1pPr>
@@ -7054,7 +7054,7 @@
           <p:cNvPr id="8" name="attribution">
             <a:extLst>
               <a:ext uri="{FF2B5EF4-FFF2-40B4-BE49-F238E27FC236}">
-                <a16:creationId xmlns:a16="http://schemas.microsoft.com/office/drawing/2014/main" id="{50B55BF7-0FB8-6EFD-B824-A7C44B1A9D24}"/>
+                <a16:creationId xmlns:a16="http://schemas.microsoft.com/office/drawing/2014/main" id="{5C204278-6B9A-BA60-B993-C09A8B8067F9}"/>
               </a:ext>
             </a:extLst>
           </p:cNvPr>
@@ -7067,8 +7067,8 @@
         </p:nvSpPr>
         <p:spPr>
           <a:xfrm>
-            <a:off x="1335993" y="4884984"/>
-            <a:ext cx="4227264" cy="526156"/>
+            <a:off x="1313363" y="4898250"/>
+            <a:ext cx="4272524" cy="534999"/>
           </a:xfrm>
           <a:prstGeom prst="rect">
             <a:avLst/>
@@ -7085,7 +7085,7 @@
               </a:spcBef>
               <a:buFontTx/>
               <a:buNone/>
-              <a:defRPr sz="1400"/>
+              <a:defRPr sz="2000"/>
             </a:lvl1pPr>
           </a:lstStyle>
           <a:p>
@@ -7102,7 +7102,7 @@
           <p:cNvPr id="10" name="item_1_title">
             <a:extLst>
               <a:ext uri="{FF2B5EF4-FFF2-40B4-BE49-F238E27FC236}">
-                <a16:creationId xmlns:a16="http://schemas.microsoft.com/office/drawing/2014/main" id="{928205E2-A120-FCE5-C2F2-68F00AB67785}"/>
+                <a16:creationId xmlns:a16="http://schemas.microsoft.com/office/drawing/2014/main" id="{BB2F83C9-667D-EE0F-A6E6-9DEB789E13F8}"/>
               </a:ext>
             </a:extLst>
           </p:cNvPr>
@@ -7133,7 +7133,7 @@
               </a:spcBef>
               <a:buFontTx/>
               <a:buNone/>
-              <a:defRPr sz="2200" b="1">
+              <a:defRPr sz="2000" b="1">
                 <a:solidFill>
                   <a:schemeClr val="accent1"/>
                 </a:solidFill>
@@ -7155,7 +7155,7 @@
           <p:cNvPr id="11" name="item_1">
             <a:extLst>
               <a:ext uri="{FF2B5EF4-FFF2-40B4-BE49-F238E27FC236}">
-                <a16:creationId xmlns:a16="http://schemas.microsoft.com/office/drawing/2014/main" id="{30062C51-F836-4FA3-1F58-D7266DA35B38}"/>
+                <a16:creationId xmlns:a16="http://schemas.microsoft.com/office/drawing/2014/main" id="{D8F8FCF6-2D5D-D28C-6F66-D7D3DCF33166}"/>
               </a:ext>
             </a:extLst>
           </p:cNvPr>
@@ -7203,7 +7203,7 @@
           <p:cNvPr id="12" name="source">
             <a:extLst>
               <a:ext uri="{FF2B5EF4-FFF2-40B4-BE49-F238E27FC236}">
-                <a16:creationId xmlns:a16="http://schemas.microsoft.com/office/drawing/2014/main" id="{B7839DED-AAEC-2650-0D8F-3A6BFA979BB2}"/>
+                <a16:creationId xmlns:a16="http://schemas.microsoft.com/office/drawing/2014/main" id="{0E38B6BA-8A3B-D41E-6543-D604BE067674}"/>
               </a:ext>
             </a:extLst>
           </p:cNvPr>
@@ -7258,7 +7258,7 @@
     </p:spTree>
     <p:extLst>
       <p:ext uri="{BB962C8B-B14F-4D97-AF65-F5344CB8AC3E}">
-        <p14:creationId xmlns:p14="http://schemas.microsoft.com/office/powerpoint/2010/main" val="2451512861"/>
+        <p14:creationId xmlns:p14="http://schemas.microsoft.com/office/powerpoint/2010/main" val="4006488760"/>
       </p:ext>
     </p:extLst>
   </p:cSld>
@@ -7332,7 +7332,7 @@
           <a:bodyPr/>
           <a:lstStyle/>
           <a:p>
-            <a:fld id="{91D5A71C-095D-4D8D-B06B-C24FC842AAAF}" type="datetimeFigureOut">
+            <a:fld id="{7B725182-F003-4077-8770-ED171BB46558}" type="datetimeFigureOut">
               <a:rPr lang="en-US" smtClean="0"/>
               <a:t>10/3/2026</a:t>
             </a:fld>
@@ -7374,7 +7374,7 @@
           <a:bodyPr/>
           <a:lstStyle/>
           <a:p>
-            <a:fld id="{67E77E8F-6FD3-4FA1-8A93-F369CE057DF3}" type="slidenum">
+            <a:fld id="{0120019D-D5E9-42EC-8806-1AB6BBDB44DC}" type="slidenum">
               <a:rPr lang="en-US" smtClean="0"/>
               <a:t>‹#›</a:t>
             </a:fld>
@@ -7387,7 +7387,7 @@
           <p:cNvPr id="2" name="item_1_title">
             <a:extLst>
               <a:ext uri="{FF2B5EF4-FFF2-40B4-BE49-F238E27FC236}">
-                <a16:creationId xmlns:a16="http://schemas.microsoft.com/office/drawing/2014/main" id="{69BC96CC-8F4A-53DF-177F-890F658CA706}"/>
+                <a16:creationId xmlns:a16="http://schemas.microsoft.com/office/drawing/2014/main" id="{DF1E56F1-F299-8671-2C18-53A3FF282703}"/>
               </a:ext>
             </a:extLst>
           </p:cNvPr>
@@ -7400,8 +7400,8 @@
         </p:nvSpPr>
         <p:spPr>
           <a:xfrm>
-            <a:off x="1335993" y="2780360"/>
-            <a:ext cx="2459115" cy="773759"/>
+            <a:off x="1313363" y="2758252"/>
+            <a:ext cx="2504375" cy="786764"/>
           </a:xfrm>
         </p:spPr>
         <p:txBody>
@@ -7415,7 +7415,7 @@
               </a:spcBef>
               <a:buFontTx/>
               <a:buNone/>
-              <a:defRPr sz="2200" b="1">
+              <a:defRPr sz="2000" b="1">
                 <a:solidFill>
                   <a:schemeClr val="accent1"/>
                 </a:solidFill>
@@ -7437,7 +7437,7 @@
           <p:cNvPr id="6" name="item_1">
             <a:extLst>
               <a:ext uri="{FF2B5EF4-FFF2-40B4-BE49-F238E27FC236}">
-                <a16:creationId xmlns:a16="http://schemas.microsoft.com/office/drawing/2014/main" id="{FC8910E2-4739-D295-518A-0A9E3A7EBB0E}"/>
+                <a16:creationId xmlns:a16="http://schemas.microsoft.com/office/drawing/2014/main" id="{6F05B1DB-B34B-FED5-7160-63B2A0FA5136}"/>
               </a:ext>
             </a:extLst>
           </p:cNvPr>
@@ -7450,8 +7450,8 @@
         </p:nvSpPr>
         <p:spPr>
           <a:xfrm>
-            <a:off x="1335994" y="3554118"/>
-            <a:ext cx="2459115" cy="1857022"/>
+            <a:off x="1313364" y="3545016"/>
+            <a:ext cx="2504375" cy="1888233"/>
           </a:xfrm>
           <a:prstGeom prst="rect">
             <a:avLst/>
@@ -7485,7 +7485,7 @@
           <p:cNvPr id="7" name="item_2_title">
             <a:extLst>
               <a:ext uri="{FF2B5EF4-FFF2-40B4-BE49-F238E27FC236}">
-                <a16:creationId xmlns:a16="http://schemas.microsoft.com/office/drawing/2014/main" id="{EC70288B-A1CF-3B2A-6284-12FA4FD5599D}"/>
+                <a16:creationId xmlns:a16="http://schemas.microsoft.com/office/drawing/2014/main" id="{6F3E7907-32D0-15D8-9501-1A0550251E24}"/>
               </a:ext>
             </a:extLst>
           </p:cNvPr>
@@ -7498,8 +7498,8 @@
         </p:nvSpPr>
         <p:spPr>
           <a:xfrm>
-            <a:off x="4338227" y="2780360"/>
-            <a:ext cx="2459115" cy="773759"/>
+            <a:off x="4315597" y="2758252"/>
+            <a:ext cx="2504375" cy="786764"/>
           </a:xfrm>
           <a:prstGeom prst="rect">
             <a:avLst/>
@@ -7516,7 +7516,7 @@
               </a:spcBef>
               <a:buFontTx/>
               <a:buNone/>
-              <a:defRPr sz="2200" b="1">
+              <a:defRPr sz="2000" b="1">
                 <a:solidFill>
                   <a:schemeClr val="accent1"/>
                 </a:solidFill>
@@ -7538,7 +7538,7 @@
           <p:cNvPr id="8" name="item_2">
             <a:extLst>
               <a:ext uri="{FF2B5EF4-FFF2-40B4-BE49-F238E27FC236}">
-                <a16:creationId xmlns:a16="http://schemas.microsoft.com/office/drawing/2014/main" id="{BFB59CCC-76B7-0D88-8002-E04FFF239310}"/>
+                <a16:creationId xmlns:a16="http://schemas.microsoft.com/office/drawing/2014/main" id="{9E6D1067-B1F3-28DA-0CE7-E04AEBE5575A}"/>
               </a:ext>
             </a:extLst>
           </p:cNvPr>
@@ -7551,8 +7551,8 @@
         </p:nvSpPr>
         <p:spPr>
           <a:xfrm>
-            <a:off x="4338227" y="3554118"/>
-            <a:ext cx="2459115" cy="1857022"/>
+            <a:off x="4315597" y="3545016"/>
+            <a:ext cx="2504375" cy="1888233"/>
           </a:xfrm>
           <a:prstGeom prst="rect">
             <a:avLst/>
@@ -7586,7 +7586,7 @@
           <p:cNvPr id="10" name="item_3_title">
             <a:extLst>
               <a:ext uri="{FF2B5EF4-FFF2-40B4-BE49-F238E27FC236}">
-                <a16:creationId xmlns:a16="http://schemas.microsoft.com/office/drawing/2014/main" id="{4F4A8E2A-D657-6DE5-01FB-A7FF59F72A1E}"/>
+                <a16:creationId xmlns:a16="http://schemas.microsoft.com/office/drawing/2014/main" id="{5C47C4BF-7B39-23A2-A847-87F2C2E71B66}"/>
               </a:ext>
             </a:extLst>
           </p:cNvPr>
@@ -7599,8 +7599,8 @@
         </p:nvSpPr>
         <p:spPr>
           <a:xfrm>
-            <a:off x="7340460" y="2780360"/>
-            <a:ext cx="2459115" cy="773759"/>
+            <a:off x="7317830" y="2758252"/>
+            <a:ext cx="2504375" cy="786764"/>
           </a:xfrm>
           <a:prstGeom prst="rect">
             <a:avLst/>
@@ -7617,7 +7617,7 @@
               </a:spcBef>
               <a:buFontTx/>
               <a:buNone/>
-              <a:defRPr sz="2200" b="1">
+              <a:defRPr sz="2000" b="1">
                 <a:solidFill>
                   <a:schemeClr val="accent1"/>
                 </a:solidFill>
@@ -7639,7 +7639,7 @@
           <p:cNvPr id="11" name="item_3">
             <a:extLst>
               <a:ext uri="{FF2B5EF4-FFF2-40B4-BE49-F238E27FC236}">
-                <a16:creationId xmlns:a16="http://schemas.microsoft.com/office/drawing/2014/main" id="{BD2C48BB-B527-125E-1C9F-EA8AAD56C764}"/>
+                <a16:creationId xmlns:a16="http://schemas.microsoft.com/office/drawing/2014/main" id="{C86EE72B-BBF9-437A-2CD5-EFBFBF7E9B78}"/>
               </a:ext>
             </a:extLst>
           </p:cNvPr>
@@ -7652,8 +7652,8 @@
         </p:nvSpPr>
         <p:spPr>
           <a:xfrm>
-            <a:off x="7340460" y="3554118"/>
-            <a:ext cx="2459115" cy="1857022"/>
+            <a:off x="7317830" y="3545016"/>
+            <a:ext cx="2504375" cy="1888233"/>
           </a:xfrm>
           <a:prstGeom prst="rect">
             <a:avLst/>
@@ -7687,7 +7687,7 @@
           <p:cNvPr id="12" name="source">
             <a:extLst>
               <a:ext uri="{FF2B5EF4-FFF2-40B4-BE49-F238E27FC236}">
-                <a16:creationId xmlns:a16="http://schemas.microsoft.com/office/drawing/2014/main" id="{D7A7EFD6-98CE-CA1B-56A0-9E2FA9A7B244}"/>
+                <a16:creationId xmlns:a16="http://schemas.microsoft.com/office/drawing/2014/main" id="{892233CE-334E-BA65-94BF-ACA607DFF080}"/>
               </a:ext>
             </a:extLst>
           </p:cNvPr>
@@ -7742,7 +7742,7 @@
     </p:spTree>
     <p:extLst>
       <p:ext uri="{BB962C8B-B14F-4D97-AF65-F5344CB8AC3E}">
-        <p14:creationId xmlns:p14="http://schemas.microsoft.com/office/powerpoint/2010/main" val="3050338695"/>
+        <p14:creationId xmlns:p14="http://schemas.microsoft.com/office/powerpoint/2010/main" val="2177317302"/>
       </p:ext>
     </p:extLst>
   </p:cSld>
@@ -7816,7 +7816,7 @@
           <a:bodyPr/>
           <a:lstStyle/>
           <a:p>
-            <a:fld id="{91D5A71C-095D-4D8D-B06B-C24FC842AAAF}" type="datetimeFigureOut">
+            <a:fld id="{7B725182-F003-4077-8770-ED171BB46558}" type="datetimeFigureOut">
               <a:rPr lang="en-US" smtClean="0"/>
               <a:t>10/3/2026</a:t>
             </a:fld>
@@ -7858,7 +7858,7 @@
           <a:bodyPr/>
           <a:lstStyle/>
           <a:p>
-            <a:fld id="{67E77E8F-6FD3-4FA1-8A93-F369CE057DF3}" type="slidenum">
+            <a:fld id="{0120019D-D5E9-42EC-8806-1AB6BBDB44DC}" type="slidenum">
               <a:rPr lang="en-US" smtClean="0"/>
               <a:t>‹#›</a:t>
             </a:fld>
@@ -7871,7 +7871,7 @@
           <p:cNvPr id="2" name="marker_1">
             <a:extLst>
               <a:ext uri="{FF2B5EF4-FFF2-40B4-BE49-F238E27FC236}">
-                <a16:creationId xmlns:a16="http://schemas.microsoft.com/office/drawing/2014/main" id="{52DC2EAA-2E95-6529-CD40-5F7E746A76C8}"/>
+                <a16:creationId xmlns:a16="http://schemas.microsoft.com/office/drawing/2014/main" id="{55BA8FE6-569C-87AA-39CF-2A878947D0A0}"/>
               </a:ext>
             </a:extLst>
           </p:cNvPr>
@@ -7884,7 +7884,7 @@
         </p:nvSpPr>
         <p:spPr>
           <a:xfrm>
-            <a:off x="1335993" y="2780360"/>
+            <a:off x="1313363" y="2758253"/>
             <a:ext cx="497858" cy="486363"/>
           </a:xfrm>
           <a:prstGeom prst="ellipse">
@@ -7905,7 +7905,7 @@
               </a:spcBef>
               <a:buFontTx/>
               <a:buNone/>
-              <a:defRPr sz="2400" b="1">
+              <a:defRPr sz="2000" b="1">
                 <a:solidFill>
                   <a:schemeClr val="bg1"/>
                 </a:solidFill>
@@ -7927,7 +7927,7 @@
           <p:cNvPr id="6" name="item_1_title">
             <a:extLst>
               <a:ext uri="{FF2B5EF4-FFF2-40B4-BE49-F238E27FC236}">
-                <a16:creationId xmlns:a16="http://schemas.microsoft.com/office/drawing/2014/main" id="{441F939B-CF0C-122E-38C5-352CE2A1EDB8}"/>
+                <a16:creationId xmlns:a16="http://schemas.microsoft.com/office/drawing/2014/main" id="{09D83D36-F8EE-E640-D3C1-936F24ECC734}"/>
               </a:ext>
             </a:extLst>
           </p:cNvPr>
@@ -7940,8 +7940,8 @@
         </p:nvSpPr>
         <p:spPr>
           <a:xfrm>
-            <a:off x="1924371" y="2780360"/>
-            <a:ext cx="7875204" cy="308853"/>
+            <a:off x="1901742" y="2758252"/>
+            <a:ext cx="7920463" cy="321858"/>
           </a:xfrm>
           <a:prstGeom prst="rect">
             <a:avLst/>
@@ -7958,7 +7958,7 @@
               </a:spcBef>
               <a:buFontTx/>
               <a:buNone/>
-              <a:defRPr sz="2200" b="1">
+              <a:defRPr sz="2000" b="1">
                 <a:solidFill>
                   <a:schemeClr val="accent1"/>
                 </a:solidFill>
@@ -7980,7 +7980,7 @@
           <p:cNvPr id="7" name="item_1">
             <a:extLst>
               <a:ext uri="{FF2B5EF4-FFF2-40B4-BE49-F238E27FC236}">
-                <a16:creationId xmlns:a16="http://schemas.microsoft.com/office/drawing/2014/main" id="{E481ADC2-6D8F-CA75-3284-45C27FB64D19}"/>
+                <a16:creationId xmlns:a16="http://schemas.microsoft.com/office/drawing/2014/main" id="{76CB1434-A25D-A3FB-D998-F99784D83376}"/>
               </a:ext>
             </a:extLst>
           </p:cNvPr>
@@ -7993,8 +7993,8 @@
         </p:nvSpPr>
         <p:spPr>
           <a:xfrm>
-            <a:off x="1924371" y="3089213"/>
-            <a:ext cx="7875204" cy="741248"/>
+            <a:off x="1901742" y="3080111"/>
+            <a:ext cx="7920463" cy="772459"/>
           </a:xfrm>
           <a:prstGeom prst="rect">
             <a:avLst/>
@@ -8028,7 +8028,7 @@
           <p:cNvPr id="8" name="marker_2">
             <a:extLst>
               <a:ext uri="{FF2B5EF4-FFF2-40B4-BE49-F238E27FC236}">
-                <a16:creationId xmlns:a16="http://schemas.microsoft.com/office/drawing/2014/main" id="{AAEDDBB2-5B9F-DD4A-B0AD-4851A20ABC68}"/>
+                <a16:creationId xmlns:a16="http://schemas.microsoft.com/office/drawing/2014/main" id="{EAF9D01F-A84F-EDCE-ED3C-2FC42A394360}"/>
               </a:ext>
             </a:extLst>
           </p:cNvPr>
@@ -8041,7 +8041,7 @@
         </p:nvSpPr>
         <p:spPr>
           <a:xfrm>
-            <a:off x="1335993" y="4361040"/>
+            <a:off x="1313363" y="4338933"/>
             <a:ext cx="497858" cy="486363"/>
           </a:xfrm>
           <a:prstGeom prst="ellipse">
@@ -8062,7 +8062,7 @@
               </a:spcBef>
               <a:buFontTx/>
               <a:buNone/>
-              <a:defRPr sz="2400" b="1">
+              <a:defRPr sz="2000" b="1">
                 <a:solidFill>
                   <a:schemeClr val="bg1"/>
                 </a:solidFill>
@@ -8084,7 +8084,7 @@
           <p:cNvPr id="10" name="item_2_title">
             <a:extLst>
               <a:ext uri="{FF2B5EF4-FFF2-40B4-BE49-F238E27FC236}">
-                <a16:creationId xmlns:a16="http://schemas.microsoft.com/office/drawing/2014/main" id="{6E965C29-8DA5-212A-71A2-8106A1246205}"/>
+                <a16:creationId xmlns:a16="http://schemas.microsoft.com/office/drawing/2014/main" id="{8089252A-2012-23DC-4AD5-C0CADFEC19B4}"/>
               </a:ext>
             </a:extLst>
           </p:cNvPr>
@@ -8097,8 +8097,8 @@
         </p:nvSpPr>
         <p:spPr>
           <a:xfrm>
-            <a:off x="1924371" y="4361040"/>
-            <a:ext cx="7875204" cy="308853"/>
+            <a:off x="1901742" y="4338932"/>
+            <a:ext cx="7920463" cy="321858"/>
           </a:xfrm>
           <a:prstGeom prst="rect">
             <a:avLst/>
@@ -8115,7 +8115,7 @@
               </a:spcBef>
               <a:buFontTx/>
               <a:buNone/>
-              <a:defRPr sz="2200" b="1">
+              <a:defRPr sz="2000" b="1">
                 <a:solidFill>
                   <a:schemeClr val="accent1"/>
                 </a:solidFill>
@@ -8137,7 +8137,7 @@
           <p:cNvPr id="11" name="item_2">
             <a:extLst>
               <a:ext uri="{FF2B5EF4-FFF2-40B4-BE49-F238E27FC236}">
-                <a16:creationId xmlns:a16="http://schemas.microsoft.com/office/drawing/2014/main" id="{EEB3F6B3-8611-9D00-87DC-0148F3986072}"/>
+                <a16:creationId xmlns:a16="http://schemas.microsoft.com/office/drawing/2014/main" id="{F01A4BB3-2ADD-30B3-1145-E400199CFBD3}"/>
               </a:ext>
             </a:extLst>
           </p:cNvPr>
@@ -8150,8 +8150,8 @@
         </p:nvSpPr>
         <p:spPr>
           <a:xfrm>
-            <a:off x="1924371" y="4669892"/>
-            <a:ext cx="7875204" cy="741248"/>
+            <a:off x="1901742" y="4660790"/>
+            <a:ext cx="7920463" cy="772459"/>
           </a:xfrm>
           <a:prstGeom prst="rect">
             <a:avLst/>
@@ -8185,7 +8185,7 @@
           <p:cNvPr id="12" name="source">
             <a:extLst>
               <a:ext uri="{FF2B5EF4-FFF2-40B4-BE49-F238E27FC236}">
-                <a16:creationId xmlns:a16="http://schemas.microsoft.com/office/drawing/2014/main" id="{FE8A99A2-3D49-BFEB-37AD-242EAC111144}"/>
+                <a16:creationId xmlns:a16="http://schemas.microsoft.com/office/drawing/2014/main" id="{85DDF1AA-10C1-4279-9976-C3D674BBE3F6}"/>
               </a:ext>
             </a:extLst>
           </p:cNvPr>
@@ -8240,7 +8240,7 @@
     </p:spTree>
     <p:extLst>
       <p:ext uri="{BB962C8B-B14F-4D97-AF65-F5344CB8AC3E}">
-        <p14:creationId xmlns:p14="http://schemas.microsoft.com/office/powerpoint/2010/main" val="2141981420"/>
+        <p14:creationId xmlns:p14="http://schemas.microsoft.com/office/powerpoint/2010/main" val="2159392024"/>
       </p:ext>
     </p:extLst>
   </p:cSld>
@@ -8314,7 +8314,7 @@
           <a:bodyPr/>
           <a:lstStyle/>
           <a:p>
-            <a:fld id="{91D5A71C-095D-4D8D-B06B-C24FC842AAAF}" type="datetimeFigureOut">
+            <a:fld id="{7B725182-F003-4077-8770-ED171BB46558}" type="datetimeFigureOut">
               <a:rPr lang="en-US" smtClean="0"/>
               <a:t>10/3/2026</a:t>
             </a:fld>
@@ -8356,7 +8356,7 @@
           <a:bodyPr/>
           <a:lstStyle/>
           <a:p>
-            <a:fld id="{67E77E8F-6FD3-4FA1-8A93-F369CE057DF3}" type="slidenum">
+            <a:fld id="{0120019D-D5E9-42EC-8806-1AB6BBDB44DC}" type="slidenum">
               <a:rPr lang="en-US" smtClean="0"/>
               <a:t>‹#›</a:t>
             </a:fld>
@@ -8369,7 +8369,7 @@
           <p:cNvPr id="2" name="kpi_value_1">
             <a:extLst>
               <a:ext uri="{FF2B5EF4-FFF2-40B4-BE49-F238E27FC236}">
-                <a16:creationId xmlns:a16="http://schemas.microsoft.com/office/drawing/2014/main" id="{E53AF9BD-EE92-9F0E-3467-2645F5500B3B}"/>
+                <a16:creationId xmlns:a16="http://schemas.microsoft.com/office/drawing/2014/main" id="{2F86FB3C-8040-BB5E-7E0A-356F6986AF5E}"/>
               </a:ext>
             </a:extLst>
           </p:cNvPr>
@@ -8382,8 +8382,8 @@
         </p:nvSpPr>
         <p:spPr>
           <a:xfrm>
-            <a:off x="1335993" y="2780360"/>
-            <a:ext cx="4227264" cy="1631085"/>
+            <a:off x="1313363" y="2758252"/>
+            <a:ext cx="4272524" cy="1658498"/>
           </a:xfrm>
         </p:spPr>
         <p:txBody>
@@ -8419,7 +8419,7 @@
           <p:cNvPr id="6" name="kpi_label_1">
             <a:extLst>
               <a:ext uri="{FF2B5EF4-FFF2-40B4-BE49-F238E27FC236}">
-                <a16:creationId xmlns:a16="http://schemas.microsoft.com/office/drawing/2014/main" id="{AB3A9139-9A8E-9890-1418-0E5AC0DEDD8A}"/>
+                <a16:creationId xmlns:a16="http://schemas.microsoft.com/office/drawing/2014/main" id="{BCA8BE99-0379-1C8A-6CB6-E18D5F906E64}"/>
               </a:ext>
             </a:extLst>
           </p:cNvPr>
@@ -8432,8 +8432,8 @@
         </p:nvSpPr>
         <p:spPr>
           <a:xfrm>
-            <a:off x="1335993" y="4464060"/>
-            <a:ext cx="4227264" cy="947081"/>
+            <a:off x="1313363" y="4470251"/>
+            <a:ext cx="4272524" cy="962999"/>
           </a:xfrm>
           <a:prstGeom prst="rect">
             <a:avLst/>
@@ -8450,7 +8450,7 @@
               </a:spcBef>
               <a:buFontTx/>
               <a:buNone/>
-              <a:defRPr sz="1800"/>
+              <a:defRPr sz="2000"/>
             </a:lvl1pPr>
           </a:lstStyle>
           <a:p>
@@ -8467,7 +8467,7 @@
           <p:cNvPr id="7" name="quote">
             <a:extLst>
               <a:ext uri="{FF2B5EF4-FFF2-40B4-BE49-F238E27FC236}">
-                <a16:creationId xmlns:a16="http://schemas.microsoft.com/office/drawing/2014/main" id="{FF1F5925-301D-CAED-FE21-EDB57C9DAED2}"/>
+                <a16:creationId xmlns:a16="http://schemas.microsoft.com/office/drawing/2014/main" id="{3A3C064B-C0DD-06B9-B02C-F9A55DC6C8D9}"/>
               </a:ext>
             </a:extLst>
           </p:cNvPr>
@@ -8480,8 +8480,8 @@
         </p:nvSpPr>
         <p:spPr>
           <a:xfrm>
-            <a:off x="1335993" y="2780359"/>
-            <a:ext cx="4227264" cy="2052010"/>
+            <a:off x="1313363" y="2758253"/>
+            <a:ext cx="4272524" cy="2086497"/>
           </a:xfrm>
           <a:prstGeom prst="rect">
             <a:avLst/>
@@ -8498,7 +8498,7 @@
               </a:spcBef>
               <a:buFontTx/>
               <a:buNone/>
-              <a:defRPr sz="2400" i="1">
+              <a:defRPr sz="2000" i="1">
                 <a:latin typeface="+mj-lt"/>
               </a:defRPr>
             </a:lvl1pPr>
@@ -8517,7 +8517,7 @@
           <p:cNvPr id="8" name="attribution">
             <a:extLst>
               <a:ext uri="{FF2B5EF4-FFF2-40B4-BE49-F238E27FC236}">
-                <a16:creationId xmlns:a16="http://schemas.microsoft.com/office/drawing/2014/main" id="{1DB34AC6-B323-954A-B6CF-3775C5100D93}"/>
+                <a16:creationId xmlns:a16="http://schemas.microsoft.com/office/drawing/2014/main" id="{0C8107E3-0414-5B71-A109-6DD39A463ED7}"/>
               </a:ext>
             </a:extLst>
           </p:cNvPr>
@@ -8530,8 +8530,8 @@
         </p:nvSpPr>
         <p:spPr>
           <a:xfrm>
-            <a:off x="1335993" y="4884984"/>
-            <a:ext cx="4227264" cy="526156"/>
+            <a:off x="1313363" y="4898250"/>
+            <a:ext cx="4272524" cy="534999"/>
           </a:xfrm>
           <a:prstGeom prst="rect">
             <a:avLst/>
@@ -8548,7 +8548,7 @@
               </a:spcBef>
               <a:buFontTx/>
               <a:buNone/>
-              <a:defRPr sz="1400"/>
+              <a:defRPr sz="2000"/>
             </a:lvl1pPr>
           </a:lstStyle>
           <a:p>
@@ -8565,7 +8565,7 @@
           <p:cNvPr id="10" name="item_1_title">
             <a:extLst>
               <a:ext uri="{FF2B5EF4-FFF2-40B4-BE49-F238E27FC236}">
-                <a16:creationId xmlns:a16="http://schemas.microsoft.com/office/drawing/2014/main" id="{D7B1B4A8-CB30-BC68-1C52-A61AA571ED9C}"/>
+                <a16:creationId xmlns:a16="http://schemas.microsoft.com/office/drawing/2014/main" id="{045886D7-76E6-8970-2DB0-3FF3911D22B6}"/>
               </a:ext>
             </a:extLst>
           </p:cNvPr>
@@ -8596,7 +8596,7 @@
               </a:spcBef>
               <a:buFontTx/>
               <a:buNone/>
-              <a:defRPr sz="2200" b="1">
+              <a:defRPr sz="2000" b="1">
                 <a:solidFill>
                   <a:schemeClr val="accent1"/>
                 </a:solidFill>
@@ -8618,7 +8618,7 @@
           <p:cNvPr id="11" name="item_1">
             <a:extLst>
               <a:ext uri="{FF2B5EF4-FFF2-40B4-BE49-F238E27FC236}">
-                <a16:creationId xmlns:a16="http://schemas.microsoft.com/office/drawing/2014/main" id="{40A5D135-CA36-822B-C89A-F25308F187D3}"/>
+                <a16:creationId xmlns:a16="http://schemas.microsoft.com/office/drawing/2014/main" id="{413A8B92-D2D0-5ED5-447D-28D45E016550}"/>
               </a:ext>
             </a:extLst>
           </p:cNvPr>
@@ -8666,7 +8666,7 @@
           <p:cNvPr id="12" name="source">
             <a:extLst>
               <a:ext uri="{FF2B5EF4-FFF2-40B4-BE49-F238E27FC236}">
-                <a16:creationId xmlns:a16="http://schemas.microsoft.com/office/drawing/2014/main" id="{DED0539F-9149-87A2-0A6B-819870F90D11}"/>
+                <a16:creationId xmlns:a16="http://schemas.microsoft.com/office/drawing/2014/main" id="{AD9733AC-CD35-549C-B950-588B1B037F64}"/>
               </a:ext>
             </a:extLst>
           </p:cNvPr>
@@ -8721,7 +8721,7 @@
     </p:spTree>
     <p:extLst>
       <p:ext uri="{BB962C8B-B14F-4D97-AF65-F5344CB8AC3E}">
-        <p14:creationId xmlns:p14="http://schemas.microsoft.com/office/powerpoint/2010/main" val="1052180788"/>
+        <p14:creationId xmlns:p14="http://schemas.microsoft.com/office/powerpoint/2010/main" val="1718860706"/>
       </p:ext>
     </p:extLst>
   </p:cSld>
@@ -8795,7 +8795,7 @@
           <a:bodyPr/>
           <a:lstStyle/>
           <a:p>
-            <a:fld id="{91D5A71C-095D-4D8D-B06B-C24FC842AAAF}" type="datetimeFigureOut">
+            <a:fld id="{7B725182-F003-4077-8770-ED171BB46558}" type="datetimeFigureOut">
               <a:rPr lang="en-US" smtClean="0"/>
               <a:t>10/3/2026</a:t>
             </a:fld>
@@ -8837,7 +8837,7 @@
           <a:bodyPr/>
           <a:lstStyle/>
           <a:p>
-            <a:fld id="{67E77E8F-6FD3-4FA1-8A93-F369CE057DF3}" type="slidenum">
+            <a:fld id="{0120019D-D5E9-42EC-8806-1AB6BBDB44DC}" type="slidenum">
               <a:rPr lang="en-US" smtClean="0"/>
               <a:t>‹#›</a:t>
             </a:fld>
@@ -8850,7 +8850,7 @@
           <p:cNvPr id="2" name="marker_1">
             <a:extLst>
               <a:ext uri="{FF2B5EF4-FFF2-40B4-BE49-F238E27FC236}">
-                <a16:creationId xmlns:a16="http://schemas.microsoft.com/office/drawing/2014/main" id="{AF2E713F-525D-DC7F-3EAE-B34EA8C8ED5C}"/>
+                <a16:creationId xmlns:a16="http://schemas.microsoft.com/office/drawing/2014/main" id="{E5F00D75-62A6-E78A-6B93-F53A43D0FEC7}"/>
               </a:ext>
             </a:extLst>
           </p:cNvPr>
@@ -8884,7 +8884,7 @@
               </a:spcBef>
               <a:buFontTx/>
               <a:buNone/>
-              <a:defRPr sz="2400" b="1">
+              <a:defRPr sz="2000" b="1">
                 <a:solidFill>
                   <a:schemeClr val="bg1"/>
                 </a:solidFill>
@@ -8906,7 +8906,7 @@
           <p:cNvPr id="6" name="item_1">
             <a:extLst>
               <a:ext uri="{FF2B5EF4-FFF2-40B4-BE49-F238E27FC236}">
-                <a16:creationId xmlns:a16="http://schemas.microsoft.com/office/drawing/2014/main" id="{2E28DDFF-C794-ADD9-6B9E-9EDCFB8B433A}"/>
+                <a16:creationId xmlns:a16="http://schemas.microsoft.com/office/drawing/2014/main" id="{7BAB77D7-62BD-D1FC-C4FB-1D4B36F86B04}"/>
               </a:ext>
             </a:extLst>
           </p:cNvPr>
@@ -8954,7 +8954,7 @@
           <p:cNvPr id="7" name="marker_2">
             <a:extLst>
               <a:ext uri="{FF2B5EF4-FFF2-40B4-BE49-F238E27FC236}">
-                <a16:creationId xmlns:a16="http://schemas.microsoft.com/office/drawing/2014/main" id="{9B3EC435-1976-3B7D-E67C-8FA44B291EB9}"/>
+                <a16:creationId xmlns:a16="http://schemas.microsoft.com/office/drawing/2014/main" id="{84FE83D2-833B-4BDE-794A-3F802D5D7169}"/>
               </a:ext>
             </a:extLst>
           </p:cNvPr>
@@ -8988,7 +8988,7 @@
               </a:spcBef>
               <a:buFontTx/>
               <a:buNone/>
-              <a:defRPr sz="2400" b="1">
+              <a:defRPr sz="2000" b="1">
                 <a:solidFill>
                   <a:schemeClr val="bg1"/>
                 </a:solidFill>
@@ -9010,7 +9010,7 @@
           <p:cNvPr id="8" name="item_2">
             <a:extLst>
               <a:ext uri="{FF2B5EF4-FFF2-40B4-BE49-F238E27FC236}">
-                <a16:creationId xmlns:a16="http://schemas.microsoft.com/office/drawing/2014/main" id="{F2B65A78-B39D-7B1C-5EB4-C97E7DE2F54C}"/>
+                <a16:creationId xmlns:a16="http://schemas.microsoft.com/office/drawing/2014/main" id="{A5FA41E1-91DA-C650-4158-7DFCB68F5521}"/>
               </a:ext>
             </a:extLst>
           </p:cNvPr>
@@ -9058,7 +9058,7 @@
           <p:cNvPr id="10" name="marker_3">
             <a:extLst>
               <a:ext uri="{FF2B5EF4-FFF2-40B4-BE49-F238E27FC236}">
-                <a16:creationId xmlns:a16="http://schemas.microsoft.com/office/drawing/2014/main" id="{9FDCB704-E653-C3B7-AD67-A3916C42E8A4}"/>
+                <a16:creationId xmlns:a16="http://schemas.microsoft.com/office/drawing/2014/main" id="{D33F3E27-B691-7A7B-A5D6-3D35809B7674}"/>
               </a:ext>
             </a:extLst>
           </p:cNvPr>
@@ -9092,7 +9092,7 @@
               </a:spcBef>
               <a:buFontTx/>
               <a:buNone/>
-              <a:defRPr sz="2400" b="1">
+              <a:defRPr sz="2000" b="1">
                 <a:solidFill>
                   <a:schemeClr val="bg1"/>
                 </a:solidFill>
@@ -9114,7 +9114,7 @@
           <p:cNvPr id="11" name="item_3">
             <a:extLst>
               <a:ext uri="{FF2B5EF4-FFF2-40B4-BE49-F238E27FC236}">
-                <a16:creationId xmlns:a16="http://schemas.microsoft.com/office/drawing/2014/main" id="{22A42305-ADAA-53A0-27F2-D57237645332}"/>
+                <a16:creationId xmlns:a16="http://schemas.microsoft.com/office/drawing/2014/main" id="{D14EE4DE-B1D2-159F-040B-CE4A83DF582C}"/>
               </a:ext>
             </a:extLst>
           </p:cNvPr>
@@ -9162,7 +9162,7 @@
           <p:cNvPr id="12" name="marker_4">
             <a:extLst>
               <a:ext uri="{FF2B5EF4-FFF2-40B4-BE49-F238E27FC236}">
-                <a16:creationId xmlns:a16="http://schemas.microsoft.com/office/drawing/2014/main" id="{873EDDBD-2810-63C9-293A-ACFD68C4B1C3}"/>
+                <a16:creationId xmlns:a16="http://schemas.microsoft.com/office/drawing/2014/main" id="{C075935F-902B-C7DB-07FE-1E1D6B32D538}"/>
               </a:ext>
             </a:extLst>
           </p:cNvPr>
@@ -9196,7 +9196,7 @@
               </a:spcBef>
               <a:buFontTx/>
               <a:buNone/>
-              <a:defRPr sz="2400" b="1">
+              <a:defRPr sz="2000" b="1">
                 <a:solidFill>
                   <a:schemeClr val="bg1"/>
                 </a:solidFill>
@@ -9218,7 +9218,7 @@
           <p:cNvPr id="13" name="item_4">
             <a:extLst>
               <a:ext uri="{FF2B5EF4-FFF2-40B4-BE49-F238E27FC236}">
-                <a16:creationId xmlns:a16="http://schemas.microsoft.com/office/drawing/2014/main" id="{2A6ADEAA-DF99-7F18-D2E6-3F904F792897}"/>
+                <a16:creationId xmlns:a16="http://schemas.microsoft.com/office/drawing/2014/main" id="{A68C26B2-E7A8-FE5F-C565-5DEA6F43CC16}"/>
               </a:ext>
             </a:extLst>
           </p:cNvPr>
@@ -9266,7 +9266,7 @@
           <p:cNvPr id="14" name="source">
             <a:extLst>
               <a:ext uri="{FF2B5EF4-FFF2-40B4-BE49-F238E27FC236}">
-                <a16:creationId xmlns:a16="http://schemas.microsoft.com/office/drawing/2014/main" id="{0B9F3338-7B27-2101-9C25-7ED1DCD0370C}"/>
+                <a16:creationId xmlns:a16="http://schemas.microsoft.com/office/drawing/2014/main" id="{D714E7FC-3F62-A10E-8E94-1B940EBF34AF}"/>
               </a:ext>
             </a:extLst>
           </p:cNvPr>
@@ -9321,7 +9321,7 @@
     </p:spTree>
     <p:extLst>
       <p:ext uri="{BB962C8B-B14F-4D97-AF65-F5344CB8AC3E}">
-        <p14:creationId xmlns:p14="http://schemas.microsoft.com/office/powerpoint/2010/main" val="235053102"/>
+        <p14:creationId xmlns:p14="http://schemas.microsoft.com/office/powerpoint/2010/main" val="2527767520"/>
       </p:ext>
     </p:extLst>
   </p:cSld>
@@ -9395,7 +9395,7 @@
           <a:bodyPr/>
           <a:lstStyle/>
           <a:p>
-            <a:fld id="{91D5A71C-095D-4D8D-B06B-C24FC842AAAF}" type="datetimeFigureOut">
+            <a:fld id="{7B725182-F003-4077-8770-ED171BB46558}" type="datetimeFigureOut">
               <a:rPr lang="en-US" smtClean="0"/>
               <a:t>10/3/2026</a:t>
             </a:fld>
@@ -9437,7 +9437,7 @@
           <a:bodyPr/>
           <a:lstStyle/>
           <a:p>
-            <a:fld id="{67E77E8F-6FD3-4FA1-8A93-F369CE057DF3}" type="slidenum">
+            <a:fld id="{0120019D-D5E9-42EC-8806-1AB6BBDB44DC}" type="slidenum">
               <a:rPr lang="en-US" smtClean="0"/>
               <a:t>‹#›</a:t>
             </a:fld>
@@ -9450,7 +9450,7 @@
           <p:cNvPr id="2" name="decisions_title">
             <a:extLst>
               <a:ext uri="{FF2B5EF4-FFF2-40B4-BE49-F238E27FC236}">
-                <a16:creationId xmlns:a16="http://schemas.microsoft.com/office/drawing/2014/main" id="{A6B1E57E-7CE1-0236-87C3-F1A14B890469}"/>
+                <a16:creationId xmlns:a16="http://schemas.microsoft.com/office/drawing/2014/main" id="{E0D24F53-C400-DE9F-C647-0A29D7BA75C9}"/>
               </a:ext>
             </a:extLst>
           </p:cNvPr>
@@ -9463,8 +9463,8 @@
         </p:nvSpPr>
         <p:spPr>
           <a:xfrm>
-            <a:off x="1335993" y="4750130"/>
-            <a:ext cx="1932593" cy="661011"/>
+            <a:off x="1313363" y="4728022"/>
+            <a:ext cx="2136262" cy="705226"/>
           </a:xfrm>
         </p:spPr>
         <p:txBody>
@@ -9500,7 +9500,7 @@
           <p:cNvPr id="6" name="decisions">
             <a:extLst>
               <a:ext uri="{FF2B5EF4-FFF2-40B4-BE49-F238E27FC236}">
-                <a16:creationId xmlns:a16="http://schemas.microsoft.com/office/drawing/2014/main" id="{D5AB8933-04E7-3701-8DC1-C70E6EF37CE2}"/>
+                <a16:creationId xmlns:a16="http://schemas.microsoft.com/office/drawing/2014/main" id="{F33203CE-60C0-D570-FB88-46E1B07FC7D8}"/>
               </a:ext>
             </a:extLst>
           </p:cNvPr>
@@ -9513,8 +9513,8 @@
         </p:nvSpPr>
         <p:spPr>
           <a:xfrm>
-            <a:off x="3718922" y="4750130"/>
-            <a:ext cx="6080653" cy="661011"/>
+            <a:off x="3537882" y="4728022"/>
+            <a:ext cx="6284322" cy="705226"/>
           </a:xfrm>
           <a:prstGeom prst="rect">
             <a:avLst/>
@@ -9526,7 +9526,7 @@
           </a:bodyPr>
           <a:lstStyle>
             <a:lvl1pPr>
-              <a:defRPr sz="1800"/>
+              <a:defRPr sz="2000"/>
             </a:lvl1pPr>
           </a:lstStyle>
           <a:p>
@@ -9543,7 +9543,7 @@
           <p:cNvPr id="7" name="item_1_title">
             <a:extLst>
               <a:ext uri="{FF2B5EF4-FFF2-40B4-BE49-F238E27FC236}">
-                <a16:creationId xmlns:a16="http://schemas.microsoft.com/office/drawing/2014/main" id="{B21A1AD9-E2A3-6F5F-A8DC-5EBDBBF32546}"/>
+                <a16:creationId xmlns:a16="http://schemas.microsoft.com/office/drawing/2014/main" id="{4EED4CD6-317D-AA5E-FB1E-ADBAC754C6F9}"/>
               </a:ext>
             </a:extLst>
           </p:cNvPr>
@@ -9556,8 +9556,8 @@
         </p:nvSpPr>
         <p:spPr>
           <a:xfrm>
-            <a:off x="1335994" y="2780359"/>
-            <a:ext cx="2459115" cy="422642"/>
+            <a:off x="1313364" y="2758252"/>
+            <a:ext cx="2504375" cy="435646"/>
           </a:xfrm>
           <a:prstGeom prst="rect">
             <a:avLst/>
@@ -9574,7 +9574,7 @@
               </a:spcBef>
               <a:buFontTx/>
               <a:buNone/>
-              <a:defRPr sz="2200" b="1">
+              <a:defRPr sz="2000" b="1">
                 <a:solidFill>
                   <a:schemeClr val="accent1"/>
                 </a:solidFill>
@@ -9596,7 +9596,7 @@
           <p:cNvPr id="8" name="item_1">
             <a:extLst>
               <a:ext uri="{FF2B5EF4-FFF2-40B4-BE49-F238E27FC236}">
-                <a16:creationId xmlns:a16="http://schemas.microsoft.com/office/drawing/2014/main" id="{880828D5-D092-C76F-C994-8BC16F396250}"/>
+                <a16:creationId xmlns:a16="http://schemas.microsoft.com/office/drawing/2014/main" id="{24E998A0-CB13-E9DF-67A3-6BD16927EF67}"/>
               </a:ext>
             </a:extLst>
           </p:cNvPr>
@@ -9609,8 +9609,8 @@
         </p:nvSpPr>
         <p:spPr>
           <a:xfrm>
-            <a:off x="1335994" y="3203001"/>
-            <a:ext cx="2459115" cy="1014340"/>
+            <a:off x="1313364" y="3193898"/>
+            <a:ext cx="2504375" cy="1045550"/>
           </a:xfrm>
           <a:prstGeom prst="rect">
             <a:avLst/>
@@ -9644,7 +9644,7 @@
           <p:cNvPr id="10" name="item_2_title">
             <a:extLst>
               <a:ext uri="{FF2B5EF4-FFF2-40B4-BE49-F238E27FC236}">
-                <a16:creationId xmlns:a16="http://schemas.microsoft.com/office/drawing/2014/main" id="{4AB4BEA8-521F-188F-3376-02CBDC423536}"/>
+                <a16:creationId xmlns:a16="http://schemas.microsoft.com/office/drawing/2014/main" id="{88060BAE-DD3D-CF9E-F936-8CDE981D8F07}"/>
               </a:ext>
             </a:extLst>
           </p:cNvPr>
@@ -9657,8 +9657,8 @@
         </p:nvSpPr>
         <p:spPr>
           <a:xfrm>
-            <a:off x="4338227" y="2780359"/>
-            <a:ext cx="2459115" cy="422642"/>
+            <a:off x="4315597" y="2758252"/>
+            <a:ext cx="2504375" cy="435646"/>
           </a:xfrm>
           <a:prstGeom prst="rect">
             <a:avLst/>
@@ -9675,7 +9675,7 @@
               </a:spcBef>
               <a:buFontTx/>
               <a:buNone/>
-              <a:defRPr sz="2200" b="1">
+              <a:defRPr sz="2000" b="1">
                 <a:solidFill>
                   <a:schemeClr val="accent1"/>
                 </a:solidFill>
@@ -9697,7 +9697,7 @@
           <p:cNvPr id="11" name="item_2">
             <a:extLst>
               <a:ext uri="{FF2B5EF4-FFF2-40B4-BE49-F238E27FC236}">
-                <a16:creationId xmlns:a16="http://schemas.microsoft.com/office/drawing/2014/main" id="{84CDC19F-5CC4-B851-F0FE-8FCA6627839D}"/>
+                <a16:creationId xmlns:a16="http://schemas.microsoft.com/office/drawing/2014/main" id="{8BDCF176-FC8D-71C2-EF78-2498725F8C4A}"/>
               </a:ext>
             </a:extLst>
           </p:cNvPr>
@@ -9710,8 +9710,8 @@
         </p:nvSpPr>
         <p:spPr>
           <a:xfrm>
-            <a:off x="4338227" y="3203001"/>
-            <a:ext cx="2459115" cy="1014340"/>
+            <a:off x="4315597" y="3193898"/>
+            <a:ext cx="2504375" cy="1045550"/>
           </a:xfrm>
           <a:prstGeom prst="rect">
             <a:avLst/>
@@ -9745,7 +9745,7 @@
           <p:cNvPr id="12" name="item_3_title">
             <a:extLst>
               <a:ext uri="{FF2B5EF4-FFF2-40B4-BE49-F238E27FC236}">
-                <a16:creationId xmlns:a16="http://schemas.microsoft.com/office/drawing/2014/main" id="{FC968B7D-DA8B-0B5E-6E0C-3C2C9E077E22}"/>
+                <a16:creationId xmlns:a16="http://schemas.microsoft.com/office/drawing/2014/main" id="{608EFDA4-7FD1-1FA7-CBAE-6415B9C8B918}"/>
               </a:ext>
             </a:extLst>
           </p:cNvPr>
@@ -9758,8 +9758,8 @@
         </p:nvSpPr>
         <p:spPr>
           <a:xfrm>
-            <a:off x="7340460" y="2780359"/>
-            <a:ext cx="2459115" cy="422642"/>
+            <a:off x="7317830" y="2758252"/>
+            <a:ext cx="2504375" cy="435646"/>
           </a:xfrm>
           <a:prstGeom prst="rect">
             <a:avLst/>
@@ -9776,7 +9776,7 @@
               </a:spcBef>
               <a:buFontTx/>
               <a:buNone/>
-              <a:defRPr sz="2200" b="1">
+              <a:defRPr sz="2000" b="1">
                 <a:solidFill>
                   <a:schemeClr val="accent1"/>
                 </a:solidFill>
@@ -9798,7 +9798,7 @@
           <p:cNvPr id="13" name="item_3">
             <a:extLst>
               <a:ext uri="{FF2B5EF4-FFF2-40B4-BE49-F238E27FC236}">
-                <a16:creationId xmlns:a16="http://schemas.microsoft.com/office/drawing/2014/main" id="{47BE8841-7409-E8E1-B348-DF6870E591FD}"/>
+                <a16:creationId xmlns:a16="http://schemas.microsoft.com/office/drawing/2014/main" id="{B5FA2FBA-B0E9-47B5-E892-A783F31AC5B8}"/>
               </a:ext>
             </a:extLst>
           </p:cNvPr>
@@ -9811,8 +9811,8 @@
         </p:nvSpPr>
         <p:spPr>
           <a:xfrm>
-            <a:off x="7340460" y="3203001"/>
-            <a:ext cx="2459115" cy="1014340"/>
+            <a:off x="7317830" y="3193898"/>
+            <a:ext cx="2504375" cy="1045550"/>
           </a:xfrm>
           <a:prstGeom prst="rect">
             <a:avLst/>
@@ -9846,7 +9846,7 @@
           <p:cNvPr id="14" name="source">
             <a:extLst>
               <a:ext uri="{FF2B5EF4-FFF2-40B4-BE49-F238E27FC236}">
-                <a16:creationId xmlns:a16="http://schemas.microsoft.com/office/drawing/2014/main" id="{CC26A5BC-72CD-6CB2-5EB0-3F1F536B2D93}"/>
+                <a16:creationId xmlns:a16="http://schemas.microsoft.com/office/drawing/2014/main" id="{C48F76A8-E7DC-2DDF-24AD-747467CA74A8}"/>
               </a:ext>
             </a:extLst>
           </p:cNvPr>
@@ -9901,7 +9901,7 @@
     </p:spTree>
     <p:extLst>
       <p:ext uri="{BB962C8B-B14F-4D97-AF65-F5344CB8AC3E}">
-        <p14:creationId xmlns:p14="http://schemas.microsoft.com/office/powerpoint/2010/main" val="102283096"/>
+        <p14:creationId xmlns:p14="http://schemas.microsoft.com/office/powerpoint/2010/main" val="76050764"/>
       </p:ext>
     </p:extLst>
   </p:cSld>
@@ -9975,7 +9975,7 @@
           <a:bodyPr/>
           <a:lstStyle/>
           <a:p>
-            <a:fld id="{91D5A71C-095D-4D8D-B06B-C24FC842AAAF}" type="datetimeFigureOut">
+            <a:fld id="{7B725182-F003-4077-8770-ED171BB46558}" type="datetimeFigureOut">
               <a:rPr lang="en-US" smtClean="0"/>
               <a:t>10/3/2026</a:t>
             </a:fld>
@@ -10017,7 +10017,7 @@
           <a:bodyPr/>
           <a:lstStyle/>
           <a:p>
-            <a:fld id="{67E77E8F-6FD3-4FA1-8A93-F369CE057DF3}" type="slidenum">
+            <a:fld id="{0120019D-D5E9-42EC-8806-1AB6BBDB44DC}" type="slidenum">
               <a:rPr lang="en-US" smtClean="0"/>
               <a:t>‹#›</a:t>
             </a:fld>
@@ -10030,7 +10030,7 @@
           <p:cNvPr id="2" name="body">
             <a:extLst>
               <a:ext uri="{FF2B5EF4-FFF2-40B4-BE49-F238E27FC236}">
-                <a16:creationId xmlns:a16="http://schemas.microsoft.com/office/drawing/2014/main" id="{13DB0901-803B-7F6F-6241-1C21EADA0815}"/>
+                <a16:creationId xmlns:a16="http://schemas.microsoft.com/office/drawing/2014/main" id="{284750EA-4782-E17A-EDFC-DCF8F5E20571}"/>
               </a:ext>
             </a:extLst>
           </p:cNvPr>
@@ -10070,7 +10070,7 @@
           <p:cNvPr id="6" name="kpi_value_1">
             <a:extLst>
               <a:ext uri="{FF2B5EF4-FFF2-40B4-BE49-F238E27FC236}">
-                <a16:creationId xmlns:a16="http://schemas.microsoft.com/office/drawing/2014/main" id="{7CC1C477-7D07-BDF6-1681-297520FCA5B0}"/>
+                <a16:creationId xmlns:a16="http://schemas.microsoft.com/office/drawing/2014/main" id="{6BC7F9AB-48C2-2BDA-3376-6AA06314E7FB}"/>
               </a:ext>
             </a:extLst>
           </p:cNvPr>
@@ -10083,8 +10083,8 @@
         </p:nvSpPr>
         <p:spPr>
           <a:xfrm>
-            <a:off x="1335993" y="2780360"/>
-            <a:ext cx="3960232" cy="1230751"/>
+            <a:off x="1313363" y="2758253"/>
+            <a:ext cx="4005492" cy="1259175"/>
           </a:xfrm>
           <a:prstGeom prst="rect">
             <a:avLst/>
@@ -10101,7 +10101,7 @@
               </a:spcBef>
               <a:buFontTx/>
               <a:buNone/>
-              <a:defRPr sz="8400" b="1">
+              <a:defRPr sz="6000" b="1">
                 <a:solidFill>
                   <a:schemeClr val="accent1"/>
                 </a:solidFill>
@@ -10123,7 +10123,7 @@
           <p:cNvPr id="7" name="kpi_label_1">
             <a:extLst>
               <a:ext uri="{FF2B5EF4-FFF2-40B4-BE49-F238E27FC236}">
-                <a16:creationId xmlns:a16="http://schemas.microsoft.com/office/drawing/2014/main" id="{353772C7-1318-6678-A8F2-40E3AD07B4D5}"/>
+                <a16:creationId xmlns:a16="http://schemas.microsoft.com/office/drawing/2014/main" id="{D66BD545-D266-8054-A044-CDFCEA77DD03}"/>
               </a:ext>
             </a:extLst>
           </p:cNvPr>
@@ -10136,8 +10136,8 @@
         </p:nvSpPr>
         <p:spPr>
           <a:xfrm>
-            <a:off x="1335993" y="4011111"/>
-            <a:ext cx="3960232" cy="683751"/>
+            <a:off x="1313363" y="4017426"/>
+            <a:ext cx="4005492" cy="699542"/>
           </a:xfrm>
           <a:prstGeom prst="rect">
             <a:avLst/>
@@ -10154,7 +10154,7 @@
               </a:spcBef>
               <a:buFontTx/>
               <a:buNone/>
-              <a:defRPr sz="1800"/>
+              <a:defRPr sz="2000"/>
             </a:lvl1pPr>
           </a:lstStyle>
           <a:p>
@@ -10171,7 +10171,7 @@
           <p:cNvPr id="8" name="kpi_value_2">
             <a:extLst>
               <a:ext uri="{FF2B5EF4-FFF2-40B4-BE49-F238E27FC236}">
-                <a16:creationId xmlns:a16="http://schemas.microsoft.com/office/drawing/2014/main" id="{DD66C3E9-91CE-8F96-92AA-4BBDDE26FBD6}"/>
+                <a16:creationId xmlns:a16="http://schemas.microsoft.com/office/drawing/2014/main" id="{65965D61-280F-510E-0F31-F875A5840E64}"/>
               </a:ext>
             </a:extLst>
           </p:cNvPr>
@@ -10184,8 +10184,8 @@
         </p:nvSpPr>
         <p:spPr>
           <a:xfrm>
-            <a:off x="5839342" y="2780360"/>
-            <a:ext cx="3960232" cy="1230751"/>
+            <a:off x="5816712" y="2758253"/>
+            <a:ext cx="4005492" cy="1259175"/>
           </a:xfrm>
           <a:prstGeom prst="rect">
             <a:avLst/>
@@ -10202,7 +10202,7 @@
               </a:spcBef>
               <a:buFontTx/>
               <a:buNone/>
-              <a:defRPr sz="8400" b="1">
+              <a:defRPr sz="6000" b="1">
                 <a:solidFill>
                   <a:schemeClr val="accent1"/>
                 </a:solidFill>
@@ -10224,7 +10224,7 @@
           <p:cNvPr id="10" name="kpi_label_2">
             <a:extLst>
               <a:ext uri="{FF2B5EF4-FFF2-40B4-BE49-F238E27FC236}">
-                <a16:creationId xmlns:a16="http://schemas.microsoft.com/office/drawing/2014/main" id="{2AF9BA89-0DBB-85D1-419F-159B5F2E5E43}"/>
+                <a16:creationId xmlns:a16="http://schemas.microsoft.com/office/drawing/2014/main" id="{F710391A-DB4F-97C1-2CDB-091513EA2EBA}"/>
               </a:ext>
             </a:extLst>
           </p:cNvPr>
@@ -10237,8 +10237,8 @@
         </p:nvSpPr>
         <p:spPr>
           <a:xfrm>
-            <a:off x="5839342" y="4011111"/>
-            <a:ext cx="3960232" cy="683751"/>
+            <a:off x="5816712" y="4017426"/>
+            <a:ext cx="4005492" cy="699542"/>
           </a:xfrm>
           <a:prstGeom prst="rect">
             <a:avLst/>
@@ -10255,7 +10255,7 @@
               </a:spcBef>
               <a:buFontTx/>
               <a:buNone/>
-              <a:defRPr sz="1800"/>
+              <a:defRPr sz="2000"/>
             </a:lvl1pPr>
           </a:lstStyle>
           <a:p>
@@ -10272,7 +10272,7 @@
           <p:cNvPr id="11" name="source">
             <a:extLst>
               <a:ext uri="{FF2B5EF4-FFF2-40B4-BE49-F238E27FC236}">
-                <a16:creationId xmlns:a16="http://schemas.microsoft.com/office/drawing/2014/main" id="{89B45C76-425A-F42F-BB52-6C7AC902FFB5}"/>
+                <a16:creationId xmlns:a16="http://schemas.microsoft.com/office/drawing/2014/main" id="{E6F53318-31F2-4BA9-A8B3-F3C33342242A}"/>
               </a:ext>
             </a:extLst>
           </p:cNvPr>
@@ -10327,7 +10327,7 @@
     </p:spTree>
     <p:extLst>
       <p:ext uri="{BB962C8B-B14F-4D97-AF65-F5344CB8AC3E}">
-        <p14:creationId xmlns:p14="http://schemas.microsoft.com/office/powerpoint/2010/main" val="3851369277"/>
+        <p14:creationId xmlns:p14="http://schemas.microsoft.com/office/powerpoint/2010/main" val="5749783"/>
       </p:ext>
     </p:extLst>
   </p:cSld>
@@ -10401,7 +10401,7 @@
           <a:bodyPr/>
           <a:lstStyle/>
           <a:p>
-            <a:fld id="{91D5A71C-095D-4D8D-B06B-C24FC842AAAF}" type="datetimeFigureOut">
+            <a:fld id="{7B725182-F003-4077-8770-ED171BB46558}" type="datetimeFigureOut">
               <a:rPr lang="en-US" smtClean="0"/>
               <a:t>10/3/2026</a:t>
             </a:fld>
@@ -10443,7 +10443,7 @@
           <a:bodyPr/>
           <a:lstStyle/>
           <a:p>
-            <a:fld id="{67E77E8F-6FD3-4FA1-8A93-F369CE057DF3}" type="slidenum">
+            <a:fld id="{0120019D-D5E9-42EC-8806-1AB6BBDB44DC}" type="slidenum">
               <a:rPr lang="en-US" smtClean="0"/>
               <a:t>‹#›</a:t>
             </a:fld>
@@ -10456,7 +10456,7 @@
           <p:cNvPr id="2" name="body">
             <a:extLst>
               <a:ext uri="{FF2B5EF4-FFF2-40B4-BE49-F238E27FC236}">
-                <a16:creationId xmlns:a16="http://schemas.microsoft.com/office/drawing/2014/main" id="{A412E178-B0A4-8A74-8CB0-5B09A1350197}"/>
+                <a16:creationId xmlns:a16="http://schemas.microsoft.com/office/drawing/2014/main" id="{11A31435-A7A2-2284-D429-79F0AD9B3D60}"/>
               </a:ext>
             </a:extLst>
           </p:cNvPr>
@@ -10496,7 +10496,7 @@
           <p:cNvPr id="6" name="kpi_value_1">
             <a:extLst>
               <a:ext uri="{FF2B5EF4-FFF2-40B4-BE49-F238E27FC236}">
-                <a16:creationId xmlns:a16="http://schemas.microsoft.com/office/drawing/2014/main" id="{ED99A98B-68C2-2BFD-9035-248EF88D72C2}"/>
+                <a16:creationId xmlns:a16="http://schemas.microsoft.com/office/drawing/2014/main" id="{3A60A23E-34A9-6DB0-8C10-1FB269FDA7A0}"/>
               </a:ext>
             </a:extLst>
           </p:cNvPr>
@@ -10509,8 +10509,8 @@
         </p:nvSpPr>
         <p:spPr>
           <a:xfrm>
-            <a:off x="1335994" y="2780360"/>
-            <a:ext cx="1708557" cy="1230751"/>
+            <a:off x="1313364" y="2758253"/>
+            <a:ext cx="1753817" cy="1259175"/>
           </a:xfrm>
           <a:prstGeom prst="rect">
             <a:avLst/>
@@ -10549,7 +10549,7 @@
           <p:cNvPr id="7" name="kpi_label_1">
             <a:extLst>
               <a:ext uri="{FF2B5EF4-FFF2-40B4-BE49-F238E27FC236}">
-                <a16:creationId xmlns:a16="http://schemas.microsoft.com/office/drawing/2014/main" id="{A68BA8A3-6656-CF9E-6F53-E2CD0C51AA64}"/>
+                <a16:creationId xmlns:a16="http://schemas.microsoft.com/office/drawing/2014/main" id="{9E5BC1AE-AAB5-3170-8B97-674BB1F38304}"/>
               </a:ext>
             </a:extLst>
           </p:cNvPr>
@@ -10562,8 +10562,8 @@
         </p:nvSpPr>
         <p:spPr>
           <a:xfrm>
-            <a:off x="1335994" y="4011111"/>
-            <a:ext cx="1708557" cy="683751"/>
+            <a:off x="1313364" y="4017426"/>
+            <a:ext cx="1753817" cy="699542"/>
           </a:xfrm>
           <a:prstGeom prst="rect">
             <a:avLst/>
@@ -10580,7 +10580,7 @@
               </a:spcBef>
               <a:buFontTx/>
               <a:buNone/>
-              <a:defRPr sz="1800"/>
+              <a:defRPr sz="2000"/>
             </a:lvl1pPr>
           </a:lstStyle>
           <a:p>
@@ -10597,7 +10597,7 @@
           <p:cNvPr id="8" name="kpi_value_2">
             <a:extLst>
               <a:ext uri="{FF2B5EF4-FFF2-40B4-BE49-F238E27FC236}">
-                <a16:creationId xmlns:a16="http://schemas.microsoft.com/office/drawing/2014/main" id="{8A54F6CB-AAFB-E7AC-3093-9D3E1D1E195B}"/>
+                <a16:creationId xmlns:a16="http://schemas.microsoft.com/office/drawing/2014/main" id="{99EC8420-42B5-5EB6-96E7-B7CE2CD5A598}"/>
               </a:ext>
             </a:extLst>
           </p:cNvPr>
@@ -10610,8 +10610,8 @@
         </p:nvSpPr>
         <p:spPr>
           <a:xfrm>
-            <a:off x="3587669" y="2780360"/>
-            <a:ext cx="1708557" cy="1230751"/>
+            <a:off x="3565039" y="2758253"/>
+            <a:ext cx="1753817" cy="1259175"/>
           </a:xfrm>
           <a:prstGeom prst="rect">
             <a:avLst/>
@@ -10650,7 +10650,7 @@
           <p:cNvPr id="10" name="kpi_label_2">
             <a:extLst>
               <a:ext uri="{FF2B5EF4-FFF2-40B4-BE49-F238E27FC236}">
-                <a16:creationId xmlns:a16="http://schemas.microsoft.com/office/drawing/2014/main" id="{08CB47EC-861B-1825-56D7-281555EB98AE}"/>
+                <a16:creationId xmlns:a16="http://schemas.microsoft.com/office/drawing/2014/main" id="{47117B01-4CA3-EDB5-D39D-196D92301841}"/>
               </a:ext>
             </a:extLst>
           </p:cNvPr>
@@ -10663,8 +10663,8 @@
         </p:nvSpPr>
         <p:spPr>
           <a:xfrm>
-            <a:off x="3587669" y="4011111"/>
-            <a:ext cx="1708557" cy="683751"/>
+            <a:off x="3565039" y="4017426"/>
+            <a:ext cx="1753817" cy="699542"/>
           </a:xfrm>
           <a:prstGeom prst="rect">
             <a:avLst/>
@@ -10681,7 +10681,7 @@
               </a:spcBef>
               <a:buFontTx/>
               <a:buNone/>
-              <a:defRPr sz="1800"/>
+              <a:defRPr sz="2000"/>
             </a:lvl1pPr>
           </a:lstStyle>
           <a:p>
@@ -10698,7 +10698,7 @@
           <p:cNvPr id="11" name="kpi_value_3">
             <a:extLst>
               <a:ext uri="{FF2B5EF4-FFF2-40B4-BE49-F238E27FC236}">
-                <a16:creationId xmlns:a16="http://schemas.microsoft.com/office/drawing/2014/main" id="{9D11AD7C-A404-571D-2B19-D5570829ACB1}"/>
+                <a16:creationId xmlns:a16="http://schemas.microsoft.com/office/drawing/2014/main" id="{E3544516-05E0-87D0-5DBC-B9F17059FA89}"/>
               </a:ext>
             </a:extLst>
           </p:cNvPr>
@@ -10711,8 +10711,8 @@
         </p:nvSpPr>
         <p:spPr>
           <a:xfrm>
-            <a:off x="5839343" y="2780360"/>
-            <a:ext cx="1708557" cy="1230751"/>
+            <a:off x="5816713" y="2758253"/>
+            <a:ext cx="1753817" cy="1259175"/>
           </a:xfrm>
           <a:prstGeom prst="rect">
             <a:avLst/>
@@ -10751,7 +10751,7 @@
           <p:cNvPr id="12" name="kpi_label_3">
             <a:extLst>
               <a:ext uri="{FF2B5EF4-FFF2-40B4-BE49-F238E27FC236}">
-                <a16:creationId xmlns:a16="http://schemas.microsoft.com/office/drawing/2014/main" id="{C40EB1EF-594E-0707-F480-6DDBEF378BAA}"/>
+                <a16:creationId xmlns:a16="http://schemas.microsoft.com/office/drawing/2014/main" id="{A22F7491-7666-53A0-08F2-68E01BB1C837}"/>
               </a:ext>
             </a:extLst>
           </p:cNvPr>
@@ -10764,8 +10764,8 @@
         </p:nvSpPr>
         <p:spPr>
           <a:xfrm>
-            <a:off x="5839343" y="4011111"/>
-            <a:ext cx="1708557" cy="683751"/>
+            <a:off x="5816713" y="4017426"/>
+            <a:ext cx="1753817" cy="699542"/>
           </a:xfrm>
           <a:prstGeom prst="rect">
             <a:avLst/>
@@ -10782,7 +10782,7 @@
               </a:spcBef>
               <a:buFontTx/>
               <a:buNone/>
-              <a:defRPr sz="1800"/>
+              <a:defRPr sz="2000"/>
             </a:lvl1pPr>
           </a:lstStyle>
           <a:p>
@@ -10799,7 +10799,7 @@
           <p:cNvPr id="13" name="kpi_value_4">
             <a:extLst>
               <a:ext uri="{FF2B5EF4-FFF2-40B4-BE49-F238E27FC236}">
-                <a16:creationId xmlns:a16="http://schemas.microsoft.com/office/drawing/2014/main" id="{E815559F-1A13-AE57-D2A3-C5CDA101025C}"/>
+                <a16:creationId xmlns:a16="http://schemas.microsoft.com/office/drawing/2014/main" id="{343D100E-9838-2A1C-1BD1-BEBB8672948B}"/>
               </a:ext>
             </a:extLst>
           </p:cNvPr>
@@ -10812,8 +10812,8 @@
         </p:nvSpPr>
         <p:spPr>
           <a:xfrm>
-            <a:off x="8091018" y="2780360"/>
-            <a:ext cx="1708557" cy="1230751"/>
+            <a:off x="8068388" y="2758253"/>
+            <a:ext cx="1753817" cy="1259175"/>
           </a:xfrm>
           <a:prstGeom prst="rect">
             <a:avLst/>
@@ -10852,7 +10852,7 @@
           <p:cNvPr id="14" name="kpi_label_4">
             <a:extLst>
               <a:ext uri="{FF2B5EF4-FFF2-40B4-BE49-F238E27FC236}">
-                <a16:creationId xmlns:a16="http://schemas.microsoft.com/office/drawing/2014/main" id="{63FCBDE5-7D62-51F5-F80E-F4EBACF70C95}"/>
+                <a16:creationId xmlns:a16="http://schemas.microsoft.com/office/drawing/2014/main" id="{6D7705F7-290E-B78E-03D4-96F384766968}"/>
               </a:ext>
             </a:extLst>
           </p:cNvPr>
@@ -10865,8 +10865,8 @@
         </p:nvSpPr>
         <p:spPr>
           <a:xfrm>
-            <a:off x="8091018" y="4011111"/>
-            <a:ext cx="1708557" cy="683751"/>
+            <a:off x="8068388" y="4017426"/>
+            <a:ext cx="1753817" cy="699542"/>
           </a:xfrm>
           <a:prstGeom prst="rect">
             <a:avLst/>
@@ -10883,7 +10883,7 @@
               </a:spcBef>
               <a:buFontTx/>
               <a:buNone/>
-              <a:defRPr sz="1800"/>
+              <a:defRPr sz="2000"/>
             </a:lvl1pPr>
           </a:lstStyle>
           <a:p>
@@ -10900,7 +10900,7 @@
           <p:cNvPr id="15" name="source">
             <a:extLst>
               <a:ext uri="{FF2B5EF4-FFF2-40B4-BE49-F238E27FC236}">
-                <a16:creationId xmlns:a16="http://schemas.microsoft.com/office/drawing/2014/main" id="{5E5B449F-C10D-87A5-7736-5B5B7D41219A}"/>
+                <a16:creationId xmlns:a16="http://schemas.microsoft.com/office/drawing/2014/main" id="{4F5FBC6D-AC42-5C71-7A7F-F4C514274F27}"/>
               </a:ext>
             </a:extLst>
           </p:cNvPr>
@@ -10955,7 +10955,7 @@
     </p:spTree>
     <p:extLst>
       <p:ext uri="{BB962C8B-B14F-4D97-AF65-F5344CB8AC3E}">
-        <p14:creationId xmlns:p14="http://schemas.microsoft.com/office/powerpoint/2010/main" val="425649606"/>
+        <p14:creationId xmlns:p14="http://schemas.microsoft.com/office/powerpoint/2010/main" val="1598345009"/>
       </p:ext>
     </p:extLst>
   </p:cSld>
@@ -11029,7 +11029,7 @@
           <a:bodyPr/>
           <a:lstStyle/>
           <a:p>
-            <a:fld id="{91D5A71C-095D-4D8D-B06B-C24FC842AAAF}" type="datetimeFigureOut">
+            <a:fld id="{7B725182-F003-4077-8770-ED171BB46558}" type="datetimeFigureOut">
               <a:rPr lang="en-US" smtClean="0"/>
               <a:t>10/3/2026</a:t>
             </a:fld>
@@ -11071,7 +11071,7 @@
           <a:bodyPr/>
           <a:lstStyle/>
           <a:p>
-            <a:fld id="{67E77E8F-6FD3-4FA1-8A93-F369CE057DF3}" type="slidenum">
+            <a:fld id="{0120019D-D5E9-42EC-8806-1AB6BBDB44DC}" type="slidenum">
               <a:rPr lang="en-US" smtClean="0"/>
               <a:t>‹#›</a:t>
             </a:fld>
@@ -11084,7 +11084,7 @@
           <p:cNvPr id="2" name="body">
             <a:extLst>
               <a:ext uri="{FF2B5EF4-FFF2-40B4-BE49-F238E27FC236}">
-                <a16:creationId xmlns:a16="http://schemas.microsoft.com/office/drawing/2014/main" id="{4261D792-D41F-A003-55AB-B13AA5351F91}"/>
+                <a16:creationId xmlns:a16="http://schemas.microsoft.com/office/drawing/2014/main" id="{1E144FA4-0E24-F499-7CC4-2A463FFD6909}"/>
               </a:ext>
             </a:extLst>
           </p:cNvPr>
@@ -11124,7 +11124,7 @@
           <p:cNvPr id="6" name="quote">
             <a:extLst>
               <a:ext uri="{FF2B5EF4-FFF2-40B4-BE49-F238E27FC236}">
-                <a16:creationId xmlns:a16="http://schemas.microsoft.com/office/drawing/2014/main" id="{0BE429FC-6620-0065-82F2-36659BFDF9AA}"/>
+                <a16:creationId xmlns:a16="http://schemas.microsoft.com/office/drawing/2014/main" id="{D67F4F0C-00CD-93F0-339E-22661E60A49A}"/>
               </a:ext>
             </a:extLst>
           </p:cNvPr>
@@ -11137,8 +11137,8 @@
         </p:nvSpPr>
         <p:spPr>
           <a:xfrm>
-            <a:off x="6631390" y="2780360"/>
-            <a:ext cx="3168185" cy="2033881"/>
+            <a:off x="6608760" y="2758252"/>
+            <a:ext cx="3213445" cy="2232848"/>
           </a:xfrm>
           <a:prstGeom prst="rect">
             <a:avLst/>
@@ -11155,7 +11155,7 @@
               </a:spcBef>
               <a:buFontTx/>
               <a:buNone/>
-              <a:defRPr sz="2400" i="1">
+              <a:defRPr sz="2000" i="1">
                 <a:latin typeface="+mj-lt"/>
               </a:defRPr>
             </a:lvl1pPr>
@@ -11174,7 +11174,7 @@
           <p:cNvPr id="7" name="attribution">
             <a:extLst>
               <a:ext uri="{FF2B5EF4-FFF2-40B4-BE49-F238E27FC236}">
-                <a16:creationId xmlns:a16="http://schemas.microsoft.com/office/drawing/2014/main" id="{6F275A9A-D427-D604-EF89-73522318FB27}"/>
+                <a16:creationId xmlns:a16="http://schemas.microsoft.com/office/drawing/2014/main" id="{4E11CF06-C6C8-B3A0-F7D9-AA104AA0BB3F}"/>
               </a:ext>
             </a:extLst>
           </p:cNvPr>
@@ -11187,8 +11187,8 @@
         </p:nvSpPr>
         <p:spPr>
           <a:xfrm>
-            <a:off x="6631390" y="5167960"/>
-            <a:ext cx="3168185" cy="243181"/>
+            <a:off x="6608760" y="4991100"/>
+            <a:ext cx="3213445" cy="442148"/>
           </a:xfrm>
           <a:prstGeom prst="rect">
             <a:avLst/>
@@ -11205,7 +11205,7 @@
               </a:spcBef>
               <a:buFontTx/>
               <a:buNone/>
-              <a:defRPr sz="1400"/>
+              <a:defRPr sz="2000"/>
             </a:lvl1pPr>
           </a:lstStyle>
           <a:p>
@@ -11222,7 +11222,7 @@
           <p:cNvPr id="8" name="source">
             <a:extLst>
               <a:ext uri="{FF2B5EF4-FFF2-40B4-BE49-F238E27FC236}">
-                <a16:creationId xmlns:a16="http://schemas.microsoft.com/office/drawing/2014/main" id="{E6C16AEC-154D-3051-2785-9496A81CCE0E}"/>
+                <a16:creationId xmlns:a16="http://schemas.microsoft.com/office/drawing/2014/main" id="{DAB86B9E-31AC-7845-9C12-B1B50622E4B2}"/>
               </a:ext>
             </a:extLst>
           </p:cNvPr>
@@ -11277,7 +11277,7 @@
     </p:spTree>
     <p:extLst>
       <p:ext uri="{BB962C8B-B14F-4D97-AF65-F5344CB8AC3E}">
-        <p14:creationId xmlns:p14="http://schemas.microsoft.com/office/powerpoint/2010/main" val="1691598813"/>
+        <p14:creationId xmlns:p14="http://schemas.microsoft.com/office/powerpoint/2010/main" val="2715573586"/>
       </p:ext>
     </p:extLst>
   </p:cSld>
@@ -11351,7 +11351,7 @@
           <a:bodyPr/>
           <a:lstStyle/>
           <a:p>
-            <a:fld id="{91D5A71C-095D-4D8D-B06B-C24FC842AAAF}" type="datetimeFigureOut">
+            <a:fld id="{7B725182-F003-4077-8770-ED171BB46558}" type="datetimeFigureOut">
               <a:rPr lang="en-US" smtClean="0"/>
               <a:t>10/3/2026</a:t>
             </a:fld>
@@ -11393,7 +11393,7 @@
           <a:bodyPr/>
           <a:lstStyle/>
           <a:p>
-            <a:fld id="{67E77E8F-6FD3-4FA1-8A93-F369CE057DF3}" type="slidenum">
+            <a:fld id="{0120019D-D5E9-42EC-8806-1AB6BBDB44DC}" type="slidenum">
               <a:rPr lang="en-US" smtClean="0"/>
               <a:t>‹#›</a:t>
             </a:fld>
@@ -11406,7 +11406,7 @@
           <p:cNvPr id="2" name="item_1_title">
             <a:extLst>
               <a:ext uri="{FF2B5EF4-FFF2-40B4-BE49-F238E27FC236}">
-                <a16:creationId xmlns:a16="http://schemas.microsoft.com/office/drawing/2014/main" id="{E62E8D2E-EDB7-27BF-E167-511A3A806B6A}"/>
+                <a16:creationId xmlns:a16="http://schemas.microsoft.com/office/drawing/2014/main" id="{A564F6EB-C94A-335B-864C-41451C26B645}"/>
               </a:ext>
             </a:extLst>
           </p:cNvPr>
@@ -11419,8 +11419,8 @@
         </p:nvSpPr>
         <p:spPr>
           <a:xfrm>
-            <a:off x="1335993" y="2780360"/>
-            <a:ext cx="2459115" cy="773759"/>
+            <a:off x="1313363" y="2758252"/>
+            <a:ext cx="2504375" cy="786764"/>
           </a:xfrm>
         </p:spPr>
         <p:txBody>
@@ -11434,7 +11434,7 @@
               </a:spcBef>
               <a:buFontTx/>
               <a:buNone/>
-              <a:defRPr sz="2200" b="1">
+              <a:defRPr sz="2000" b="1">
                 <a:solidFill>
                   <a:schemeClr val="accent1"/>
                 </a:solidFill>
@@ -11456,7 +11456,7 @@
           <p:cNvPr id="6" name="item_1">
             <a:extLst>
               <a:ext uri="{FF2B5EF4-FFF2-40B4-BE49-F238E27FC236}">
-                <a16:creationId xmlns:a16="http://schemas.microsoft.com/office/drawing/2014/main" id="{9B180DED-12BD-2824-609C-E7CF20E1F020}"/>
+                <a16:creationId xmlns:a16="http://schemas.microsoft.com/office/drawing/2014/main" id="{D45C4287-6FA1-B7CC-0C67-0CBC969EA964}"/>
               </a:ext>
             </a:extLst>
           </p:cNvPr>
@@ -11469,8 +11469,8 @@
         </p:nvSpPr>
         <p:spPr>
           <a:xfrm>
-            <a:off x="1335994" y="3554118"/>
-            <a:ext cx="2459115" cy="1857022"/>
+            <a:off x="1313364" y="3545016"/>
+            <a:ext cx="2504375" cy="1888233"/>
           </a:xfrm>
           <a:prstGeom prst="rect">
             <a:avLst/>
@@ -11504,7 +11504,7 @@
           <p:cNvPr id="7" name="item_2_title">
             <a:extLst>
               <a:ext uri="{FF2B5EF4-FFF2-40B4-BE49-F238E27FC236}">
-                <a16:creationId xmlns:a16="http://schemas.microsoft.com/office/drawing/2014/main" id="{5C763950-1F26-D625-5256-B213E3AE4F9E}"/>
+                <a16:creationId xmlns:a16="http://schemas.microsoft.com/office/drawing/2014/main" id="{6A5FCC8F-5A3B-CFEE-2B07-FB6239439EA5}"/>
               </a:ext>
             </a:extLst>
           </p:cNvPr>
@@ -11517,8 +11517,8 @@
         </p:nvSpPr>
         <p:spPr>
           <a:xfrm>
-            <a:off x="4338227" y="2780360"/>
-            <a:ext cx="2459115" cy="773759"/>
+            <a:off x="4315597" y="2758252"/>
+            <a:ext cx="2504375" cy="786764"/>
           </a:xfrm>
           <a:prstGeom prst="rect">
             <a:avLst/>
@@ -11535,7 +11535,7 @@
               </a:spcBef>
               <a:buFontTx/>
               <a:buNone/>
-              <a:defRPr sz="2200" b="1">
+              <a:defRPr sz="2000" b="1">
                 <a:solidFill>
                   <a:schemeClr val="accent1"/>
                 </a:solidFill>
@@ -11557,7 +11557,7 @@
           <p:cNvPr id="8" name="item_2">
             <a:extLst>
               <a:ext uri="{FF2B5EF4-FFF2-40B4-BE49-F238E27FC236}">
-                <a16:creationId xmlns:a16="http://schemas.microsoft.com/office/drawing/2014/main" id="{AF78C3D1-31B7-8563-69A7-7DE0557CEE46}"/>
+                <a16:creationId xmlns:a16="http://schemas.microsoft.com/office/drawing/2014/main" id="{83B11F36-3B54-6094-57FE-EADA57E369C2}"/>
               </a:ext>
             </a:extLst>
           </p:cNvPr>
@@ -11570,8 +11570,8 @@
         </p:nvSpPr>
         <p:spPr>
           <a:xfrm>
-            <a:off x="4338227" y="3554118"/>
-            <a:ext cx="2459115" cy="1857022"/>
+            <a:off x="4315597" y="3545016"/>
+            <a:ext cx="2504375" cy="1888233"/>
           </a:xfrm>
           <a:prstGeom prst="rect">
             <a:avLst/>
@@ -11605,7 +11605,7 @@
           <p:cNvPr id="10" name="item_3_title">
             <a:extLst>
               <a:ext uri="{FF2B5EF4-FFF2-40B4-BE49-F238E27FC236}">
-                <a16:creationId xmlns:a16="http://schemas.microsoft.com/office/drawing/2014/main" id="{514F7215-D3CE-AA55-45F5-F53F61573FF1}"/>
+                <a16:creationId xmlns:a16="http://schemas.microsoft.com/office/drawing/2014/main" id="{6D461AEE-2DAB-0D10-ADDF-B5682174D7B4}"/>
               </a:ext>
             </a:extLst>
           </p:cNvPr>
@@ -11618,8 +11618,8 @@
         </p:nvSpPr>
         <p:spPr>
           <a:xfrm>
-            <a:off x="7340460" y="2780360"/>
-            <a:ext cx="2459115" cy="773759"/>
+            <a:off x="7317830" y="2758252"/>
+            <a:ext cx="2504375" cy="786764"/>
           </a:xfrm>
           <a:prstGeom prst="rect">
             <a:avLst/>
@@ -11636,7 +11636,7 @@
               </a:spcBef>
               <a:buFontTx/>
               <a:buNone/>
-              <a:defRPr sz="2200" b="1">
+              <a:defRPr sz="2000" b="1">
                 <a:solidFill>
                   <a:schemeClr val="accent1"/>
                 </a:solidFill>
@@ -11658,7 +11658,7 @@
           <p:cNvPr id="11" name="item_3">
             <a:extLst>
               <a:ext uri="{FF2B5EF4-FFF2-40B4-BE49-F238E27FC236}">
-                <a16:creationId xmlns:a16="http://schemas.microsoft.com/office/drawing/2014/main" id="{B9392FFF-671E-6ED4-9722-787BF9559867}"/>
+                <a16:creationId xmlns:a16="http://schemas.microsoft.com/office/drawing/2014/main" id="{B64BEEFC-EC0A-848C-4CEC-7C1E2E34FE13}"/>
               </a:ext>
             </a:extLst>
           </p:cNvPr>
@@ -11671,8 +11671,8 @@
         </p:nvSpPr>
         <p:spPr>
           <a:xfrm>
-            <a:off x="7340460" y="3554118"/>
-            <a:ext cx="2459115" cy="1857022"/>
+            <a:off x="7317830" y="3545016"/>
+            <a:ext cx="2504375" cy="1888233"/>
           </a:xfrm>
           <a:prstGeom prst="rect">
             <a:avLst/>
@@ -11706,7 +11706,7 @@
           <p:cNvPr id="12" name="source">
             <a:extLst>
               <a:ext uri="{FF2B5EF4-FFF2-40B4-BE49-F238E27FC236}">
-                <a16:creationId xmlns:a16="http://schemas.microsoft.com/office/drawing/2014/main" id="{93D8B35A-17D4-B350-D128-E85F2A4E5978}"/>
+                <a16:creationId xmlns:a16="http://schemas.microsoft.com/office/drawing/2014/main" id="{640C33C7-1A78-C430-34A6-50AE15375B95}"/>
               </a:ext>
             </a:extLst>
           </p:cNvPr>
@@ -11761,7 +11761,7 @@
     </p:spTree>
     <p:extLst>
       <p:ext uri="{BB962C8B-B14F-4D97-AF65-F5344CB8AC3E}">
-        <p14:creationId xmlns:p14="http://schemas.microsoft.com/office/powerpoint/2010/main" val="2866077611"/>
+        <p14:creationId xmlns:p14="http://schemas.microsoft.com/office/powerpoint/2010/main" val="820692770"/>
       </p:ext>
     </p:extLst>
   </p:cSld>
@@ -11835,7 +11835,7 @@
           <a:bodyPr/>
           <a:lstStyle/>
           <a:p>
-            <a:fld id="{91D5A71C-095D-4D8D-B06B-C24FC842AAAF}" type="datetimeFigureOut">
+            <a:fld id="{7B725182-F003-4077-8770-ED171BB46558}" type="datetimeFigureOut">
               <a:rPr lang="en-US" smtClean="0"/>
               <a:t>10/3/2026</a:t>
             </a:fld>
@@ -11877,7 +11877,7 @@
           <a:bodyPr/>
           <a:lstStyle/>
           <a:p>
-            <a:fld id="{67E77E8F-6FD3-4FA1-8A93-F369CE057DF3}" type="slidenum">
+            <a:fld id="{0120019D-D5E9-42EC-8806-1AB6BBDB44DC}" type="slidenum">
               <a:rPr lang="en-US" smtClean="0"/>
               <a:t>‹#›</a:t>
             </a:fld>
@@ -11890,7 +11890,7 @@
           <p:cNvPr id="2" name="item_1_title">
             <a:extLst>
               <a:ext uri="{FF2B5EF4-FFF2-40B4-BE49-F238E27FC236}">
-                <a16:creationId xmlns:a16="http://schemas.microsoft.com/office/drawing/2014/main" id="{5790EBEC-28E0-CEC7-70A8-2D38FAC356E6}"/>
+                <a16:creationId xmlns:a16="http://schemas.microsoft.com/office/drawing/2014/main" id="{8A4F1672-50E0-3635-B968-95ED6CB3A6CA}"/>
               </a:ext>
             </a:extLst>
           </p:cNvPr>
@@ -11903,8 +11903,8 @@
         </p:nvSpPr>
         <p:spPr>
           <a:xfrm>
-            <a:off x="1335993" y="2780360"/>
-            <a:ext cx="3960232" cy="773759"/>
+            <a:off x="1313363" y="2758252"/>
+            <a:ext cx="4005492" cy="786764"/>
           </a:xfrm>
         </p:spPr>
         <p:txBody>
@@ -11918,7 +11918,7 @@
               </a:spcBef>
               <a:buFontTx/>
               <a:buNone/>
-              <a:defRPr sz="2200" b="1">
+              <a:defRPr sz="2000" b="1">
                 <a:solidFill>
                   <a:schemeClr val="accent1"/>
                 </a:solidFill>
@@ -11940,7 +11940,7 @@
           <p:cNvPr id="6" name="item_1">
             <a:extLst>
               <a:ext uri="{FF2B5EF4-FFF2-40B4-BE49-F238E27FC236}">
-                <a16:creationId xmlns:a16="http://schemas.microsoft.com/office/drawing/2014/main" id="{B3428592-376C-087A-2F1D-261AA3F85979}"/>
+                <a16:creationId xmlns:a16="http://schemas.microsoft.com/office/drawing/2014/main" id="{C8C6CC39-8B26-A97A-F085-82EFBA19C828}"/>
               </a:ext>
             </a:extLst>
           </p:cNvPr>
@@ -11953,8 +11953,8 @@
         </p:nvSpPr>
         <p:spPr>
           <a:xfrm>
-            <a:off x="1335993" y="3554118"/>
-            <a:ext cx="3960232" cy="1857022"/>
+            <a:off x="1313363" y="3545016"/>
+            <a:ext cx="4005492" cy="1888233"/>
           </a:xfrm>
           <a:prstGeom prst="rect">
             <a:avLst/>
@@ -11988,7 +11988,7 @@
           <p:cNvPr id="7" name="item_2_title">
             <a:extLst>
               <a:ext uri="{FF2B5EF4-FFF2-40B4-BE49-F238E27FC236}">
-                <a16:creationId xmlns:a16="http://schemas.microsoft.com/office/drawing/2014/main" id="{20181BFD-8316-B52D-2E8F-B55D1CAB3C35}"/>
+                <a16:creationId xmlns:a16="http://schemas.microsoft.com/office/drawing/2014/main" id="{65C53C76-8984-32F1-8F7A-32BED01841B6}"/>
               </a:ext>
             </a:extLst>
           </p:cNvPr>
@@ -12001,8 +12001,8 @@
         </p:nvSpPr>
         <p:spPr>
           <a:xfrm>
-            <a:off x="5839342" y="2780360"/>
-            <a:ext cx="3960232" cy="773759"/>
+            <a:off x="5816712" y="2758252"/>
+            <a:ext cx="4005492" cy="786764"/>
           </a:xfrm>
           <a:prstGeom prst="rect">
             <a:avLst/>
@@ -12019,7 +12019,7 @@
               </a:spcBef>
               <a:buFontTx/>
               <a:buNone/>
-              <a:defRPr sz="2200" b="1">
+              <a:defRPr sz="2000" b="1">
                 <a:solidFill>
                   <a:schemeClr val="accent1"/>
                 </a:solidFill>
@@ -12041,7 +12041,7 @@
           <p:cNvPr id="8" name="item_2">
             <a:extLst>
               <a:ext uri="{FF2B5EF4-FFF2-40B4-BE49-F238E27FC236}">
-                <a16:creationId xmlns:a16="http://schemas.microsoft.com/office/drawing/2014/main" id="{F54F58E0-C168-33CB-E847-4A05A18D64AB}"/>
+                <a16:creationId xmlns:a16="http://schemas.microsoft.com/office/drawing/2014/main" id="{E5E5EACD-0E30-AEBB-B668-7388A8CC1E64}"/>
               </a:ext>
             </a:extLst>
           </p:cNvPr>
@@ -12054,8 +12054,8 @@
         </p:nvSpPr>
         <p:spPr>
           <a:xfrm>
-            <a:off x="5839342" y="3554118"/>
-            <a:ext cx="3960232" cy="1857022"/>
+            <a:off x="5816712" y="3545016"/>
+            <a:ext cx="4005492" cy="1888233"/>
           </a:xfrm>
           <a:prstGeom prst="rect">
             <a:avLst/>
@@ -12089,7 +12089,7 @@
           <p:cNvPr id="10" name="source">
             <a:extLst>
               <a:ext uri="{FF2B5EF4-FFF2-40B4-BE49-F238E27FC236}">
-                <a16:creationId xmlns:a16="http://schemas.microsoft.com/office/drawing/2014/main" id="{82F83B0C-ADA5-6BD1-8FE7-C8B8F631CC69}"/>
+                <a16:creationId xmlns:a16="http://schemas.microsoft.com/office/drawing/2014/main" id="{DC813DF7-9B1E-00FC-BB10-F9150F8619F0}"/>
               </a:ext>
             </a:extLst>
           </p:cNvPr>
@@ -12144,7 +12144,7 @@
     </p:spTree>
     <p:extLst>
       <p:ext uri="{BB962C8B-B14F-4D97-AF65-F5344CB8AC3E}">
-        <p14:creationId xmlns:p14="http://schemas.microsoft.com/office/powerpoint/2010/main" val="1920643374"/>
+        <p14:creationId xmlns:p14="http://schemas.microsoft.com/office/powerpoint/2010/main" val="3412950988"/>
       </p:ext>
     </p:extLst>
   </p:cSld>
@@ -12218,7 +12218,7 @@
           <a:bodyPr/>
           <a:lstStyle/>
           <a:p>
-            <a:fld id="{91D5A71C-095D-4D8D-B06B-C24FC842AAAF}" type="datetimeFigureOut">
+            <a:fld id="{7B725182-F003-4077-8770-ED171BB46558}" type="datetimeFigureOut">
               <a:rPr lang="en-US" smtClean="0"/>
               <a:t>10/3/2026</a:t>
             </a:fld>
@@ -12260,7 +12260,7 @@
           <a:bodyPr/>
           <a:lstStyle/>
           <a:p>
-            <a:fld id="{67E77E8F-6FD3-4FA1-8A93-F369CE057DF3}" type="slidenum">
+            <a:fld id="{0120019D-D5E9-42EC-8806-1AB6BBDB44DC}" type="slidenum">
               <a:rPr lang="en-US" smtClean="0"/>
               <a:t>‹#›</a:t>
             </a:fld>
@@ -12273,7 +12273,7 @@
           <p:cNvPr id="2" name="chart">
             <a:extLst>
               <a:ext uri="{FF2B5EF4-FFF2-40B4-BE49-F238E27FC236}">
-                <a16:creationId xmlns:a16="http://schemas.microsoft.com/office/drawing/2014/main" id="{C74CABAD-4716-BE9F-C5FB-CD30156D89A3}"/>
+                <a16:creationId xmlns:a16="http://schemas.microsoft.com/office/drawing/2014/main" id="{CEFD8FFF-B017-4238-4102-36911E96E264}"/>
               </a:ext>
             </a:extLst>
           </p:cNvPr>
@@ -12303,7 +12303,7 @@
           <p:cNvPr id="6" name="body">
             <a:extLst>
               <a:ext uri="{FF2B5EF4-FFF2-40B4-BE49-F238E27FC236}">
-                <a16:creationId xmlns:a16="http://schemas.microsoft.com/office/drawing/2014/main" id="{0DA4ACEC-741D-D6A5-CBF0-C36BE4E8CAC0}"/>
+                <a16:creationId xmlns:a16="http://schemas.microsoft.com/office/drawing/2014/main" id="{CF01A8C7-5758-FCB1-CACA-A31B16B8896E}"/>
               </a:ext>
             </a:extLst>
           </p:cNvPr>
@@ -12346,7 +12346,7 @@
           <p:cNvPr id="7" name="source">
             <a:extLst>
               <a:ext uri="{FF2B5EF4-FFF2-40B4-BE49-F238E27FC236}">
-                <a16:creationId xmlns:a16="http://schemas.microsoft.com/office/drawing/2014/main" id="{CC94BD1B-449D-EE70-8DA9-54628915139D}"/>
+                <a16:creationId xmlns:a16="http://schemas.microsoft.com/office/drawing/2014/main" id="{C52C7BD8-8AE4-189C-217A-B66D1B70F77B}"/>
               </a:ext>
             </a:extLst>
           </p:cNvPr>
@@ -12401,7 +12401,7 @@
     </p:spTree>
     <p:extLst>
       <p:ext uri="{BB962C8B-B14F-4D97-AF65-F5344CB8AC3E}">
-        <p14:creationId xmlns:p14="http://schemas.microsoft.com/office/powerpoint/2010/main" val="1414452941"/>
+        <p14:creationId xmlns:p14="http://schemas.microsoft.com/office/powerpoint/2010/main" val="1434030771"/>
       </p:ext>
     </p:extLst>
   </p:cSld>
@@ -12475,7 +12475,7 @@
           <a:bodyPr/>
           <a:lstStyle/>
           <a:p>
-            <a:fld id="{91D5A71C-095D-4D8D-B06B-C24FC842AAAF}" type="datetimeFigureOut">
+            <a:fld id="{7B725182-F003-4077-8770-ED171BB46558}" type="datetimeFigureOut">
               <a:rPr lang="en-US" smtClean="0"/>
               <a:t>10/3/2026</a:t>
             </a:fld>
@@ -12517,7 +12517,7 @@
           <a:bodyPr/>
           <a:lstStyle/>
           <a:p>
-            <a:fld id="{67E77E8F-6FD3-4FA1-8A93-F369CE057DF3}" type="slidenum">
+            <a:fld id="{0120019D-D5E9-42EC-8806-1AB6BBDB44DC}" type="slidenum">
               <a:rPr lang="en-US" smtClean="0"/>
               <a:t>‹#›</a:t>
             </a:fld>
@@ -12530,7 +12530,7 @@
           <p:cNvPr id="2" name="item_1_title">
             <a:extLst>
               <a:ext uri="{FF2B5EF4-FFF2-40B4-BE49-F238E27FC236}">
-                <a16:creationId xmlns:a16="http://schemas.microsoft.com/office/drawing/2014/main" id="{C10E8D17-6DDF-AE26-7B53-C3A17CAF29AB}"/>
+                <a16:creationId xmlns:a16="http://schemas.microsoft.com/office/drawing/2014/main" id="{2A46EE5A-83D4-9C66-08D8-E38A3553E935}"/>
               </a:ext>
             </a:extLst>
           </p:cNvPr>
@@ -12543,8 +12543,8 @@
         </p:nvSpPr>
         <p:spPr>
           <a:xfrm>
-            <a:off x="1335993" y="2780360"/>
-            <a:ext cx="3960232" cy="308853"/>
+            <a:off x="1313363" y="2758252"/>
+            <a:ext cx="4005492" cy="321858"/>
           </a:xfrm>
         </p:spPr>
         <p:txBody>
@@ -12558,7 +12558,7 @@
               </a:spcBef>
               <a:buFontTx/>
               <a:buNone/>
-              <a:defRPr sz="2200" b="1">
+              <a:defRPr sz="2000" b="1">
                 <a:solidFill>
                   <a:schemeClr val="accent1"/>
                 </a:solidFill>
@@ -12580,7 +12580,7 @@
           <p:cNvPr id="6" name="item_1">
             <a:extLst>
               <a:ext uri="{FF2B5EF4-FFF2-40B4-BE49-F238E27FC236}">
-                <a16:creationId xmlns:a16="http://schemas.microsoft.com/office/drawing/2014/main" id="{33A3B4E2-B55D-5255-BEE8-F3871032C284}"/>
+                <a16:creationId xmlns:a16="http://schemas.microsoft.com/office/drawing/2014/main" id="{7627AE7E-415B-FC1C-6B82-4980B70C9B68}"/>
               </a:ext>
             </a:extLst>
           </p:cNvPr>
@@ -12593,8 +12593,8 @@
         </p:nvSpPr>
         <p:spPr>
           <a:xfrm>
-            <a:off x="1335993" y="3089213"/>
-            <a:ext cx="3960232" cy="741248"/>
+            <a:off x="1313363" y="3080111"/>
+            <a:ext cx="4005492" cy="772459"/>
           </a:xfrm>
           <a:prstGeom prst="rect">
             <a:avLst/>
@@ -12628,7 +12628,7 @@
           <p:cNvPr id="7" name="item_2_title">
             <a:extLst>
               <a:ext uri="{FF2B5EF4-FFF2-40B4-BE49-F238E27FC236}">
-                <a16:creationId xmlns:a16="http://schemas.microsoft.com/office/drawing/2014/main" id="{82DE939F-171A-A8AE-C988-19F5EBAB65BB}"/>
+                <a16:creationId xmlns:a16="http://schemas.microsoft.com/office/drawing/2014/main" id="{10AA3574-CAA2-8A0B-80D9-71FF2D0B0D3F}"/>
               </a:ext>
             </a:extLst>
           </p:cNvPr>
@@ -12641,8 +12641,8 @@
         </p:nvSpPr>
         <p:spPr>
           <a:xfrm>
-            <a:off x="5839342" y="2780360"/>
-            <a:ext cx="3960232" cy="308853"/>
+            <a:off x="5816712" y="2758252"/>
+            <a:ext cx="4005492" cy="321858"/>
           </a:xfrm>
           <a:prstGeom prst="rect">
             <a:avLst/>
@@ -12659,7 +12659,7 @@
               </a:spcBef>
               <a:buFontTx/>
               <a:buNone/>
-              <a:defRPr sz="2200" b="1">
+              <a:defRPr sz="2000" b="1">
                 <a:solidFill>
                   <a:schemeClr val="accent1"/>
                 </a:solidFill>
@@ -12681,7 +12681,7 @@
           <p:cNvPr id="8" name="item_2">
             <a:extLst>
               <a:ext uri="{FF2B5EF4-FFF2-40B4-BE49-F238E27FC236}">
-                <a16:creationId xmlns:a16="http://schemas.microsoft.com/office/drawing/2014/main" id="{A1081BBF-C797-FE25-CAFA-648F639C2F02}"/>
+                <a16:creationId xmlns:a16="http://schemas.microsoft.com/office/drawing/2014/main" id="{D512C18C-29BA-5394-8F00-7AC18FC04FFB}"/>
               </a:ext>
             </a:extLst>
           </p:cNvPr>
@@ -12694,8 +12694,8 @@
         </p:nvSpPr>
         <p:spPr>
           <a:xfrm>
-            <a:off x="5839342" y="3089213"/>
-            <a:ext cx="3960232" cy="741248"/>
+            <a:off x="5816712" y="3080111"/>
+            <a:ext cx="4005492" cy="772459"/>
           </a:xfrm>
           <a:prstGeom prst="rect">
             <a:avLst/>
@@ -12729,7 +12729,7 @@
           <p:cNvPr id="10" name="item_3_title">
             <a:extLst>
               <a:ext uri="{FF2B5EF4-FFF2-40B4-BE49-F238E27FC236}">
-                <a16:creationId xmlns:a16="http://schemas.microsoft.com/office/drawing/2014/main" id="{E066F1A8-8A25-A8C9-5A04-CF11E631ABA2}"/>
+                <a16:creationId xmlns:a16="http://schemas.microsoft.com/office/drawing/2014/main" id="{00AAA87B-10A7-2C2F-3599-191F352BEE1E}"/>
               </a:ext>
             </a:extLst>
           </p:cNvPr>
@@ -12742,8 +12742,8 @@
         </p:nvSpPr>
         <p:spPr>
           <a:xfrm>
-            <a:off x="1335993" y="4361040"/>
-            <a:ext cx="3960232" cy="308853"/>
+            <a:off x="1313363" y="4338932"/>
+            <a:ext cx="4005492" cy="321858"/>
           </a:xfrm>
           <a:prstGeom prst="rect">
             <a:avLst/>
@@ -12760,7 +12760,7 @@
               </a:spcBef>
               <a:buFontTx/>
               <a:buNone/>
-              <a:defRPr sz="2200" b="1">
+              <a:defRPr sz="2000" b="1">
                 <a:solidFill>
                   <a:schemeClr val="accent1"/>
                 </a:solidFill>
@@ -12782,7 +12782,7 @@
           <p:cNvPr id="11" name="item_3">
             <a:extLst>
               <a:ext uri="{FF2B5EF4-FFF2-40B4-BE49-F238E27FC236}">
-                <a16:creationId xmlns:a16="http://schemas.microsoft.com/office/drawing/2014/main" id="{5339E2B3-CDB2-8260-6181-BD638C27F476}"/>
+                <a16:creationId xmlns:a16="http://schemas.microsoft.com/office/drawing/2014/main" id="{E897D1D6-8829-F81A-B83C-90C624B65B90}"/>
               </a:ext>
             </a:extLst>
           </p:cNvPr>
@@ -12795,8 +12795,8 @@
         </p:nvSpPr>
         <p:spPr>
           <a:xfrm>
-            <a:off x="1335993" y="4669892"/>
-            <a:ext cx="3960232" cy="741248"/>
+            <a:off x="1313363" y="4660790"/>
+            <a:ext cx="4005492" cy="772459"/>
           </a:xfrm>
           <a:prstGeom prst="rect">
             <a:avLst/>
@@ -12830,7 +12830,7 @@
           <p:cNvPr id="12" name="item_4_title">
             <a:extLst>
               <a:ext uri="{FF2B5EF4-FFF2-40B4-BE49-F238E27FC236}">
-                <a16:creationId xmlns:a16="http://schemas.microsoft.com/office/drawing/2014/main" id="{B24D407D-B1CA-83BC-F5A9-37775B533661}"/>
+                <a16:creationId xmlns:a16="http://schemas.microsoft.com/office/drawing/2014/main" id="{012D9D21-CB45-E7B2-E475-E990C7DB59FF}"/>
               </a:ext>
             </a:extLst>
           </p:cNvPr>
@@ -12843,8 +12843,8 @@
         </p:nvSpPr>
         <p:spPr>
           <a:xfrm>
-            <a:off x="5839342" y="4361040"/>
-            <a:ext cx="3960232" cy="308853"/>
+            <a:off x="5816712" y="4338932"/>
+            <a:ext cx="4005492" cy="321858"/>
           </a:xfrm>
           <a:prstGeom prst="rect">
             <a:avLst/>
@@ -12861,7 +12861,7 @@
               </a:spcBef>
               <a:buFontTx/>
               <a:buNone/>
-              <a:defRPr sz="2200" b="1">
+              <a:defRPr sz="2000" b="1">
                 <a:solidFill>
                   <a:schemeClr val="accent1"/>
                 </a:solidFill>
@@ -12883,7 +12883,7 @@
           <p:cNvPr id="13" name="item_4">
             <a:extLst>
               <a:ext uri="{FF2B5EF4-FFF2-40B4-BE49-F238E27FC236}">
-                <a16:creationId xmlns:a16="http://schemas.microsoft.com/office/drawing/2014/main" id="{47849DE4-BB1A-5159-2720-510D66C54EBC}"/>
+                <a16:creationId xmlns:a16="http://schemas.microsoft.com/office/drawing/2014/main" id="{AAFB9C3E-5506-0A25-3DE2-3525EE3CE075}"/>
               </a:ext>
             </a:extLst>
           </p:cNvPr>
@@ -12896,8 +12896,8 @@
         </p:nvSpPr>
         <p:spPr>
           <a:xfrm>
-            <a:off x="5839342" y="4669892"/>
-            <a:ext cx="3960232" cy="741248"/>
+            <a:off x="5816712" y="4660790"/>
+            <a:ext cx="4005492" cy="772459"/>
           </a:xfrm>
           <a:prstGeom prst="rect">
             <a:avLst/>
@@ -12931,7 +12931,7 @@
           <p:cNvPr id="14" name="source">
             <a:extLst>
               <a:ext uri="{FF2B5EF4-FFF2-40B4-BE49-F238E27FC236}">
-                <a16:creationId xmlns:a16="http://schemas.microsoft.com/office/drawing/2014/main" id="{42B9842A-C1EB-DFA6-14DA-7D7A5CCB75AF}"/>
+                <a16:creationId xmlns:a16="http://schemas.microsoft.com/office/drawing/2014/main" id="{BC0D4A3C-3E8D-0363-BBA3-83B1C8609C16}"/>
               </a:ext>
             </a:extLst>
           </p:cNvPr>
@@ -12986,7 +12986,7 @@
     </p:spTree>
     <p:extLst>
       <p:ext uri="{BB962C8B-B14F-4D97-AF65-F5344CB8AC3E}">
-        <p14:creationId xmlns:p14="http://schemas.microsoft.com/office/powerpoint/2010/main" val="3629818292"/>
+        <p14:creationId xmlns:p14="http://schemas.microsoft.com/office/powerpoint/2010/main" val="4064799498"/>
       </p:ext>
     </p:extLst>
   </p:cSld>
@@ -13894,7 +13894,7 @@
             </a:lvl1pPr>
           </a:lstStyle>
           <a:p>
-            <a:fld id="{91D5A71C-095D-4D8D-B06B-C24FC842AAAF}" type="datetimeFigureOut">
+            <a:fld id="{7B725182-F003-4077-8770-ED171BB46558}" type="datetimeFigureOut">
               <a:rPr lang="en-US" smtClean="0"/>
               <a:t>10/3/2026</a:t>
             </a:fld>
@@ -14004,7 +14004,7 @@
             </a:lvl1pPr>
           </a:lstStyle>
           <a:p>
-            <a:fld id="{67E77E8F-6FD3-4FA1-8A93-F369CE057DF3}" type="slidenum">
+            <a:fld id="{0120019D-D5E9-42EC-8806-1AB6BBDB44DC}" type="slidenum">
               <a:rPr lang="en-US" smtClean="0"/>
               <a:t>‹#›</a:t>
             </a:fld>
@@ -14015,7 +14015,7 @@
     </p:spTree>
     <p:extLst>
       <p:ext uri="{BB962C8B-B14F-4D97-AF65-F5344CB8AC3E}">
-        <p14:creationId xmlns:p14="http://schemas.microsoft.com/office/powerpoint/2010/main" val="4118774800"/>
+        <p14:creationId xmlns:p14="http://schemas.microsoft.com/office/powerpoint/2010/main" val="1673918415"/>
       </p:ext>
     </p:extLst>
   </p:cSld>
